--- a/08-materiais/modelos/abba-um-minuto.pptx
+++ b/08-materiais/modelos/abba-um-minuto.pptx
@@ -857,7 +857,7 @@
     <p:bg>
       <p:bgPr>
         <a:solidFill>
-          <a:srgbClr val="1B2A4A"/>
+          <a:srgbClr val="FFFFFF"/>
         </a:solidFill>
       </p:bgPr>
     </p:bg>
@@ -877,21 +877,100 @@
       </p:grpSpPr>
       <p:sp>
         <p:nvSpPr>
-          <p:cNvPr id="2" name="Shape 0"/>
-          <p:cNvSpPr/>
-          <p:nvPr/>
-        </p:nvSpPr>
-        <p:spPr>
-          <a:xfrm>
-            <a:off x="8595360" y="-1737360"/>
-            <a:ext cx="4937760" cy="4937760"/>
-          </a:xfrm>
-          <a:prstGeom prst="ellipse">
-            <a:avLst/>
-          </a:prstGeom>
-          <a:ln w="12700">
+          <p:cNvPr id="2" name="Text 0"/>
+          <p:cNvSpPr/>
+          <p:nvPr/>
+        </p:nvSpPr>
+        <p:spPr>
+          <a:xfrm>
+            <a:off x="777240" y="685800"/>
+            <a:ext cx="1828800" cy="292608"/>
+          </a:xfrm>
+          <a:prstGeom prst="rect">
+            <a:avLst/>
+          </a:prstGeom>
+          <a:noFill/>
+          <a:ln/>
+        </p:spPr>
+        <p:txBody>
+          <a:bodyPr wrap="square" lIns="0" tIns="0" rIns="0" bIns="0" rtlCol="0" anchor="ctr"/>
+          <a:lstStyle/>
+          <a:p>
+            <a:pPr indent="0" marL="0">
+              <a:buNone/>
+            </a:pPr>
+            <a:r>
+              <a:rPr lang="en-US" sz="1300" b="1" spc="500" kern="0" dirty="0">
+                <a:solidFill>
+                  <a:srgbClr val="1B2A4A"/>
+                </a:solidFill>
+                <a:latin typeface="Calibri" pitchFamily="34" charset="0"/>
+                <a:ea typeface="Calibri" pitchFamily="34" charset="-122"/>
+                <a:cs typeface="Calibri" pitchFamily="34" charset="-120"/>
+              </a:rPr>
+              <a:t>ABBA</a:t>
+            </a:r>
+            <a:endParaRPr lang="en-US" sz="1300" dirty="0"/>
+          </a:p>
+        </p:txBody>
+      </p:sp>
+      <p:sp>
+        <p:nvSpPr>
+          <p:cNvPr id="3" name="Text 1"/>
+          <p:cNvSpPr/>
+          <p:nvPr/>
+        </p:nvSpPr>
+        <p:spPr>
+          <a:xfrm>
+            <a:off x="777240" y="969264"/>
+            <a:ext cx="4114800" cy="201168"/>
+          </a:xfrm>
+          <a:prstGeom prst="rect">
+            <a:avLst/>
+          </a:prstGeom>
+          <a:noFill/>
+          <a:ln/>
+        </p:spPr>
+        <p:txBody>
+          <a:bodyPr wrap="square" lIns="0" tIns="0" rIns="0" bIns="0" rtlCol="0" anchor="ctr"/>
+          <a:lstStyle/>
+          <a:p>
+            <a:pPr indent="0" marL="0">
+              <a:buNone/>
+            </a:pPr>
+            <a:r>
+              <a:rPr lang="en-US" sz="800" spc="260" kern="0" dirty="0">
+                <a:solidFill>
+                  <a:srgbClr val="5A6472"/>
+                </a:solidFill>
+                <a:latin typeface="Calibri" pitchFamily="34" charset="0"/>
+                <a:ea typeface="Calibri" pitchFamily="34" charset="-122"/>
+                <a:cs typeface="Calibri" pitchFamily="34" charset="-120"/>
+              </a:rPr>
+              <a:t>CONSULTORIA DE INTELIGÊNCIA ARTIFICIAL</a:t>
+            </a:r>
+            <a:endParaRPr lang="en-US" sz="800" dirty="0"/>
+          </a:p>
+        </p:txBody>
+      </p:sp>
+      <p:sp>
+        <p:nvSpPr>
+          <p:cNvPr id="4" name="Shape 2"/>
+          <p:cNvSpPr/>
+          <p:nvPr/>
+        </p:nvSpPr>
+        <p:spPr>
+          <a:xfrm>
+            <a:off x="6537960" y="907085"/>
+            <a:ext cx="0" cy="1020470"/>
+          </a:xfrm>
+          <a:prstGeom prst="line">
+            <a:avLst/>
+          </a:prstGeom>
+          <a:noFill/>
+          <a:ln w="17780">
             <a:solidFill>
-              <a:srgbClr val="C2A35B"/>
+              <a:srgbClr val="B8985A"/>
             </a:solidFill>
             <a:prstDash val="solid"/>
           </a:ln>
@@ -899,14 +978,221 @@
       </p:sp>
       <p:sp>
         <p:nvSpPr>
-          <p:cNvPr id="3" name="Text 1"/>
-          <p:cNvSpPr/>
-          <p:nvPr/>
-        </p:nvSpPr>
-        <p:spPr>
-          <a:xfrm>
-            <a:off x="548640" y="457200"/>
-            <a:ext cx="2743200" cy="320040"/>
+          <p:cNvPr id="5" name="Shape 3"/>
+          <p:cNvSpPr/>
+          <p:nvPr/>
+        </p:nvSpPr>
+        <p:spPr>
+          <a:xfrm flipV="1">
+            <a:off x="6537960" y="1105510"/>
+            <a:ext cx="-311810" cy="-340157"/>
+          </a:xfrm>
+          <a:prstGeom prst="line">
+            <a:avLst/>
+          </a:prstGeom>
+          <a:noFill/>
+          <a:ln w="13970">
+            <a:solidFill>
+              <a:srgbClr val="B8985A"/>
+            </a:solidFill>
+            <a:prstDash val="solid"/>
+          </a:ln>
+        </p:spPr>
+      </p:sp>
+      <p:sp>
+        <p:nvSpPr>
+          <p:cNvPr id="6" name="Shape 4"/>
+          <p:cNvSpPr/>
+          <p:nvPr/>
+        </p:nvSpPr>
+        <p:spPr>
+          <a:xfrm flipV="1">
+            <a:off x="6537960" y="992124"/>
+            <a:ext cx="340157" cy="-311810"/>
+          </a:xfrm>
+          <a:prstGeom prst="line">
+            <a:avLst/>
+          </a:prstGeom>
+          <a:noFill/>
+          <a:ln w="13970">
+            <a:solidFill>
+              <a:srgbClr val="B8985A"/>
+            </a:solidFill>
+            <a:prstDash val="solid"/>
+          </a:ln>
+        </p:spPr>
+      </p:sp>
+      <p:sp>
+        <p:nvSpPr>
+          <p:cNvPr id="7" name="Shape 5"/>
+          <p:cNvSpPr/>
+          <p:nvPr/>
+        </p:nvSpPr>
+        <p:spPr>
+          <a:xfrm flipV="1">
+            <a:off x="6537960" y="1247242"/>
+            <a:ext cx="238110" cy="-255118"/>
+          </a:xfrm>
+          <a:prstGeom prst="line">
+            <a:avLst/>
+          </a:prstGeom>
+          <a:noFill/>
+          <a:ln w="11430">
+            <a:solidFill>
+              <a:srgbClr val="B8985A"/>
+            </a:solidFill>
+            <a:prstDash val="solid"/>
+          </a:ln>
+        </p:spPr>
+      </p:sp>
+      <p:sp>
+        <p:nvSpPr>
+          <p:cNvPr id="8" name="Shape 6"/>
+          <p:cNvSpPr/>
+          <p:nvPr/>
+        </p:nvSpPr>
+        <p:spPr>
+          <a:xfrm flipV="1">
+            <a:off x="6537960" y="1179210"/>
+            <a:ext cx="-192756" cy="-170078"/>
+          </a:xfrm>
+          <a:prstGeom prst="line">
+            <a:avLst/>
+          </a:prstGeom>
+          <a:noFill/>
+          <a:ln w="11430">
+            <a:solidFill>
+              <a:srgbClr val="B8985A"/>
+            </a:solidFill>
+            <a:prstDash val="solid"/>
+          </a:ln>
+        </p:spPr>
+      </p:sp>
+      <p:sp>
+        <p:nvSpPr>
+          <p:cNvPr id="9" name="Shape 7"/>
+          <p:cNvSpPr/>
+          <p:nvPr/>
+        </p:nvSpPr>
+        <p:spPr>
+          <a:xfrm>
+            <a:off x="6537960" y="1729130"/>
+            <a:ext cx="-351495" cy="283464"/>
+          </a:xfrm>
+          <a:prstGeom prst="line">
+            <a:avLst/>
+          </a:prstGeom>
+          <a:noFill/>
+          <a:ln w="13970">
+            <a:solidFill>
+              <a:srgbClr val="B8985A"/>
+            </a:solidFill>
+            <a:prstDash val="solid"/>
+          </a:ln>
+        </p:spPr>
+      </p:sp>
+      <p:sp>
+        <p:nvSpPr>
+          <p:cNvPr id="10" name="Shape 8"/>
+          <p:cNvSpPr/>
+          <p:nvPr/>
+        </p:nvSpPr>
+        <p:spPr>
+          <a:xfrm>
+            <a:off x="6537960" y="1814170"/>
+            <a:ext cx="328818" cy="255118"/>
+          </a:xfrm>
+          <a:prstGeom prst="line">
+            <a:avLst/>
+          </a:prstGeom>
+          <a:noFill/>
+          <a:ln w="13970">
+            <a:solidFill>
+              <a:srgbClr val="B8985A"/>
+            </a:solidFill>
+            <a:prstDash val="solid"/>
+          </a:ln>
+        </p:spPr>
+      </p:sp>
+      <p:sp>
+        <p:nvSpPr>
+          <p:cNvPr id="11" name="Shape 9"/>
+          <p:cNvSpPr/>
+          <p:nvPr/>
+        </p:nvSpPr>
+        <p:spPr>
+          <a:xfrm>
+            <a:off x="6537960" y="1615745"/>
+            <a:ext cx="170078" cy="198425"/>
+          </a:xfrm>
+          <a:prstGeom prst="line">
+            <a:avLst/>
+          </a:prstGeom>
+          <a:noFill/>
+          <a:ln w="11430">
+            <a:solidFill>
+              <a:srgbClr val="B8985A"/>
+            </a:solidFill>
+            <a:prstDash val="solid"/>
+          </a:ln>
+        </p:spPr>
+      </p:sp>
+      <p:sp>
+        <p:nvSpPr>
+          <p:cNvPr id="12" name="Shape 10"/>
+          <p:cNvSpPr/>
+          <p:nvPr/>
+        </p:nvSpPr>
+        <p:spPr>
+          <a:xfrm>
+            <a:off x="6537960" y="1672438"/>
+            <a:ext cx="-158740" cy="187086"/>
+          </a:xfrm>
+          <a:prstGeom prst="line">
+            <a:avLst/>
+          </a:prstGeom>
+          <a:noFill/>
+          <a:ln w="11430">
+            <a:solidFill>
+              <a:srgbClr val="B8985A"/>
+            </a:solidFill>
+            <a:prstDash val="solid"/>
+          </a:ln>
+        </p:spPr>
+      </p:sp>
+      <p:sp>
+        <p:nvSpPr>
+          <p:cNvPr id="13" name="Shape 11"/>
+          <p:cNvSpPr/>
+          <p:nvPr/>
+        </p:nvSpPr>
+        <p:spPr>
+          <a:xfrm>
+            <a:off x="6056071" y="1928470"/>
+            <a:ext cx="963778" cy="0"/>
+          </a:xfrm>
+          <a:prstGeom prst="line">
+            <a:avLst/>
+          </a:prstGeom>
+          <a:noFill/>
+          <a:ln w="9525">
+            <a:solidFill>
+              <a:srgbClr val="D9D2C4"/>
+            </a:solidFill>
+            <a:prstDash val="solid"/>
+          </a:ln>
+        </p:spPr>
+      </p:sp>
+      <p:sp>
+        <p:nvSpPr>
+          <p:cNvPr id="14" name="Text 12"/>
+          <p:cNvSpPr/>
+          <p:nvPr/>
+        </p:nvSpPr>
+        <p:spPr>
+          <a:xfrm>
+            <a:off x="777240" y="1600200"/>
+            <a:ext cx="5212080" cy="1280160"/>
           </a:xfrm>
           <a:prstGeom prst="rect">
             <a:avLst/>
@@ -919,33 +1205,101 @@
           <a:lstStyle/>
           <a:p>
             <a:pPr indent="0" marL="0">
-              <a:buNone/>
-            </a:pPr>
-            <a:r>
-              <a:rPr lang="en-US" sz="1500" b="1" spc="400" kern="0" dirty="0">
-                <a:solidFill>
-                  <a:srgbClr val="C2A35B"/>
+              <a:lnSpc>
+                <a:spcPts val="3600"/>
+              </a:lnSpc>
+              <a:buNone/>
+            </a:pPr>
+            <a:r>
+              <a:rPr lang="en-US" sz="3000" b="1" dirty="0">
+                <a:solidFill>
+                  <a:srgbClr val="1B2A4A"/>
+                </a:solidFill>
+                <a:latin typeface="Cambria" pitchFamily="34" charset="0"/>
+                <a:ea typeface="Cambria" pitchFamily="34" charset="-122"/>
+                <a:cs typeface="Cambria" pitchFamily="34" charset="-120"/>
+              </a:rPr>
+              <a:t>Tornamos a sua empresa AI native.</a:t>
+            </a:r>
+            <a:endParaRPr lang="en-US" sz="3000" dirty="0"/>
+          </a:p>
+        </p:txBody>
+      </p:sp>
+      <p:sp>
+        <p:nvSpPr>
+          <p:cNvPr id="15" name="Text 13"/>
+          <p:cNvSpPr/>
+          <p:nvPr/>
+        </p:nvSpPr>
+        <p:spPr>
+          <a:xfrm>
+            <a:off x="777240" y="2971800"/>
+            <a:ext cx="6007608" cy="640080"/>
+          </a:xfrm>
+          <a:prstGeom prst="rect">
+            <a:avLst/>
+          </a:prstGeom>
+          <a:noFill/>
+          <a:ln/>
+        </p:spPr>
+        <p:txBody>
+          <a:bodyPr wrap="square" lIns="0" tIns="0" rIns="0" bIns="0" rtlCol="0" anchor="ctr"/>
+          <a:lstStyle/>
+          <a:p>
+            <a:pPr indent="0" marL="0">
+              <a:lnSpc>
+                <a:spcPts val="1550"/>
+              </a:lnSpc>
+              <a:buNone/>
+            </a:pPr>
+            <a:r>
+              <a:rPr lang="en-US" sz="1100" dirty="0">
+                <a:solidFill>
+                  <a:srgbClr val="232B3A"/>
                 </a:solidFill>
                 <a:latin typeface="Calibri" pitchFamily="34" charset="0"/>
                 <a:ea typeface="Calibri" pitchFamily="34" charset="-122"/>
                 <a:cs typeface="Calibri" pitchFamily="34" charset="-120"/>
               </a:rPr>
-              <a:t>ABBA</a:t>
-            </a:r>
-            <a:endParaRPr lang="en-US" sz="1500" dirty="0"/>
-          </a:p>
-        </p:txBody>
-      </p:sp>
-      <p:sp>
-        <p:nvSpPr>
-          <p:cNvPr id="4" name="Text 2"/>
-          <p:cNvSpPr/>
-          <p:nvPr/>
-        </p:nvSpPr>
-        <p:spPr>
-          <a:xfrm>
-            <a:off x="548640" y="768096"/>
-            <a:ext cx="4572000" cy="274320"/>
+              <a:t>Construímos as soluções que melhoram o dia a dia da operação, formamos as pessoas para trabalhar com IA — e provamos o que mudou, com número combinado antes e medido depois.</a:t>
+            </a:r>
+            <a:endParaRPr lang="en-US" sz="1100" dirty="0"/>
+          </a:p>
+        </p:txBody>
+      </p:sp>
+      <p:sp>
+        <p:nvSpPr>
+          <p:cNvPr id="16" name="Shape 14"/>
+          <p:cNvSpPr/>
+          <p:nvPr/>
+        </p:nvSpPr>
+        <p:spPr>
+          <a:xfrm>
+            <a:off x="777240" y="3840480"/>
+            <a:ext cx="6007608" cy="0"/>
+          </a:xfrm>
+          <a:prstGeom prst="line">
+            <a:avLst/>
+          </a:prstGeom>
+          <a:noFill/>
+          <a:ln w="9525">
+            <a:solidFill>
+              <a:srgbClr val="D9D2C4"/>
+            </a:solidFill>
+            <a:prstDash val="solid"/>
+          </a:ln>
+        </p:spPr>
+      </p:sp>
+      <p:sp>
+        <p:nvSpPr>
+          <p:cNvPr id="17" name="Text 15"/>
+          <p:cNvSpPr/>
+          <p:nvPr/>
+        </p:nvSpPr>
+        <p:spPr>
+          <a:xfrm>
+            <a:off x="777240" y="4005072"/>
+            <a:ext cx="6007608" cy="219456"/>
           </a:xfrm>
           <a:prstGeom prst="rect">
             <a:avLst/>
@@ -961,30 +1315,30 @@
               <a:buNone/>
             </a:pPr>
             <a:r>
-              <a:rPr lang="en-US" sz="1050" dirty="0">
-                <a:solidFill>
-                  <a:srgbClr val="C9D2E4"/>
+              <a:rPr lang="en-US" sz="900" b="1" spc="320" kern="0" dirty="0">
+                <a:solidFill>
+                  <a:srgbClr val="B8985A"/>
                 </a:solidFill>
                 <a:latin typeface="Calibri" pitchFamily="34" charset="0"/>
                 <a:ea typeface="Calibri" pitchFamily="34" charset="-122"/>
                 <a:cs typeface="Calibri" pitchFamily="34" charset="-120"/>
               </a:rPr>
-              <a:t>Consultoria de Inteligência Artificial</a:t>
-            </a:r>
-            <a:endParaRPr lang="en-US" sz="1050" dirty="0"/>
-          </a:p>
-        </p:txBody>
-      </p:sp>
-      <p:sp>
-        <p:nvSpPr>
-          <p:cNvPr id="5" name="Text 3"/>
-          <p:cNvSpPr/>
-          <p:nvPr/>
-        </p:nvSpPr>
-        <p:spPr>
-          <a:xfrm>
-            <a:off x="548640" y="1463040"/>
-            <a:ext cx="6492240" cy="1188720"/>
+              <a:t>A JORNADA, EM SETE PASSOS</a:t>
+            </a:r>
+            <a:endParaRPr lang="en-US" sz="900" dirty="0"/>
+          </a:p>
+        </p:txBody>
+      </p:sp>
+      <p:sp>
+        <p:nvSpPr>
+          <p:cNvPr id="18" name="Text 16"/>
+          <p:cNvSpPr/>
+          <p:nvPr/>
+        </p:nvSpPr>
+        <p:spPr>
+          <a:xfrm>
+            <a:off x="777240" y="4288536"/>
+            <a:ext cx="457200" cy="457200"/>
           </a:xfrm>
           <a:prstGeom prst="rect">
             <a:avLst/>
@@ -1000,47 +1354,233 @@
               <a:buNone/>
             </a:pPr>
             <a:r>
-              <a:rPr lang="en-US" sz="3000" b="1" dirty="0">
-                <a:solidFill>
-                  <a:srgbClr val="FFFFFF"/>
+              <a:rPr lang="en-US" sz="2100" b="1" dirty="0">
+                <a:solidFill>
+                  <a:srgbClr val="B8985A"/>
+                </a:solidFill>
+                <a:latin typeface="Cambria" pitchFamily="34" charset="0"/>
+                <a:ea typeface="Cambria" pitchFamily="34" charset="-122"/>
+                <a:cs typeface="Cambria" pitchFamily="34" charset="-120"/>
+              </a:rPr>
+              <a:t>1</a:t>
+            </a:r>
+            <a:endParaRPr lang="en-US" sz="2100" dirty="0"/>
+          </a:p>
+        </p:txBody>
+      </p:sp>
+      <p:sp>
+        <p:nvSpPr>
+          <p:cNvPr id="19" name="Text 17"/>
+          <p:cNvSpPr/>
+          <p:nvPr/>
+        </p:nvSpPr>
+        <p:spPr>
+          <a:xfrm>
+            <a:off x="1325880" y="4343400"/>
+            <a:ext cx="5458968" cy="475488"/>
+          </a:xfrm>
+          <a:prstGeom prst="rect">
+            <a:avLst/>
+          </a:prstGeom>
+          <a:noFill/>
+          <a:ln/>
+        </p:spPr>
+        <p:txBody>
+          <a:bodyPr wrap="square" lIns="0" tIns="0" rIns="0" bIns="0" rtlCol="0" anchor="ctr"/>
+          <a:lstStyle/>
+          <a:p>
+            <a:pPr indent="0" marL="0">
+              <a:lnSpc>
+                <a:spcPts val="1350"/>
+              </a:lnSpc>
+              <a:buNone/>
+            </a:pPr>
+            <a:r>
+              <a:rPr lang="en-US" sz="1150" b="1" dirty="0">
+                <a:solidFill>
+                  <a:srgbClr val="1B2A4A"/>
+                </a:solidFill>
+                <a:latin typeface="Cambria" pitchFamily="34" charset="0"/>
+                <a:ea typeface="Cambria" pitchFamily="34" charset="-122"/>
+                <a:cs typeface="Cambria" pitchFamily="34" charset="-120"/>
+              </a:rPr>
+              <a:t>A primeira conversa  —  </a:t>
+            </a:r>
+            <a:pPr indent="0" marL="0">
+              <a:lnSpc>
+                <a:spcPts val="1350"/>
+              </a:lnSpc>
+              <a:buNone/>
+            </a:pPr>
+            <a:r>
+              <a:rPr lang="en-US" sz="980" dirty="0">
+                <a:solidFill>
+                  <a:srgbClr val="232B3A"/>
                 </a:solidFill>
                 <a:latin typeface="Calibri" pitchFamily="34" charset="0"/>
                 <a:ea typeface="Calibri" pitchFamily="34" charset="-122"/>
                 <a:cs typeface="Calibri" pitchFamily="34" charset="-120"/>
               </a:rPr>
-              <a:t>Tornamos a sua empresa</a:t>
-            </a:r>
-            <a:endParaRPr lang="en-US" sz="3000" dirty="0"/>
-          </a:p>
-          <a:p>
-            <a:pPr indent="0" marL="0">
-              <a:buNone/>
-            </a:pPr>
-            <a:r>
-              <a:rPr lang="en-US" sz="3000" b="1" dirty="0">
-                <a:solidFill>
-                  <a:srgbClr val="FFFFFF"/>
+              <a:t>45 minutos — e o Mapa de Vazamento gratuito, com uma estimativa em reais do que pode estar vazando.</a:t>
+            </a:r>
+            <a:endParaRPr lang="en-US" sz="1150" dirty="0"/>
+          </a:p>
+        </p:txBody>
+      </p:sp>
+      <p:sp>
+        <p:nvSpPr>
+          <p:cNvPr id="20" name="Shape 18"/>
+          <p:cNvSpPr/>
+          <p:nvPr/>
+        </p:nvSpPr>
+        <p:spPr>
+          <a:xfrm>
+            <a:off x="1325880" y="4837176"/>
+            <a:ext cx="5458968" cy="0"/>
+          </a:xfrm>
+          <a:prstGeom prst="line">
+            <a:avLst/>
+          </a:prstGeom>
+          <a:noFill/>
+          <a:ln w="9525">
+            <a:solidFill>
+              <a:srgbClr val="D9D2C4"/>
+            </a:solidFill>
+            <a:prstDash val="solid"/>
+          </a:ln>
+        </p:spPr>
+      </p:sp>
+      <p:sp>
+        <p:nvSpPr>
+          <p:cNvPr id="21" name="Text 19"/>
+          <p:cNvSpPr/>
+          <p:nvPr/>
+        </p:nvSpPr>
+        <p:spPr>
+          <a:xfrm>
+            <a:off x="777240" y="4855464"/>
+            <a:ext cx="457200" cy="457200"/>
+          </a:xfrm>
+          <a:prstGeom prst="rect">
+            <a:avLst/>
+          </a:prstGeom>
+          <a:noFill/>
+          <a:ln/>
+        </p:spPr>
+        <p:txBody>
+          <a:bodyPr wrap="square" lIns="0" tIns="0" rIns="0" bIns="0" rtlCol="0" anchor="ctr"/>
+          <a:lstStyle/>
+          <a:p>
+            <a:pPr indent="0" marL="0">
+              <a:buNone/>
+            </a:pPr>
+            <a:r>
+              <a:rPr lang="en-US" sz="2100" b="1" dirty="0">
+                <a:solidFill>
+                  <a:srgbClr val="B8985A"/>
+                </a:solidFill>
+                <a:latin typeface="Cambria" pitchFamily="34" charset="0"/>
+                <a:ea typeface="Cambria" pitchFamily="34" charset="-122"/>
+                <a:cs typeface="Cambria" pitchFamily="34" charset="-120"/>
+              </a:rPr>
+              <a:t>2</a:t>
+            </a:r>
+            <a:endParaRPr lang="en-US" sz="2100" dirty="0"/>
+          </a:p>
+        </p:txBody>
+      </p:sp>
+      <p:sp>
+        <p:nvSpPr>
+          <p:cNvPr id="22" name="Text 20"/>
+          <p:cNvSpPr/>
+          <p:nvPr/>
+        </p:nvSpPr>
+        <p:spPr>
+          <a:xfrm>
+            <a:off x="1325880" y="4910328"/>
+            <a:ext cx="5458968" cy="475488"/>
+          </a:xfrm>
+          <a:prstGeom prst="rect">
+            <a:avLst/>
+          </a:prstGeom>
+          <a:noFill/>
+          <a:ln/>
+        </p:spPr>
+        <p:txBody>
+          <a:bodyPr wrap="square" lIns="0" tIns="0" rIns="0" bIns="0" rtlCol="0" anchor="ctr"/>
+          <a:lstStyle/>
+          <a:p>
+            <a:pPr indent="0" marL="0">
+              <a:lnSpc>
+                <a:spcPts val="1350"/>
+              </a:lnSpc>
+              <a:buNone/>
+            </a:pPr>
+            <a:r>
+              <a:rPr lang="en-US" sz="1150" b="1" dirty="0">
+                <a:solidFill>
+                  <a:srgbClr val="1B2A4A"/>
+                </a:solidFill>
+                <a:latin typeface="Cambria" pitchFamily="34" charset="0"/>
+                <a:ea typeface="Cambria" pitchFamily="34" charset="-122"/>
+                <a:cs typeface="Cambria" pitchFamily="34" charset="-120"/>
+              </a:rPr>
+              <a:t>Assessment  —  </a:t>
+            </a:r>
+            <a:pPr indent="0" marL="0">
+              <a:lnSpc>
+                <a:spcPts val="1350"/>
+              </a:lnSpc>
+              <a:buNone/>
+            </a:pPr>
+            <a:r>
+              <a:rPr lang="en-US" sz="980" dirty="0">
+                <a:solidFill>
+                  <a:srgbClr val="232B3A"/>
                 </a:solidFill>
                 <a:latin typeface="Calibri" pitchFamily="34" charset="0"/>
                 <a:ea typeface="Calibri" pitchFamily="34" charset="-122"/>
                 <a:cs typeface="Calibri" pitchFamily="34" charset="-120"/>
               </a:rPr>
-              <a:t>AI native.</a:t>
-            </a:r>
-            <a:endParaRPr lang="en-US" sz="3000" dirty="0"/>
-          </a:p>
-        </p:txBody>
-      </p:sp>
-      <p:sp>
-        <p:nvSpPr>
-          <p:cNvPr id="6" name="Text 4"/>
-          <p:cNvSpPr/>
-          <p:nvPr/>
-        </p:nvSpPr>
-        <p:spPr>
-          <a:xfrm>
-            <a:off x="548640" y="2743200"/>
-            <a:ext cx="6492240" cy="685800"/>
+              <a:t>O mergulho em 25 dimensões, do conselho à linha de frente. Sai um portfólio ranqueado e quantificado.</a:t>
+            </a:r>
+            <a:endParaRPr lang="en-US" sz="1150" dirty="0"/>
+          </a:p>
+        </p:txBody>
+      </p:sp>
+      <p:sp>
+        <p:nvSpPr>
+          <p:cNvPr id="23" name="Shape 21"/>
+          <p:cNvSpPr/>
+          <p:nvPr/>
+        </p:nvSpPr>
+        <p:spPr>
+          <a:xfrm>
+            <a:off x="1325880" y="5404104"/>
+            <a:ext cx="5458968" cy="0"/>
+          </a:xfrm>
+          <a:prstGeom prst="line">
+            <a:avLst/>
+          </a:prstGeom>
+          <a:noFill/>
+          <a:ln w="9525">
+            <a:solidFill>
+              <a:srgbClr val="D9D2C4"/>
+            </a:solidFill>
+            <a:prstDash val="solid"/>
+          </a:ln>
+        </p:spPr>
+      </p:sp>
+      <p:sp>
+        <p:nvSpPr>
+          <p:cNvPr id="24" name="Text 22"/>
+          <p:cNvSpPr/>
+          <p:nvPr/>
+        </p:nvSpPr>
+        <p:spPr>
+          <a:xfrm>
+            <a:off x="777240" y="5422392"/>
+            <a:ext cx="457200" cy="457200"/>
           </a:xfrm>
           <a:prstGeom prst="rect">
             <a:avLst/>
@@ -1056,30 +1596,112 @@
               <a:buNone/>
             </a:pPr>
             <a:r>
-              <a:rPr lang="en-US" sz="1200" dirty="0">
-                <a:solidFill>
-                  <a:srgbClr val="C9D2E4"/>
+              <a:rPr lang="en-US" sz="2100" b="1" dirty="0">
+                <a:solidFill>
+                  <a:srgbClr val="B8985A"/>
+                </a:solidFill>
+                <a:latin typeface="Cambria" pitchFamily="34" charset="0"/>
+                <a:ea typeface="Cambria" pitchFamily="34" charset="-122"/>
+                <a:cs typeface="Cambria" pitchFamily="34" charset="-120"/>
+              </a:rPr>
+              <a:t>3</a:t>
+            </a:r>
+            <a:endParaRPr lang="en-US" sz="2100" dirty="0"/>
+          </a:p>
+        </p:txBody>
+      </p:sp>
+      <p:sp>
+        <p:nvSpPr>
+          <p:cNvPr id="25" name="Text 23"/>
+          <p:cNvSpPr/>
+          <p:nvPr/>
+        </p:nvSpPr>
+        <p:spPr>
+          <a:xfrm>
+            <a:off x="1325880" y="5477256"/>
+            <a:ext cx="5458968" cy="475488"/>
+          </a:xfrm>
+          <a:prstGeom prst="rect">
+            <a:avLst/>
+          </a:prstGeom>
+          <a:noFill/>
+          <a:ln/>
+        </p:spPr>
+        <p:txBody>
+          <a:bodyPr wrap="square" lIns="0" tIns="0" rIns="0" bIns="0" rtlCol="0" anchor="ctr"/>
+          <a:lstStyle/>
+          <a:p>
+            <a:pPr indent="0" marL="0">
+              <a:lnSpc>
+                <a:spcPts val="1350"/>
+              </a:lnSpc>
+              <a:buNone/>
+            </a:pPr>
+            <a:r>
+              <a:rPr lang="en-US" sz="1150" b="1" dirty="0">
+                <a:solidFill>
+                  <a:srgbClr val="1B2A4A"/>
+                </a:solidFill>
+                <a:latin typeface="Cambria" pitchFamily="34" charset="0"/>
+                <a:ea typeface="Cambria" pitchFamily="34" charset="-122"/>
+                <a:cs typeface="Cambria" pitchFamily="34" charset="-120"/>
+              </a:rPr>
+              <a:t>Protótipo de caso de uso  —  </a:t>
+            </a:r>
+            <a:pPr indent="0" marL="0">
+              <a:lnSpc>
+                <a:spcPts val="1350"/>
+              </a:lnSpc>
+              <a:buNone/>
+            </a:pPr>
+            <a:r>
+              <a:rPr lang="en-US" sz="980" dirty="0">
+                <a:solidFill>
+                  <a:srgbClr val="232B3A"/>
                 </a:solidFill>
                 <a:latin typeface="Calibri" pitchFamily="34" charset="0"/>
                 <a:ea typeface="Calibri" pitchFamily="34" charset="-122"/>
                 <a:cs typeface="Calibri" pitchFamily="34" charset="-120"/>
               </a:rPr>
-              <a:t>Construímos as soluções que melhoram o dia a dia da operação, formamos as pessoas para trabalhar com IA — e provamos o que mudou, com número combinado antes e medido depois.</a:t>
-            </a:r>
-            <a:endParaRPr lang="en-US" sz="1200" dirty="0"/>
-          </a:p>
-        </p:txBody>
-      </p:sp>
-      <p:sp>
-        <p:nvSpPr>
-          <p:cNvPr id="7" name="Text 5"/>
-          <p:cNvSpPr/>
-          <p:nvPr/>
-        </p:nvSpPr>
-        <p:spPr>
-          <a:xfrm>
-            <a:off x="548640" y="3703320"/>
-            <a:ext cx="6400800" cy="274320"/>
+              <a:t>Validação com os seus dados reais. A diretoria decide GO ou NO-GO com números na mesa.</a:t>
+            </a:r>
+            <a:endParaRPr lang="en-US" sz="1150" dirty="0"/>
+          </a:p>
+        </p:txBody>
+      </p:sp>
+      <p:sp>
+        <p:nvSpPr>
+          <p:cNvPr id="26" name="Shape 24"/>
+          <p:cNvSpPr/>
+          <p:nvPr/>
+        </p:nvSpPr>
+        <p:spPr>
+          <a:xfrm>
+            <a:off x="1325880" y="5971032"/>
+            <a:ext cx="5458968" cy="0"/>
+          </a:xfrm>
+          <a:prstGeom prst="line">
+            <a:avLst/>
+          </a:prstGeom>
+          <a:noFill/>
+          <a:ln w="9525">
+            <a:solidFill>
+              <a:srgbClr val="D9D2C4"/>
+            </a:solidFill>
+            <a:prstDash val="solid"/>
+          </a:ln>
+        </p:spPr>
+      </p:sp>
+      <p:sp>
+        <p:nvSpPr>
+          <p:cNvPr id="27" name="Text 25"/>
+          <p:cNvSpPr/>
+          <p:nvPr/>
+        </p:nvSpPr>
+        <p:spPr>
+          <a:xfrm>
+            <a:off x="777240" y="5989320"/>
+            <a:ext cx="457200" cy="457200"/>
           </a:xfrm>
           <a:prstGeom prst="rect">
             <a:avLst/>
@@ -1095,42 +1717,97 @@
               <a:buNone/>
             </a:pPr>
             <a:r>
-              <a:rPr lang="en-US" sz="1300" b="1" dirty="0">
-                <a:solidFill>
-                  <a:srgbClr val="C2A35B"/>
+              <a:rPr lang="en-US" sz="2100" b="1" dirty="0">
+                <a:solidFill>
+                  <a:srgbClr val="B8985A"/>
+                </a:solidFill>
+                <a:latin typeface="Cambria" pitchFamily="34" charset="0"/>
+                <a:ea typeface="Cambria" pitchFamily="34" charset="-122"/>
+                <a:cs typeface="Cambria" pitchFamily="34" charset="-120"/>
+              </a:rPr>
+              <a:t>4</a:t>
+            </a:r>
+            <a:endParaRPr lang="en-US" sz="2100" dirty="0"/>
+          </a:p>
+        </p:txBody>
+      </p:sp>
+      <p:sp>
+        <p:nvSpPr>
+          <p:cNvPr id="28" name="Text 26"/>
+          <p:cNvSpPr/>
+          <p:nvPr/>
+        </p:nvSpPr>
+        <p:spPr>
+          <a:xfrm>
+            <a:off x="1325880" y="6044184"/>
+            <a:ext cx="5458968" cy="475488"/>
+          </a:xfrm>
+          <a:prstGeom prst="rect">
+            <a:avLst/>
+          </a:prstGeom>
+          <a:noFill/>
+          <a:ln/>
+        </p:spPr>
+        <p:txBody>
+          <a:bodyPr wrap="square" lIns="0" tIns="0" rIns="0" bIns="0" rtlCol="0" anchor="ctr"/>
+          <a:lstStyle/>
+          <a:p>
+            <a:pPr indent="0" marL="0">
+              <a:lnSpc>
+                <a:spcPts val="1350"/>
+              </a:lnSpc>
+              <a:buNone/>
+            </a:pPr>
+            <a:r>
+              <a:rPr lang="en-US" sz="1150" b="1" dirty="0">
+                <a:solidFill>
+                  <a:srgbClr val="1B2A4A"/>
+                </a:solidFill>
+                <a:latin typeface="Cambria" pitchFamily="34" charset="0"/>
+                <a:ea typeface="Cambria" pitchFamily="34" charset="-122"/>
+                <a:cs typeface="Cambria" pitchFamily="34" charset="-120"/>
+              </a:rPr>
+              <a:t>Construção e implantação  —  </a:t>
+            </a:r>
+            <a:pPr indent="0" marL="0">
+              <a:lnSpc>
+                <a:spcPts val="1350"/>
+              </a:lnSpc>
+              <a:buNone/>
+            </a:pPr>
+            <a:r>
+              <a:rPr lang="en-US" sz="980" dirty="0">
+                <a:solidFill>
+                  <a:srgbClr val="232B3A"/>
                 </a:solidFill>
                 <a:latin typeface="Calibri" pitchFamily="34" charset="0"/>
                 <a:ea typeface="Calibri" pitchFamily="34" charset="-122"/>
                 <a:cs typeface="Calibri" pitchFamily="34" charset="-120"/>
               </a:rPr>
-              <a:t>Os serviços</a:t>
-            </a:r>
-            <a:endParaRPr lang="en-US" sz="1300" dirty="0"/>
-          </a:p>
-        </p:txBody>
-      </p:sp>
-      <p:sp>
-        <p:nvSpPr>
-          <p:cNvPr id="8" name="Shape 6"/>
-          <p:cNvSpPr/>
-          <p:nvPr/>
-        </p:nvSpPr>
-        <p:spPr>
-          <a:xfrm>
-            <a:off x="548640" y="4069080"/>
-            <a:ext cx="6492240" cy="475488"/>
-          </a:xfrm>
-          <a:prstGeom prst="roundRect">
-            <a:avLst>
-              <a:gd name="adj" fmla="val 19231"/>
-            </a:avLst>
-          </a:prstGeom>
-          <a:solidFill>
-            <a:srgbClr val="24365E"/>
-          </a:solidFill>
-          <a:ln w="6350">
+              <a:t>Agentes sob medida, em produção, com aprovação humana em tudo que é crítico.</a:t>
+            </a:r>
+            <a:endParaRPr lang="en-US" sz="1150" dirty="0"/>
+          </a:p>
+        </p:txBody>
+      </p:sp>
+      <p:sp>
+        <p:nvSpPr>
+          <p:cNvPr id="29" name="Shape 27"/>
+          <p:cNvSpPr/>
+          <p:nvPr/>
+        </p:nvSpPr>
+        <p:spPr>
+          <a:xfrm>
+            <a:off x="1325880" y="6537960"/>
+            <a:ext cx="5458968" cy="0"/>
+          </a:xfrm>
+          <a:prstGeom prst="line">
+            <a:avLst/>
+          </a:prstGeom>
+          <a:noFill/>
+          <a:ln w="9525">
             <a:solidFill>
-              <a:srgbClr val="C2A35B"/>
+              <a:srgbClr val="D9D2C4"/>
             </a:solidFill>
             <a:prstDash val="solid"/>
           </a:ln>
@@ -1138,14 +1815,14 @@
       </p:sp>
       <p:sp>
         <p:nvSpPr>
-          <p:cNvPr id="9" name="Text 7"/>
-          <p:cNvSpPr/>
-          <p:nvPr/>
-        </p:nvSpPr>
-        <p:spPr>
-          <a:xfrm>
-            <a:off x="777240" y="4142232"/>
-            <a:ext cx="6126480" cy="347472"/>
+          <p:cNvPr id="30" name="Text 28"/>
+          <p:cNvSpPr/>
+          <p:nvPr/>
+        </p:nvSpPr>
+        <p:spPr>
+          <a:xfrm>
+            <a:off x="777240" y="6556248"/>
+            <a:ext cx="457200" cy="457200"/>
           </a:xfrm>
           <a:prstGeom prst="rect">
             <a:avLst/>
@@ -1161,42 +1838,97 @@
               <a:buNone/>
             </a:pPr>
             <a:r>
-              <a:rPr lang="en-US" sz="1050" dirty="0">
-                <a:solidFill>
-                  <a:srgbClr val="FFFFFF"/>
+              <a:rPr lang="en-US" sz="2100" b="1" dirty="0">
+                <a:solidFill>
+                  <a:srgbClr val="B8985A"/>
+                </a:solidFill>
+                <a:latin typeface="Cambria" pitchFamily="34" charset="0"/>
+                <a:ea typeface="Cambria" pitchFamily="34" charset="-122"/>
+                <a:cs typeface="Cambria" pitchFamily="34" charset="-120"/>
+              </a:rPr>
+              <a:t>5</a:t>
+            </a:r>
+            <a:endParaRPr lang="en-US" sz="2100" dirty="0"/>
+          </a:p>
+        </p:txBody>
+      </p:sp>
+      <p:sp>
+        <p:nvSpPr>
+          <p:cNvPr id="31" name="Text 29"/>
+          <p:cNvSpPr/>
+          <p:nvPr/>
+        </p:nvSpPr>
+        <p:spPr>
+          <a:xfrm>
+            <a:off x="1325880" y="6611112"/>
+            <a:ext cx="5458968" cy="475488"/>
+          </a:xfrm>
+          <a:prstGeom prst="rect">
+            <a:avLst/>
+          </a:prstGeom>
+          <a:noFill/>
+          <a:ln/>
+        </p:spPr>
+        <p:txBody>
+          <a:bodyPr wrap="square" lIns="0" tIns="0" rIns="0" bIns="0" rtlCol="0" anchor="ctr"/>
+          <a:lstStyle/>
+          <a:p>
+            <a:pPr indent="0" marL="0">
+              <a:lnSpc>
+                <a:spcPts val="1350"/>
+              </a:lnSpc>
+              <a:buNone/>
+            </a:pPr>
+            <a:r>
+              <a:rPr lang="en-US" sz="1150" b="1" dirty="0">
+                <a:solidFill>
+                  <a:srgbClr val="1B2A4A"/>
+                </a:solidFill>
+                <a:latin typeface="Cambria" pitchFamily="34" charset="0"/>
+                <a:ea typeface="Cambria" pitchFamily="34" charset="-122"/>
+                <a:cs typeface="Cambria" pitchFamily="34" charset="-120"/>
+              </a:rPr>
+              <a:t>Treinamento + ABBA Portal  —  </a:t>
+            </a:r>
+            <a:pPr indent="0" marL="0">
+              <a:lnSpc>
+                <a:spcPts val="1350"/>
+              </a:lnSpc>
+              <a:buNone/>
+            </a:pPr>
+            <a:r>
+              <a:rPr lang="en-US" sz="980" dirty="0">
+                <a:solidFill>
+                  <a:srgbClr val="232B3A"/>
                 </a:solidFill>
                 <a:latin typeface="Calibri" pitchFamily="34" charset="0"/>
                 <a:ea typeface="Calibri" pitchFamily="34" charset="-122"/>
                 <a:cs typeface="Calibri" pitchFamily="34" charset="-120"/>
               </a:rPr>
-              <a:t>Assessment — mergulho em 25 dimensões, do conselho à linha de frente</a:t>
-            </a:r>
-            <a:endParaRPr lang="en-US" sz="1050" dirty="0"/>
-          </a:p>
-        </p:txBody>
-      </p:sp>
-      <p:sp>
-        <p:nvSpPr>
-          <p:cNvPr id="10" name="Shape 8"/>
-          <p:cNvSpPr/>
-          <p:nvPr/>
-        </p:nvSpPr>
-        <p:spPr>
-          <a:xfrm>
-            <a:off x="548640" y="4672584"/>
-            <a:ext cx="6492240" cy="475488"/>
-          </a:xfrm>
-          <a:prstGeom prst="roundRect">
-            <a:avLst>
-              <a:gd name="adj" fmla="val 19231"/>
-            </a:avLst>
-          </a:prstGeom>
-          <a:solidFill>
-            <a:srgbClr val="24365E"/>
-          </a:solidFill>
-          <a:ln w="6350">
+              <a:t>Todos os níveis: plataforma própria + presencial. Campeões internos carregam a transformação.</a:t>
+            </a:r>
+            <a:endParaRPr lang="en-US" sz="1150" dirty="0"/>
+          </a:p>
+        </p:txBody>
+      </p:sp>
+      <p:sp>
+        <p:nvSpPr>
+          <p:cNvPr id="32" name="Shape 30"/>
+          <p:cNvSpPr/>
+          <p:nvPr/>
+        </p:nvSpPr>
+        <p:spPr>
+          <a:xfrm>
+            <a:off x="1325880" y="7104888"/>
+            <a:ext cx="5458968" cy="0"/>
+          </a:xfrm>
+          <a:prstGeom prst="line">
+            <a:avLst/>
+          </a:prstGeom>
+          <a:noFill/>
+          <a:ln w="9525">
             <a:solidFill>
-              <a:srgbClr val="C2A35B"/>
+              <a:srgbClr val="D9D2C4"/>
             </a:solidFill>
             <a:prstDash val="solid"/>
           </a:ln>
@@ -1204,14 +1936,14 @@
       </p:sp>
       <p:sp>
         <p:nvSpPr>
-          <p:cNvPr id="11" name="Text 9"/>
-          <p:cNvSpPr/>
-          <p:nvPr/>
-        </p:nvSpPr>
-        <p:spPr>
-          <a:xfrm>
-            <a:off x="777240" y="4745736"/>
-            <a:ext cx="6126480" cy="347472"/>
+          <p:cNvPr id="33" name="Text 31"/>
+          <p:cNvSpPr/>
+          <p:nvPr/>
+        </p:nvSpPr>
+        <p:spPr>
+          <a:xfrm>
+            <a:off x="777240" y="7123176"/>
+            <a:ext cx="457200" cy="457200"/>
           </a:xfrm>
           <a:prstGeom prst="rect">
             <a:avLst/>
@@ -1227,42 +1959,97 @@
               <a:buNone/>
             </a:pPr>
             <a:r>
-              <a:rPr lang="en-US" sz="1050" dirty="0">
-                <a:solidFill>
-                  <a:srgbClr val="FFFFFF"/>
+              <a:rPr lang="en-US" sz="2100" b="1" dirty="0">
+                <a:solidFill>
+                  <a:srgbClr val="B8985A"/>
+                </a:solidFill>
+                <a:latin typeface="Cambria" pitchFamily="34" charset="0"/>
+                <a:ea typeface="Cambria" pitchFamily="34" charset="-122"/>
+                <a:cs typeface="Cambria" pitchFamily="34" charset="-120"/>
+              </a:rPr>
+              <a:t>6</a:t>
+            </a:r>
+            <a:endParaRPr lang="en-US" sz="2100" dirty="0"/>
+          </a:p>
+        </p:txBody>
+      </p:sp>
+      <p:sp>
+        <p:nvSpPr>
+          <p:cNvPr id="34" name="Text 32"/>
+          <p:cNvSpPr/>
+          <p:nvPr/>
+        </p:nvSpPr>
+        <p:spPr>
+          <a:xfrm>
+            <a:off x="1325880" y="7178040"/>
+            <a:ext cx="5458968" cy="475488"/>
+          </a:xfrm>
+          <a:prstGeom prst="rect">
+            <a:avLst/>
+          </a:prstGeom>
+          <a:noFill/>
+          <a:ln/>
+        </p:spPr>
+        <p:txBody>
+          <a:bodyPr wrap="square" lIns="0" tIns="0" rIns="0" bIns="0" rtlCol="0" anchor="ctr"/>
+          <a:lstStyle/>
+          <a:p>
+            <a:pPr indent="0" marL="0">
+              <a:lnSpc>
+                <a:spcPts val="1350"/>
+              </a:lnSpc>
+              <a:buNone/>
+            </a:pPr>
+            <a:r>
+              <a:rPr lang="en-US" sz="1150" b="1" dirty="0">
+                <a:solidFill>
+                  <a:srgbClr val="1B2A4A"/>
+                </a:solidFill>
+                <a:latin typeface="Cambria" pitchFamily="34" charset="0"/>
+                <a:ea typeface="Cambria" pitchFamily="34" charset="-122"/>
+                <a:cs typeface="Cambria" pitchFamily="34" charset="-120"/>
+              </a:rPr>
+              <a:t>Sistemas gerenciados  —  </a:t>
+            </a:r>
+            <a:pPr indent="0" marL="0">
+              <a:lnSpc>
+                <a:spcPts val="1350"/>
+              </a:lnSpc>
+              <a:buNone/>
+            </a:pPr>
+            <a:r>
+              <a:rPr lang="en-US" sz="980" dirty="0">
+                <a:solidFill>
+                  <a:srgbClr val="232B3A"/>
                 </a:solidFill>
                 <a:latin typeface="Calibri" pitchFamily="34" charset="0"/>
                 <a:ea typeface="Calibri" pitchFamily="34" charset="-122"/>
                 <a:cs typeface="Calibri" pitchFamily="34" charset="-120"/>
               </a:rPr>
-              <a:t>Protótipo de caso de uso — validação com dados reais, GO/NO-GO pela diretoria</a:t>
-            </a:r>
-            <a:endParaRPr lang="en-US" sz="1050" dirty="0"/>
-          </a:p>
-        </p:txBody>
-      </p:sp>
-      <p:sp>
-        <p:nvSpPr>
-          <p:cNvPr id="12" name="Shape 10"/>
-          <p:cNvSpPr/>
-          <p:nvPr/>
-        </p:nvSpPr>
-        <p:spPr>
-          <a:xfrm>
-            <a:off x="548640" y="5276088"/>
-            <a:ext cx="6492240" cy="475488"/>
-          </a:xfrm>
-          <a:prstGeom prst="roundRect">
-            <a:avLst>
-              <a:gd name="adj" fmla="val 19231"/>
-            </a:avLst>
-          </a:prstGeom>
-          <a:solidFill>
-            <a:srgbClr val="24365E"/>
-          </a:solidFill>
-          <a:ln w="6350">
+              <a:t>Operação com presença: ritual semanal de 20 minutos e o diário decisão → resultado medido.</a:t>
+            </a:r>
+            <a:endParaRPr lang="en-US" sz="1150" dirty="0"/>
+          </a:p>
+        </p:txBody>
+      </p:sp>
+      <p:sp>
+        <p:nvSpPr>
+          <p:cNvPr id="35" name="Shape 33"/>
+          <p:cNvSpPr/>
+          <p:nvPr/>
+        </p:nvSpPr>
+        <p:spPr>
+          <a:xfrm>
+            <a:off x="1325880" y="7671816"/>
+            <a:ext cx="5458968" cy="0"/>
+          </a:xfrm>
+          <a:prstGeom prst="line">
+            <a:avLst/>
+          </a:prstGeom>
+          <a:noFill/>
+          <a:ln w="9525">
             <a:solidFill>
-              <a:srgbClr val="C2A35B"/>
+              <a:srgbClr val="D9D2C4"/>
             </a:solidFill>
             <a:prstDash val="solid"/>
           </a:ln>
@@ -1270,14 +2057,14 @@
       </p:sp>
       <p:sp>
         <p:nvSpPr>
-          <p:cNvPr id="13" name="Text 11"/>
-          <p:cNvSpPr/>
-          <p:nvPr/>
-        </p:nvSpPr>
-        <p:spPr>
-          <a:xfrm>
-            <a:off x="777240" y="5349240"/>
-            <a:ext cx="6126480" cy="347472"/>
+          <p:cNvPr id="36" name="Text 34"/>
+          <p:cNvSpPr/>
+          <p:nvPr/>
+        </p:nvSpPr>
+        <p:spPr>
+          <a:xfrm>
+            <a:off x="777240" y="7690104"/>
+            <a:ext cx="457200" cy="457200"/>
           </a:xfrm>
           <a:prstGeom prst="rect">
             <a:avLst/>
@@ -1293,15 +2080,175 @@
               <a:buNone/>
             </a:pPr>
             <a:r>
-              <a:rPr lang="en-US" sz="1050" dirty="0">
-                <a:solidFill>
-                  <a:srgbClr val="FFFFFF"/>
+              <a:rPr lang="en-US" sz="2100" b="1" dirty="0">
+                <a:solidFill>
+                  <a:srgbClr val="B8985A"/>
+                </a:solidFill>
+                <a:latin typeface="Cambria" pitchFamily="34" charset="0"/>
+                <a:ea typeface="Cambria" pitchFamily="34" charset="-122"/>
+                <a:cs typeface="Cambria" pitchFamily="34" charset="-120"/>
+              </a:rPr>
+              <a:t>7</a:t>
+            </a:r>
+            <a:endParaRPr lang="en-US" sz="2100" dirty="0"/>
+          </a:p>
+        </p:txBody>
+      </p:sp>
+      <p:sp>
+        <p:nvSpPr>
+          <p:cNvPr id="37" name="Text 35"/>
+          <p:cNvSpPr/>
+          <p:nvPr/>
+        </p:nvSpPr>
+        <p:spPr>
+          <a:xfrm>
+            <a:off x="1325880" y="7744968"/>
+            <a:ext cx="5458968" cy="475488"/>
+          </a:xfrm>
+          <a:prstGeom prst="rect">
+            <a:avLst/>
+          </a:prstGeom>
+          <a:noFill/>
+          <a:ln/>
+        </p:spPr>
+        <p:txBody>
+          <a:bodyPr wrap="square" lIns="0" tIns="0" rIns="0" bIns="0" rtlCol="0" anchor="ctr"/>
+          <a:lstStyle/>
+          <a:p>
+            <a:pPr indent="0" marL="0">
+              <a:lnSpc>
+                <a:spcPts val="1350"/>
+              </a:lnSpc>
+              <a:buNone/>
+            </a:pPr>
+            <a:r>
+              <a:rPr lang="en-US" sz="1150" b="1" dirty="0">
+                <a:solidFill>
+                  <a:srgbClr val="1B2A4A"/>
+                </a:solidFill>
+                <a:latin typeface="Cambria" pitchFamily="34" charset="0"/>
+                <a:ea typeface="Cambria" pitchFamily="34" charset="-122"/>
+                <a:cs typeface="Cambria" pitchFamily="34" charset="-120"/>
+              </a:rPr>
+              <a:t>Conselheiro de IA  —  </a:t>
+            </a:r>
+            <a:pPr indent="0" marL="0">
+              <a:lnSpc>
+                <a:spcPts val="1350"/>
+              </a:lnSpc>
+              <a:buNone/>
+            </a:pPr>
+            <a:r>
+              <a:rPr lang="en-US" sz="980" dirty="0">
+                <a:solidFill>
+                  <a:srgbClr val="232B3A"/>
                 </a:solidFill>
                 <a:latin typeface="Calibri" pitchFamily="34" charset="0"/>
                 <a:ea typeface="Calibri" pitchFamily="34" charset="-122"/>
                 <a:cs typeface="Calibri" pitchFamily="34" charset="-120"/>
               </a:rPr>
-              <a:t>Construção e implantação — agentes sob medida, em produção</a:t>
+              <a:t>A cadeira de estrategista do seu lado da mesa — também para quem já tem IA rodando.</a:t>
+            </a:r>
+            <a:endParaRPr lang="en-US" sz="1150" dirty="0"/>
+          </a:p>
+        </p:txBody>
+      </p:sp>
+      <p:sp>
+        <p:nvSpPr>
+          <p:cNvPr id="38" name="Shape 36"/>
+          <p:cNvSpPr/>
+          <p:nvPr/>
+        </p:nvSpPr>
+        <p:spPr>
+          <a:xfrm>
+            <a:off x="777240" y="8458200"/>
+            <a:ext cx="6007608" cy="914400"/>
+          </a:xfrm>
+          <a:prstGeom prst="rect">
+            <a:avLst/>
+          </a:prstGeom>
+          <a:solidFill>
+            <a:srgbClr val="F7F4EE"/>
+          </a:solidFill>
+          <a:ln/>
+        </p:spPr>
+      </p:sp>
+      <p:sp>
+        <p:nvSpPr>
+          <p:cNvPr id="39" name="Text 37"/>
+          <p:cNvSpPr/>
+          <p:nvPr/>
+        </p:nvSpPr>
+        <p:spPr>
+          <a:xfrm>
+            <a:off x="1051560" y="8577072"/>
+            <a:ext cx="5458968" cy="219456"/>
+          </a:xfrm>
+          <a:prstGeom prst="rect">
+            <a:avLst/>
+          </a:prstGeom>
+          <a:noFill/>
+          <a:ln/>
+        </p:spPr>
+        <p:txBody>
+          <a:bodyPr wrap="square" lIns="0" tIns="0" rIns="0" bIns="0" rtlCol="0" anchor="ctr"/>
+          <a:lstStyle/>
+          <a:p>
+            <a:pPr indent="0" marL="0">
+              <a:buNone/>
+            </a:pPr>
+            <a:r>
+              <a:rPr lang="en-US" sz="800" b="1" spc="200" kern="0" dirty="0">
+                <a:solidFill>
+                  <a:srgbClr val="B8985A"/>
+                </a:solidFill>
+                <a:latin typeface="Calibri" pitchFamily="34" charset="0"/>
+                <a:ea typeface="Calibri" pitchFamily="34" charset="-122"/>
+                <a:cs typeface="Calibri" pitchFamily="34" charset="-120"/>
+              </a:rPr>
+              <a:t>A mentalidade que instalamos em cada colaborador:</a:t>
+            </a:r>
+            <a:endParaRPr lang="en-US" sz="800" dirty="0"/>
+          </a:p>
+        </p:txBody>
+      </p:sp>
+      <p:sp>
+        <p:nvSpPr>
+          <p:cNvPr id="40" name="Text 38"/>
+          <p:cNvSpPr/>
+          <p:nvPr/>
+        </p:nvSpPr>
+        <p:spPr>
+          <a:xfrm>
+            <a:off x="1051560" y="8814816"/>
+            <a:ext cx="5458968" cy="475488"/>
+          </a:xfrm>
+          <a:prstGeom prst="rect">
+            <a:avLst/>
+          </a:prstGeom>
+          <a:noFill/>
+          <a:ln/>
+        </p:spPr>
+        <p:txBody>
+          <a:bodyPr wrap="square" lIns="0" tIns="0" rIns="0" bIns="0" rtlCol="0" anchor="ctr"/>
+          <a:lstStyle/>
+          <a:p>
+            <a:pPr indent="0" marL="0">
+              <a:lnSpc>
+                <a:spcPts val="1450"/>
+              </a:lnSpc>
+              <a:buNone/>
+            </a:pPr>
+            <a:r>
+              <a:rPr lang="en-US" sz="1050" i="1" dirty="0">
+                <a:solidFill>
+                  <a:srgbClr val="1B2A4A"/>
+                </a:solidFill>
+                <a:latin typeface="Cambria" pitchFamily="34" charset="0"/>
+                <a:ea typeface="Cambria" pitchFamily="34" charset="-122"/>
+                <a:cs typeface="Cambria" pitchFamily="34" charset="-120"/>
+              </a:rPr>
+              <a:t>O que eu posso parar de fazer, porque a IA agora faz? · O que posso começar a fazer, porque a IA agora permite? · O que só eu faço — e devo fazer ainda melhor?</a:t>
             </a:r>
             <a:endParaRPr lang="en-US" sz="1050" dirty="0"/>
           </a:p>
@@ -1309,26 +2256,114 @@
       </p:sp>
       <p:sp>
         <p:nvSpPr>
-          <p:cNvPr id="14" name="Shape 12"/>
-          <p:cNvSpPr/>
-          <p:nvPr/>
-        </p:nvSpPr>
-        <p:spPr>
-          <a:xfrm>
-            <a:off x="548640" y="5879592"/>
-            <a:ext cx="6492240" cy="475488"/>
-          </a:xfrm>
-          <a:prstGeom prst="roundRect">
-            <a:avLst>
-              <a:gd name="adj" fmla="val 19231"/>
-            </a:avLst>
-          </a:prstGeom>
-          <a:solidFill>
-            <a:srgbClr val="24365E"/>
-          </a:solidFill>
-          <a:ln w="6350">
+          <p:cNvPr id="41" name="Text 39"/>
+          <p:cNvSpPr/>
+          <p:nvPr/>
+        </p:nvSpPr>
+        <p:spPr>
+          <a:xfrm>
+            <a:off x="777240" y="9509760"/>
+            <a:ext cx="6007608" cy="228600"/>
+          </a:xfrm>
+          <a:prstGeom prst="rect">
+            <a:avLst/>
+          </a:prstGeom>
+          <a:noFill/>
+          <a:ln/>
+        </p:spPr>
+        <p:txBody>
+          <a:bodyPr wrap="square" lIns="0" tIns="0" rIns="0" bIns="0" rtlCol="0" anchor="ctr"/>
+          <a:lstStyle/>
+          <a:p>
+            <a:pPr indent="0" marL="0">
+              <a:buNone/>
+            </a:pPr>
+            <a:r>
+              <a:rPr lang="en-US" sz="750" b="1" spc="200" kern="0" dirty="0">
+                <a:solidFill>
+                  <a:srgbClr val="B8985A"/>
+                </a:solidFill>
+                <a:latin typeface="Calibri" pitchFamily="34" charset="0"/>
+                <a:ea typeface="Calibri" pitchFamily="34" charset="-122"/>
+                <a:cs typeface="Calibri" pitchFamily="34" charset="-120"/>
+              </a:rPr>
+              <a:t>PARCEIROS OFICIAIS   </a:t>
+            </a:r>
+            <a:pPr indent="0" marL="0">
+              <a:buNone/>
+            </a:pPr>
+            <a:r>
+              <a:rPr lang="en-US" sz="950" dirty="0">
+                <a:solidFill>
+                  <a:srgbClr val="232B3A"/>
+                </a:solidFill>
+                <a:latin typeface="Calibri" pitchFamily="34" charset="0"/>
+                <a:ea typeface="Calibri" pitchFamily="34" charset="-122"/>
+                <a:cs typeface="Calibri" pitchFamily="34" charset="-120"/>
+              </a:rPr>
+              <a:t>Microsoft e CrewAI</a:t>
+            </a:r>
+            <a:endParaRPr lang="en-US" sz="750" dirty="0"/>
+          </a:p>
+        </p:txBody>
+      </p:sp>
+      <p:sp>
+        <p:nvSpPr>
+          <p:cNvPr id="42" name="Text 40"/>
+          <p:cNvSpPr/>
+          <p:nvPr/>
+        </p:nvSpPr>
+        <p:spPr>
+          <a:xfrm>
+            <a:off x="777240" y="9765792"/>
+            <a:ext cx="6007608" cy="274320"/>
+          </a:xfrm>
+          <a:prstGeom prst="rect">
+            <a:avLst/>
+          </a:prstGeom>
+          <a:noFill/>
+          <a:ln/>
+        </p:spPr>
+        <p:txBody>
+          <a:bodyPr wrap="square" lIns="0" tIns="0" rIns="0" bIns="0" rtlCol="0" anchor="ctr"/>
+          <a:lstStyle/>
+          <a:p>
+            <a:pPr indent="0" marL="0">
+              <a:buNone/>
+            </a:pPr>
+            <a:r>
+              <a:rPr lang="en-US" sz="950" dirty="0">
+                <a:solidFill>
+                  <a:srgbClr val="232B3A"/>
+                </a:solidFill>
+                <a:latin typeface="Calibri" pitchFamily="34" charset="0"/>
+                <a:ea typeface="Calibri" pitchFamily="34" charset="-122"/>
+                <a:cs typeface="Calibri" pitchFamily="34" charset="-120"/>
+              </a:rPr>
+              <a:t>O primeiro passo não custa nada: o seu Mapa de Vazamento, em 48 horas.  ·  comercial@abbaservices.com.br</a:t>
+            </a:r>
+            <a:endParaRPr lang="en-US" sz="950" dirty="0"/>
+          </a:p>
+        </p:txBody>
+      </p:sp>
+      <p:sp>
+        <p:nvSpPr>
+          <p:cNvPr id="43" name="Shape 41"/>
+          <p:cNvSpPr/>
+          <p:nvPr/>
+        </p:nvSpPr>
+        <p:spPr>
+          <a:xfrm>
+            <a:off x="777240" y="10195560"/>
+            <a:ext cx="6007608" cy="0"/>
+          </a:xfrm>
+          <a:prstGeom prst="line">
+            <a:avLst/>
+          </a:prstGeom>
+          <a:noFill/>
+          <a:ln w="9525">
             <a:solidFill>
-              <a:srgbClr val="C2A35B"/>
+              <a:srgbClr val="D9D2C4"/>
             </a:solidFill>
             <a:prstDash val="solid"/>
           </a:ln>
@@ -1336,14 +2371,14 @@
       </p:sp>
       <p:sp>
         <p:nvSpPr>
-          <p:cNvPr id="15" name="Text 13"/>
-          <p:cNvSpPr/>
-          <p:nvPr/>
-        </p:nvSpPr>
-        <p:spPr>
-          <a:xfrm>
-            <a:off x="777240" y="5952744"/>
-            <a:ext cx="6126480" cy="347472"/>
+          <p:cNvPr id="44" name="Text 42"/>
+          <p:cNvSpPr/>
+          <p:nvPr/>
+        </p:nvSpPr>
+        <p:spPr>
+          <a:xfrm>
+            <a:off x="777240" y="10277856"/>
+            <a:ext cx="4389120" cy="201168"/>
           </a:xfrm>
           <a:prstGeom prst="rect">
             <a:avLst/>
@@ -1359,57 +2394,30 @@
               <a:buNone/>
             </a:pPr>
             <a:r>
-              <a:rPr lang="en-US" sz="1050" dirty="0">
-                <a:solidFill>
-                  <a:srgbClr val="FFFFFF"/>
+              <a:rPr lang="en-US" sz="750" spc="220" kern="0" dirty="0">
+                <a:solidFill>
+                  <a:srgbClr val="5A6472"/>
                 </a:solidFill>
                 <a:latin typeface="Calibri" pitchFamily="34" charset="0"/>
                 <a:ea typeface="Calibri" pitchFamily="34" charset="-122"/>
                 <a:cs typeface="Calibri" pitchFamily="34" charset="-120"/>
               </a:rPr>
-              <a:t>Treinamento + ABBA Portal — todos os níveis, plataforma própria + presencial</a:t>
-            </a:r>
-            <a:endParaRPr lang="en-US" sz="1050" dirty="0"/>
-          </a:p>
-        </p:txBody>
-      </p:sp>
-      <p:sp>
-        <p:nvSpPr>
-          <p:cNvPr id="16" name="Shape 14"/>
-          <p:cNvSpPr/>
-          <p:nvPr/>
-        </p:nvSpPr>
-        <p:spPr>
-          <a:xfrm>
-            <a:off x="548640" y="6483096"/>
-            <a:ext cx="6492240" cy="475488"/>
-          </a:xfrm>
-          <a:prstGeom prst="roundRect">
-            <a:avLst>
-              <a:gd name="adj" fmla="val 19231"/>
-            </a:avLst>
-          </a:prstGeom>
-          <a:solidFill>
-            <a:srgbClr val="24365E"/>
-          </a:solidFill>
-          <a:ln w="6350">
-            <a:solidFill>
-              <a:srgbClr val="C2A35B"/>
-            </a:solidFill>
-            <a:prstDash val="solid"/>
-          </a:ln>
-        </p:spPr>
-      </p:sp>
-      <p:sp>
-        <p:nvSpPr>
-          <p:cNvPr id="17" name="Text 15"/>
-          <p:cNvSpPr/>
-          <p:nvPr/>
-        </p:nvSpPr>
-        <p:spPr>
-          <a:xfrm>
-            <a:off x="777240" y="6556248"/>
-            <a:ext cx="6126480" cy="347472"/>
+              <a:t>ABBA — CONSULTORIA DE INTELIGÊNCIA ARTIFICIAL</a:t>
+            </a:r>
+            <a:endParaRPr lang="en-US" sz="750" dirty="0"/>
+          </a:p>
+        </p:txBody>
+      </p:sp>
+      <p:sp>
+        <p:nvSpPr>
+          <p:cNvPr id="45" name="Text 43"/>
+          <p:cNvSpPr/>
+          <p:nvPr/>
+        </p:nvSpPr>
+        <p:spPr>
+          <a:xfrm>
+            <a:off x="4773168" y="10277856"/>
+            <a:ext cx="2011680" cy="201168"/>
           </a:xfrm>
           <a:prstGeom prst="rect">
             <a:avLst/>
@@ -1421,304 +2429,21 @@
           <a:bodyPr wrap="square" lIns="0" tIns="0" rIns="0" bIns="0" rtlCol="0" anchor="ctr"/>
           <a:lstStyle/>
           <a:p>
-            <a:pPr indent="0" marL="0">
-              <a:buNone/>
-            </a:pPr>
-            <a:r>
-              <a:rPr lang="en-US" sz="1050" dirty="0">
-                <a:solidFill>
-                  <a:srgbClr val="FFFFFF"/>
+            <a:pPr algn="r" indent="0" marL="0">
+              <a:buNone/>
+            </a:pPr>
+            <a:r>
+              <a:rPr lang="en-US" sz="750" spc="220" kern="0" dirty="0">
+                <a:solidFill>
+                  <a:srgbClr val="5A6472"/>
                 </a:solidFill>
                 <a:latin typeface="Calibri" pitchFamily="34" charset="0"/>
                 <a:ea typeface="Calibri" pitchFamily="34" charset="-122"/>
                 <a:cs typeface="Calibri" pitchFamily="34" charset="-120"/>
               </a:rPr>
-              <a:t>Sistemas gerenciados — operação com presença e resultado medido</a:t>
-            </a:r>
-            <a:endParaRPr lang="en-US" sz="1050" dirty="0"/>
-          </a:p>
-        </p:txBody>
-      </p:sp>
-      <p:sp>
-        <p:nvSpPr>
-          <p:cNvPr id="18" name="Shape 16"/>
-          <p:cNvSpPr/>
-          <p:nvPr/>
-        </p:nvSpPr>
-        <p:spPr>
-          <a:xfrm>
-            <a:off x="548640" y="7086600"/>
-            <a:ext cx="6492240" cy="475488"/>
-          </a:xfrm>
-          <a:prstGeom prst="roundRect">
-            <a:avLst>
-              <a:gd name="adj" fmla="val 19231"/>
-            </a:avLst>
-          </a:prstGeom>
-          <a:solidFill>
-            <a:srgbClr val="24365E"/>
-          </a:solidFill>
-          <a:ln w="6350">
-            <a:solidFill>
-              <a:srgbClr val="C2A35B"/>
-            </a:solidFill>
-            <a:prstDash val="solid"/>
-          </a:ln>
-        </p:spPr>
-      </p:sp>
-      <p:sp>
-        <p:nvSpPr>
-          <p:cNvPr id="19" name="Text 17"/>
-          <p:cNvSpPr/>
-          <p:nvPr/>
-        </p:nvSpPr>
-        <p:spPr>
-          <a:xfrm>
-            <a:off x="777240" y="7159752"/>
-            <a:ext cx="6126480" cy="347472"/>
-          </a:xfrm>
-          <a:prstGeom prst="rect">
-            <a:avLst/>
-          </a:prstGeom>
-          <a:noFill/>
-          <a:ln/>
-        </p:spPr>
-        <p:txBody>
-          <a:bodyPr wrap="square" lIns="0" tIns="0" rIns="0" bIns="0" rtlCol="0" anchor="ctr"/>
-          <a:lstStyle/>
-          <a:p>
-            <a:pPr indent="0" marL="0">
-              <a:buNone/>
-            </a:pPr>
-            <a:r>
-              <a:rPr lang="en-US" sz="1050" dirty="0">
-                <a:solidFill>
-                  <a:srgbClr val="FFFFFF"/>
-                </a:solidFill>
-                <a:latin typeface="Calibri" pitchFamily="34" charset="0"/>
-                <a:ea typeface="Calibri" pitchFamily="34" charset="-122"/>
-                <a:cs typeface="Calibri" pitchFamily="34" charset="-120"/>
-              </a:rPr>
-              <a:t>Conselheiro de IA — a cadeira de estrategista do seu lado da mesa</a:t>
-            </a:r>
-            <a:endParaRPr lang="en-US" sz="1050" dirty="0"/>
-          </a:p>
-        </p:txBody>
-      </p:sp>
-      <p:sp>
-        <p:nvSpPr>
-          <p:cNvPr id="20" name="Shape 18"/>
-          <p:cNvSpPr/>
-          <p:nvPr/>
-        </p:nvSpPr>
-        <p:spPr>
-          <a:xfrm>
-            <a:off x="548640" y="7863840"/>
-            <a:ext cx="6492240" cy="1417320"/>
-          </a:xfrm>
-          <a:prstGeom prst="roundRect">
-            <a:avLst>
-              <a:gd name="adj" fmla="val 3871"/>
-            </a:avLst>
-          </a:prstGeom>
-          <a:solidFill>
-            <a:srgbClr val="24365E"/>
-          </a:solidFill>
-          <a:ln/>
-        </p:spPr>
-      </p:sp>
-      <p:sp>
-        <p:nvSpPr>
-          <p:cNvPr id="21" name="Text 19"/>
-          <p:cNvSpPr/>
-          <p:nvPr/>
-        </p:nvSpPr>
-        <p:spPr>
-          <a:xfrm>
-            <a:off x="777240" y="8001000"/>
-            <a:ext cx="6035040" cy="274320"/>
-          </a:xfrm>
-          <a:prstGeom prst="rect">
-            <a:avLst/>
-          </a:prstGeom>
-          <a:noFill/>
-          <a:ln/>
-        </p:spPr>
-        <p:txBody>
-          <a:bodyPr wrap="square" lIns="0" tIns="0" rIns="0" bIns="0" rtlCol="0" anchor="ctr"/>
-          <a:lstStyle/>
-          <a:p>
-            <a:pPr indent="0" marL="0">
-              <a:buNone/>
-            </a:pPr>
-            <a:r>
-              <a:rPr lang="en-US" sz="1050" b="1" dirty="0">
-                <a:solidFill>
-                  <a:srgbClr val="C2A35B"/>
-                </a:solidFill>
-                <a:latin typeface="Calibri" pitchFamily="34" charset="0"/>
-                <a:ea typeface="Calibri" pitchFamily="34" charset="-122"/>
-                <a:cs typeface="Calibri" pitchFamily="34" charset="-120"/>
-              </a:rPr>
-              <a:t>A mentalidade que instalamos em cada colaborador:</a:t>
-            </a:r>
-            <a:endParaRPr lang="en-US" sz="1050" dirty="0"/>
-          </a:p>
-        </p:txBody>
-      </p:sp>
-      <p:sp>
-        <p:nvSpPr>
-          <p:cNvPr id="22" name="Text 20"/>
-          <p:cNvSpPr/>
-          <p:nvPr/>
-        </p:nvSpPr>
-        <p:spPr>
-          <a:xfrm>
-            <a:off x="777240" y="8321040"/>
-            <a:ext cx="6035040" cy="777240"/>
-          </a:xfrm>
-          <a:prstGeom prst="rect">
-            <a:avLst/>
-          </a:prstGeom>
-          <a:noFill/>
-          <a:ln/>
-        </p:spPr>
-        <p:txBody>
-          <a:bodyPr wrap="square" lIns="0" tIns="0" rIns="0" bIns="0" rtlCol="0" anchor="ctr"/>
-          <a:lstStyle/>
-          <a:p>
-            <a:pPr indent="0" marL="0">
-              <a:buNone/>
-            </a:pPr>
-            <a:r>
-              <a:rPr lang="en-US" sz="1050" dirty="0">
-                <a:solidFill>
-                  <a:srgbClr val="FFFFFF"/>
-                </a:solidFill>
-                <a:latin typeface="Calibri" pitchFamily="34" charset="0"/>
-                <a:ea typeface="Calibri" pitchFamily="34" charset="-122"/>
-                <a:cs typeface="Calibri" pitchFamily="34" charset="-120"/>
-              </a:rPr>
-              <a:t>O que eu posso PARAR de fazer, porque a IA agora faz?  ·  O que posso COMEÇAR a fazer, porque a IA agora permite?  ·  O que SÓ EU faço — e devo fazer ainda melhor?</a:t>
-            </a:r>
-            <a:endParaRPr lang="en-US" sz="1050" dirty="0"/>
-          </a:p>
-        </p:txBody>
-      </p:sp>
-      <p:sp>
-        <p:nvSpPr>
-          <p:cNvPr id="23" name="Text 21"/>
-          <p:cNvSpPr/>
-          <p:nvPr/>
-        </p:nvSpPr>
-        <p:spPr>
-          <a:xfrm>
-            <a:off x="548640" y="9464040"/>
-            <a:ext cx="6492240" cy="274320"/>
-          </a:xfrm>
-          <a:prstGeom prst="rect">
-            <a:avLst/>
-          </a:prstGeom>
-          <a:noFill/>
-          <a:ln/>
-        </p:spPr>
-        <p:txBody>
-          <a:bodyPr wrap="square" lIns="0" tIns="0" rIns="0" bIns="0" rtlCol="0" anchor="ctr"/>
-          <a:lstStyle/>
-          <a:p>
-            <a:pPr indent="0" marL="0">
-              <a:buNone/>
-            </a:pPr>
-            <a:r>
-              <a:rPr lang="en-US" sz="1050" b="1" dirty="0">
-                <a:solidFill>
-                  <a:srgbClr val="C2A35B"/>
-                </a:solidFill>
-                <a:latin typeface="Calibri" pitchFamily="34" charset="0"/>
-                <a:ea typeface="Calibri" pitchFamily="34" charset="-122"/>
-                <a:cs typeface="Calibri" pitchFamily="34" charset="-120"/>
-              </a:rPr>
-              <a:t>Parceiros oficiais: Microsoft · CrewAI</a:t>
-            </a:r>
-            <a:endParaRPr lang="en-US" sz="1050" dirty="0"/>
-          </a:p>
-        </p:txBody>
-      </p:sp>
-      <p:sp>
-        <p:nvSpPr>
-          <p:cNvPr id="24" name="Text 22"/>
-          <p:cNvSpPr/>
-          <p:nvPr/>
-        </p:nvSpPr>
-        <p:spPr>
-          <a:xfrm>
-            <a:off x="548640" y="9765792"/>
-            <a:ext cx="6492240" cy="365760"/>
-          </a:xfrm>
-          <a:prstGeom prst="rect">
-            <a:avLst/>
-          </a:prstGeom>
-          <a:noFill/>
-          <a:ln/>
-        </p:spPr>
-        <p:txBody>
-          <a:bodyPr wrap="square" lIns="0" tIns="0" rIns="0" bIns="0" rtlCol="0" anchor="ctr"/>
-          <a:lstStyle/>
-          <a:p>
-            <a:pPr indent="0" marL="0">
-              <a:buNone/>
-            </a:pPr>
-            <a:r>
-              <a:rPr lang="en-US" sz="1000" dirty="0">
-                <a:solidFill>
-                  <a:srgbClr val="C9D2E4"/>
-                </a:solidFill>
-                <a:latin typeface="Calibri" pitchFamily="34" charset="0"/>
-                <a:ea typeface="Calibri" pitchFamily="34" charset="-122"/>
-                <a:cs typeface="Calibri" pitchFamily="34" charset="-120"/>
-              </a:rPr>
-              <a:t>Primeiro passo, sem custo: o Mapa de Vazamento — uma estimativa em reais do que pode estar vazando na sua operação, em 48h.</a:t>
-            </a:r>
-            <a:endParaRPr lang="en-US" sz="1000" dirty="0"/>
-          </a:p>
-        </p:txBody>
-      </p:sp>
-      <p:sp>
-        <p:nvSpPr>
-          <p:cNvPr id="25" name="Text 23"/>
-          <p:cNvSpPr/>
-          <p:nvPr/>
-        </p:nvSpPr>
-        <p:spPr>
-          <a:xfrm>
-            <a:off x="548640" y="10351008"/>
-            <a:ext cx="6583680" cy="228600"/>
-          </a:xfrm>
-          <a:prstGeom prst="rect">
-            <a:avLst/>
-          </a:prstGeom>
-          <a:noFill/>
-          <a:ln/>
-        </p:spPr>
-        <p:txBody>
-          <a:bodyPr wrap="square" lIns="0" tIns="0" rIns="0" bIns="0" rtlCol="0" anchor="ctr"/>
-          <a:lstStyle/>
-          <a:p>
-            <a:pPr indent="0" marL="0">
-              <a:buNone/>
-            </a:pPr>
-            <a:r>
-              <a:rPr lang="en-US" sz="850" dirty="0">
-                <a:solidFill>
-                  <a:srgbClr val="8FA0BF"/>
-                </a:solidFill>
-                <a:latin typeface="Calibri" pitchFamily="34" charset="0"/>
-                <a:ea typeface="Calibri" pitchFamily="34" charset="-122"/>
-                <a:cs typeface="Calibri" pitchFamily="34" charset="-120"/>
-              </a:rPr>
-              <a:t>ABBA Consultoria de IA · comercial@abbaservices.com.br · abbaservices.com.br</a:t>
-            </a:r>
-            <a:endParaRPr lang="en-US" sz="850" dirty="0"/>
+              <a:t>ABBASERVICES.COM.BR</a:t>
+            </a:r>
+            <a:endParaRPr lang="en-US" sz="750" dirty="0"/>
           </a:p>
         </p:txBody>
       </p:sp>

--- a/08-materiais/modelos/abba-um-minuto.pptx
+++ b/08-materiais/modelos/abba-um-minuto.pptx
@@ -955,49 +955,87 @@
       </p:sp>
       <p:sp>
         <p:nvSpPr>
-          <p:cNvPr id="4" name="Shape 2"/>
-          <p:cNvSpPr/>
-          <p:nvPr/>
-        </p:nvSpPr>
-        <p:spPr>
-          <a:xfrm>
-            <a:off x="6537960" y="907085"/>
-            <a:ext cx="0" cy="1020470"/>
-          </a:xfrm>
-          <a:prstGeom prst="line">
-            <a:avLst/>
-          </a:prstGeom>
-          <a:noFill/>
-          <a:ln w="17780">
-            <a:solidFill>
-              <a:srgbClr val="B8985A"/>
-            </a:solidFill>
-            <a:prstDash val="solid"/>
-          </a:ln>
-        </p:spPr>
-      </p:sp>
-      <p:sp>
-        <p:nvSpPr>
-          <p:cNvPr id="5" name="Shape 3"/>
-          <p:cNvSpPr/>
-          <p:nvPr/>
-        </p:nvSpPr>
-        <p:spPr>
-          <a:xfrm flipV="1">
-            <a:off x="6537960" y="1105510"/>
-            <a:ext cx="-311810" cy="-340157"/>
-          </a:xfrm>
-          <a:prstGeom prst="line">
-            <a:avLst/>
-          </a:prstGeom>
-          <a:noFill/>
-          <a:ln w="13970">
-            <a:solidFill>
-              <a:srgbClr val="B8985A"/>
-            </a:solidFill>
-            <a:prstDash val="solid"/>
-          </a:ln>
-        </p:spPr>
+          <p:cNvPr id="4" name="Text 2"/>
+          <p:cNvSpPr/>
+          <p:nvPr/>
+        </p:nvSpPr>
+        <p:spPr>
+          <a:xfrm>
+            <a:off x="777240" y="1600200"/>
+            <a:ext cx="5212080" cy="1280160"/>
+          </a:xfrm>
+          <a:prstGeom prst="rect">
+            <a:avLst/>
+          </a:prstGeom>
+          <a:noFill/>
+          <a:ln/>
+        </p:spPr>
+        <p:txBody>
+          <a:bodyPr wrap="square" lIns="0" tIns="0" rIns="0" bIns="0" rtlCol="0" anchor="ctr"/>
+          <a:lstStyle/>
+          <a:p>
+            <a:pPr indent="0" marL="0">
+              <a:lnSpc>
+                <a:spcPts val="3600"/>
+              </a:lnSpc>
+              <a:buNone/>
+            </a:pPr>
+            <a:r>
+              <a:rPr lang="en-US" sz="3000" b="1" dirty="0">
+                <a:solidFill>
+                  <a:srgbClr val="1B2A4A"/>
+                </a:solidFill>
+                <a:latin typeface="Cambria" pitchFamily="34" charset="0"/>
+                <a:ea typeface="Cambria" pitchFamily="34" charset="-122"/>
+                <a:cs typeface="Cambria" pitchFamily="34" charset="-120"/>
+              </a:rPr>
+              <a:t>Tornamos a sua empresa AI native.</a:t>
+            </a:r>
+            <a:endParaRPr lang="en-US" sz="3000" dirty="0"/>
+          </a:p>
+        </p:txBody>
+      </p:sp>
+      <p:sp>
+        <p:nvSpPr>
+          <p:cNvPr id="5" name="Text 3"/>
+          <p:cNvSpPr/>
+          <p:nvPr/>
+        </p:nvSpPr>
+        <p:spPr>
+          <a:xfrm>
+            <a:off x="777240" y="2971800"/>
+            <a:ext cx="6007608" cy="640080"/>
+          </a:xfrm>
+          <a:prstGeom prst="rect">
+            <a:avLst/>
+          </a:prstGeom>
+          <a:noFill/>
+          <a:ln/>
+        </p:spPr>
+        <p:txBody>
+          <a:bodyPr wrap="square" lIns="0" tIns="0" rIns="0" bIns="0" rtlCol="0" anchor="ctr"/>
+          <a:lstStyle/>
+          <a:p>
+            <a:pPr indent="0" marL="0">
+              <a:lnSpc>
+                <a:spcPts val="1550"/>
+              </a:lnSpc>
+              <a:buNone/>
+            </a:pPr>
+            <a:r>
+              <a:rPr lang="en-US" sz="1100" dirty="0">
+                <a:solidFill>
+                  <a:srgbClr val="232B3A"/>
+                </a:solidFill>
+                <a:latin typeface="Calibri" pitchFamily="34" charset="0"/>
+                <a:ea typeface="Calibri" pitchFamily="34" charset="-122"/>
+                <a:cs typeface="Calibri" pitchFamily="34" charset="-120"/>
+              </a:rPr>
+              <a:t>Construímos as soluções que melhoram o dia a dia da operação, formamos as pessoas para trabalhar com IA — e ficamos ao seu lado acompanhando, mês a mês, os resultados de cada solução.</a:t>
+            </a:r>
+            <a:endParaRPr lang="en-US" sz="1100" dirty="0"/>
+          </a:p>
+        </p:txBody>
       </p:sp>
       <p:sp>
         <p:nvSpPr>
@@ -1006,170 +1044,9 @@
           <p:nvPr/>
         </p:nvSpPr>
         <p:spPr>
-          <a:xfrm flipV="1">
-            <a:off x="6537960" y="992124"/>
-            <a:ext cx="340157" cy="-311810"/>
-          </a:xfrm>
-          <a:prstGeom prst="line">
-            <a:avLst/>
-          </a:prstGeom>
-          <a:noFill/>
-          <a:ln w="13970">
-            <a:solidFill>
-              <a:srgbClr val="B8985A"/>
-            </a:solidFill>
-            <a:prstDash val="solid"/>
-          </a:ln>
-        </p:spPr>
-      </p:sp>
-      <p:sp>
-        <p:nvSpPr>
-          <p:cNvPr id="7" name="Shape 5"/>
-          <p:cNvSpPr/>
-          <p:nvPr/>
-        </p:nvSpPr>
-        <p:spPr>
-          <a:xfrm flipV="1">
-            <a:off x="6537960" y="1247242"/>
-            <a:ext cx="238110" cy="-255118"/>
-          </a:xfrm>
-          <a:prstGeom prst="line">
-            <a:avLst/>
-          </a:prstGeom>
-          <a:noFill/>
-          <a:ln w="11430">
-            <a:solidFill>
-              <a:srgbClr val="B8985A"/>
-            </a:solidFill>
-            <a:prstDash val="solid"/>
-          </a:ln>
-        </p:spPr>
-      </p:sp>
-      <p:sp>
-        <p:nvSpPr>
-          <p:cNvPr id="8" name="Shape 6"/>
-          <p:cNvSpPr/>
-          <p:nvPr/>
-        </p:nvSpPr>
-        <p:spPr>
-          <a:xfrm flipV="1">
-            <a:off x="6537960" y="1179210"/>
-            <a:ext cx="-192756" cy="-170078"/>
-          </a:xfrm>
-          <a:prstGeom prst="line">
-            <a:avLst/>
-          </a:prstGeom>
-          <a:noFill/>
-          <a:ln w="11430">
-            <a:solidFill>
-              <a:srgbClr val="B8985A"/>
-            </a:solidFill>
-            <a:prstDash val="solid"/>
-          </a:ln>
-        </p:spPr>
-      </p:sp>
-      <p:sp>
-        <p:nvSpPr>
-          <p:cNvPr id="9" name="Shape 7"/>
-          <p:cNvSpPr/>
-          <p:nvPr/>
-        </p:nvSpPr>
-        <p:spPr>
-          <a:xfrm>
-            <a:off x="6537960" y="1729130"/>
-            <a:ext cx="-351495" cy="283464"/>
-          </a:xfrm>
-          <a:prstGeom prst="line">
-            <a:avLst/>
-          </a:prstGeom>
-          <a:noFill/>
-          <a:ln w="13970">
-            <a:solidFill>
-              <a:srgbClr val="B8985A"/>
-            </a:solidFill>
-            <a:prstDash val="solid"/>
-          </a:ln>
-        </p:spPr>
-      </p:sp>
-      <p:sp>
-        <p:nvSpPr>
-          <p:cNvPr id="10" name="Shape 8"/>
-          <p:cNvSpPr/>
-          <p:nvPr/>
-        </p:nvSpPr>
-        <p:spPr>
-          <a:xfrm>
-            <a:off x="6537960" y="1814170"/>
-            <a:ext cx="328818" cy="255118"/>
-          </a:xfrm>
-          <a:prstGeom prst="line">
-            <a:avLst/>
-          </a:prstGeom>
-          <a:noFill/>
-          <a:ln w="13970">
-            <a:solidFill>
-              <a:srgbClr val="B8985A"/>
-            </a:solidFill>
-            <a:prstDash val="solid"/>
-          </a:ln>
-        </p:spPr>
-      </p:sp>
-      <p:sp>
-        <p:nvSpPr>
-          <p:cNvPr id="11" name="Shape 9"/>
-          <p:cNvSpPr/>
-          <p:nvPr/>
-        </p:nvSpPr>
-        <p:spPr>
-          <a:xfrm>
-            <a:off x="6537960" y="1615745"/>
-            <a:ext cx="170078" cy="198425"/>
-          </a:xfrm>
-          <a:prstGeom prst="line">
-            <a:avLst/>
-          </a:prstGeom>
-          <a:noFill/>
-          <a:ln w="11430">
-            <a:solidFill>
-              <a:srgbClr val="B8985A"/>
-            </a:solidFill>
-            <a:prstDash val="solid"/>
-          </a:ln>
-        </p:spPr>
-      </p:sp>
-      <p:sp>
-        <p:nvSpPr>
-          <p:cNvPr id="12" name="Shape 10"/>
-          <p:cNvSpPr/>
-          <p:nvPr/>
-        </p:nvSpPr>
-        <p:spPr>
-          <a:xfrm>
-            <a:off x="6537960" y="1672438"/>
-            <a:ext cx="-158740" cy="187086"/>
-          </a:xfrm>
-          <a:prstGeom prst="line">
-            <a:avLst/>
-          </a:prstGeom>
-          <a:noFill/>
-          <a:ln w="11430">
-            <a:solidFill>
-              <a:srgbClr val="B8985A"/>
-            </a:solidFill>
-            <a:prstDash val="solid"/>
-          </a:ln>
-        </p:spPr>
-      </p:sp>
-      <p:sp>
-        <p:nvSpPr>
-          <p:cNvPr id="13" name="Shape 11"/>
-          <p:cNvSpPr/>
-          <p:nvPr/>
-        </p:nvSpPr>
-        <p:spPr>
-          <a:xfrm>
-            <a:off x="6056071" y="1928470"/>
-            <a:ext cx="963778" cy="0"/>
+          <a:xfrm>
+            <a:off x="777240" y="3840480"/>
+            <a:ext cx="6007608" cy="0"/>
           </a:xfrm>
           <a:prstGeom prst="line">
             <a:avLst/>
@@ -1185,14 +1062,14 @@
       </p:sp>
       <p:sp>
         <p:nvSpPr>
-          <p:cNvPr id="14" name="Text 12"/>
-          <p:cNvSpPr/>
-          <p:nvPr/>
-        </p:nvSpPr>
-        <p:spPr>
-          <a:xfrm>
-            <a:off x="777240" y="1600200"/>
-            <a:ext cx="5212080" cy="1280160"/>
+          <p:cNvPr id="7" name="Text 5"/>
+          <p:cNvSpPr/>
+          <p:nvPr/>
+        </p:nvSpPr>
+        <p:spPr>
+          <a:xfrm>
+            <a:off x="777240" y="4005072"/>
+            <a:ext cx="6007608" cy="219456"/>
           </a:xfrm>
           <a:prstGeom prst="rect">
             <a:avLst/>
@@ -1205,36 +1082,72 @@
           <a:lstStyle/>
           <a:p>
             <a:pPr indent="0" marL="0">
-              <a:lnSpc>
-                <a:spcPts val="3600"/>
-              </a:lnSpc>
-              <a:buNone/>
-            </a:pPr>
-            <a:r>
-              <a:rPr lang="en-US" sz="3000" b="1" dirty="0">
-                <a:solidFill>
-                  <a:srgbClr val="1B2A4A"/>
+              <a:buNone/>
+            </a:pPr>
+            <a:r>
+              <a:rPr lang="en-US" sz="900" b="1" spc="320" kern="0" dirty="0">
+                <a:solidFill>
+                  <a:srgbClr val="B8985A"/>
+                </a:solidFill>
+                <a:latin typeface="Calibri" pitchFamily="34" charset="0"/>
+                <a:ea typeface="Calibri" pitchFamily="34" charset="-122"/>
+                <a:cs typeface="Calibri" pitchFamily="34" charset="-120"/>
+              </a:rPr>
+              <a:t>A JORNADA, EM SETE PASSOS</a:t>
+            </a:r>
+            <a:endParaRPr lang="en-US" sz="900" dirty="0"/>
+          </a:p>
+        </p:txBody>
+      </p:sp>
+      <p:sp>
+        <p:nvSpPr>
+          <p:cNvPr id="8" name="Text 6"/>
+          <p:cNvSpPr/>
+          <p:nvPr/>
+        </p:nvSpPr>
+        <p:spPr>
+          <a:xfrm>
+            <a:off x="777240" y="4288536"/>
+            <a:ext cx="457200" cy="457200"/>
+          </a:xfrm>
+          <a:prstGeom prst="rect">
+            <a:avLst/>
+          </a:prstGeom>
+          <a:noFill/>
+          <a:ln/>
+        </p:spPr>
+        <p:txBody>
+          <a:bodyPr wrap="square" lIns="0" tIns="0" rIns="0" bIns="0" rtlCol="0" anchor="ctr"/>
+          <a:lstStyle/>
+          <a:p>
+            <a:pPr indent="0" marL="0">
+              <a:buNone/>
+            </a:pPr>
+            <a:r>
+              <a:rPr lang="en-US" sz="2100" b="1" dirty="0">
+                <a:solidFill>
+                  <a:srgbClr val="B8985A"/>
                 </a:solidFill>
                 <a:latin typeface="Cambria" pitchFamily="34" charset="0"/>
                 <a:ea typeface="Cambria" pitchFamily="34" charset="-122"/>
                 <a:cs typeface="Cambria" pitchFamily="34" charset="-120"/>
               </a:rPr>
-              <a:t>Tornamos a sua empresa AI native.</a:t>
-            </a:r>
-            <a:endParaRPr lang="en-US" sz="3000" dirty="0"/>
-          </a:p>
-        </p:txBody>
-      </p:sp>
-      <p:sp>
-        <p:nvSpPr>
-          <p:cNvPr id="15" name="Text 13"/>
-          <p:cNvSpPr/>
-          <p:nvPr/>
-        </p:nvSpPr>
-        <p:spPr>
-          <a:xfrm>
-            <a:off x="777240" y="2971800"/>
-            <a:ext cx="6007608" cy="640080"/>
+              <a:t>1</a:t>
+            </a:r>
+            <a:endParaRPr lang="en-US" sz="2100" dirty="0"/>
+          </a:p>
+        </p:txBody>
+      </p:sp>
+      <p:sp>
+        <p:nvSpPr>
+          <p:cNvPr id="9" name="Text 7"/>
+          <p:cNvSpPr/>
+          <p:nvPr/>
+        </p:nvSpPr>
+        <p:spPr>
+          <a:xfrm>
+            <a:off x="1325880" y="4343400"/>
+            <a:ext cx="5458968" cy="475488"/>
           </a:xfrm>
           <a:prstGeom prst="rect">
             <a:avLst/>
@@ -1248,12 +1161,29 @@
           <a:p>
             <a:pPr indent="0" marL="0">
               <a:lnSpc>
-                <a:spcPts val="1550"/>
+                <a:spcPts val="1350"/>
               </a:lnSpc>
               <a:buNone/>
             </a:pPr>
             <a:r>
-              <a:rPr lang="en-US" sz="1100" dirty="0">
+              <a:rPr lang="en-US" sz="1150" b="1" dirty="0">
+                <a:solidFill>
+                  <a:srgbClr val="1B2A4A"/>
+                </a:solidFill>
+                <a:latin typeface="Cambria" pitchFamily="34" charset="0"/>
+                <a:ea typeface="Cambria" pitchFamily="34" charset="-122"/>
+                <a:cs typeface="Cambria" pitchFamily="34" charset="-120"/>
+              </a:rPr>
+              <a:t>A primeira conversa  —  </a:t>
+            </a:r>
+            <a:pPr indent="0" marL="0">
+              <a:lnSpc>
+                <a:spcPts val="1350"/>
+              </a:lnSpc>
+              <a:buNone/>
+            </a:pPr>
+            <a:r>
+              <a:rPr lang="en-US" sz="980" dirty="0">
                 <a:solidFill>
                   <a:srgbClr val="232B3A"/>
                 </a:solidFill>
@@ -1261,22 +1191,22 @@
                 <a:ea typeface="Calibri" pitchFamily="34" charset="-122"/>
                 <a:cs typeface="Calibri" pitchFamily="34" charset="-120"/>
               </a:rPr>
-              <a:t>Construímos as soluções que melhoram o dia a dia da operação, formamos as pessoas para trabalhar com IA — e provamos o que mudou, com número combinado antes e medido depois.</a:t>
-            </a:r>
-            <a:endParaRPr lang="en-US" sz="1100" dirty="0"/>
-          </a:p>
-        </p:txBody>
-      </p:sp>
-      <p:sp>
-        <p:nvSpPr>
-          <p:cNvPr id="16" name="Shape 14"/>
-          <p:cNvSpPr/>
-          <p:nvPr/>
-        </p:nvSpPr>
-        <p:spPr>
-          <a:xfrm>
-            <a:off x="777240" y="3840480"/>
-            <a:ext cx="6007608" cy="0"/>
+              <a:t>45 minutos — e o Mapa de Vazamento gratuito, com uma estimativa em reais do que pode estar vazando.</a:t>
+            </a:r>
+            <a:endParaRPr lang="en-US" sz="1150" dirty="0"/>
+          </a:p>
+        </p:txBody>
+      </p:sp>
+      <p:sp>
+        <p:nvSpPr>
+          <p:cNvPr id="10" name="Shape 8"/>
+          <p:cNvSpPr/>
+          <p:nvPr/>
+        </p:nvSpPr>
+        <p:spPr>
+          <a:xfrm>
+            <a:off x="1325880" y="4837176"/>
+            <a:ext cx="5458968" cy="0"/>
           </a:xfrm>
           <a:prstGeom prst="line">
             <a:avLst/>
@@ -1292,14 +1222,14 @@
       </p:sp>
       <p:sp>
         <p:nvSpPr>
-          <p:cNvPr id="17" name="Text 15"/>
-          <p:cNvSpPr/>
-          <p:nvPr/>
-        </p:nvSpPr>
-        <p:spPr>
-          <a:xfrm>
-            <a:off x="777240" y="4005072"/>
-            <a:ext cx="6007608" cy="219456"/>
+          <p:cNvPr id="11" name="Text 9"/>
+          <p:cNvSpPr/>
+          <p:nvPr/>
+        </p:nvSpPr>
+        <p:spPr>
+          <a:xfrm>
+            <a:off x="777240" y="4855464"/>
+            <a:ext cx="457200" cy="457200"/>
           </a:xfrm>
           <a:prstGeom prst="rect">
             <a:avLst/>
@@ -1315,113 +1245,74 @@
               <a:buNone/>
             </a:pPr>
             <a:r>
-              <a:rPr lang="en-US" sz="900" b="1" spc="320" kern="0" dirty="0">
+              <a:rPr lang="en-US" sz="2100" b="1" dirty="0">
                 <a:solidFill>
                   <a:srgbClr val="B8985A"/>
+                </a:solidFill>
+                <a:latin typeface="Cambria" pitchFamily="34" charset="0"/>
+                <a:ea typeface="Cambria" pitchFamily="34" charset="-122"/>
+                <a:cs typeface="Cambria" pitchFamily="34" charset="-120"/>
+              </a:rPr>
+              <a:t>2</a:t>
+            </a:r>
+            <a:endParaRPr lang="en-US" sz="2100" dirty="0"/>
+          </a:p>
+        </p:txBody>
+      </p:sp>
+      <p:sp>
+        <p:nvSpPr>
+          <p:cNvPr id="12" name="Text 10"/>
+          <p:cNvSpPr/>
+          <p:nvPr/>
+        </p:nvSpPr>
+        <p:spPr>
+          <a:xfrm>
+            <a:off x="1325880" y="4910328"/>
+            <a:ext cx="5458968" cy="475488"/>
+          </a:xfrm>
+          <a:prstGeom prst="rect">
+            <a:avLst/>
+          </a:prstGeom>
+          <a:noFill/>
+          <a:ln/>
+        </p:spPr>
+        <p:txBody>
+          <a:bodyPr wrap="square" lIns="0" tIns="0" rIns="0" bIns="0" rtlCol="0" anchor="ctr"/>
+          <a:lstStyle/>
+          <a:p>
+            <a:pPr indent="0" marL="0">
+              <a:lnSpc>
+                <a:spcPts val="1350"/>
+              </a:lnSpc>
+              <a:buNone/>
+            </a:pPr>
+            <a:r>
+              <a:rPr lang="en-US" sz="1150" b="1" dirty="0">
+                <a:solidFill>
+                  <a:srgbClr val="1B2A4A"/>
+                </a:solidFill>
+                <a:latin typeface="Cambria" pitchFamily="34" charset="0"/>
+                <a:ea typeface="Cambria" pitchFamily="34" charset="-122"/>
+                <a:cs typeface="Cambria" pitchFamily="34" charset="-120"/>
+              </a:rPr>
+              <a:t>Assessment  —  </a:t>
+            </a:r>
+            <a:pPr indent="0" marL="0">
+              <a:lnSpc>
+                <a:spcPts val="1350"/>
+              </a:lnSpc>
+              <a:buNone/>
+            </a:pPr>
+            <a:r>
+              <a:rPr lang="en-US" sz="980" dirty="0">
+                <a:solidFill>
+                  <a:srgbClr val="232B3A"/>
                 </a:solidFill>
                 <a:latin typeface="Calibri" pitchFamily="34" charset="0"/>
                 <a:ea typeface="Calibri" pitchFamily="34" charset="-122"/>
                 <a:cs typeface="Calibri" pitchFamily="34" charset="-120"/>
               </a:rPr>
-              <a:t>A JORNADA, EM SETE PASSOS</a:t>
-            </a:r>
-            <a:endParaRPr lang="en-US" sz="900" dirty="0"/>
-          </a:p>
-        </p:txBody>
-      </p:sp>
-      <p:sp>
-        <p:nvSpPr>
-          <p:cNvPr id="18" name="Text 16"/>
-          <p:cNvSpPr/>
-          <p:nvPr/>
-        </p:nvSpPr>
-        <p:spPr>
-          <a:xfrm>
-            <a:off x="777240" y="4288536"/>
-            <a:ext cx="457200" cy="457200"/>
-          </a:xfrm>
-          <a:prstGeom prst="rect">
-            <a:avLst/>
-          </a:prstGeom>
-          <a:noFill/>
-          <a:ln/>
-        </p:spPr>
-        <p:txBody>
-          <a:bodyPr wrap="square" lIns="0" tIns="0" rIns="0" bIns="0" rtlCol="0" anchor="ctr"/>
-          <a:lstStyle/>
-          <a:p>
-            <a:pPr indent="0" marL="0">
-              <a:buNone/>
-            </a:pPr>
-            <a:r>
-              <a:rPr lang="en-US" sz="2100" b="1" dirty="0">
-                <a:solidFill>
-                  <a:srgbClr val="B8985A"/>
-                </a:solidFill>
-                <a:latin typeface="Cambria" pitchFamily="34" charset="0"/>
-                <a:ea typeface="Cambria" pitchFamily="34" charset="-122"/>
-                <a:cs typeface="Cambria" pitchFamily="34" charset="-120"/>
-              </a:rPr>
-              <a:t>1</a:t>
-            </a:r>
-            <a:endParaRPr lang="en-US" sz="2100" dirty="0"/>
-          </a:p>
-        </p:txBody>
-      </p:sp>
-      <p:sp>
-        <p:nvSpPr>
-          <p:cNvPr id="19" name="Text 17"/>
-          <p:cNvSpPr/>
-          <p:nvPr/>
-        </p:nvSpPr>
-        <p:spPr>
-          <a:xfrm>
-            <a:off x="1325880" y="4343400"/>
-            <a:ext cx="5458968" cy="475488"/>
-          </a:xfrm>
-          <a:prstGeom prst="rect">
-            <a:avLst/>
-          </a:prstGeom>
-          <a:noFill/>
-          <a:ln/>
-        </p:spPr>
-        <p:txBody>
-          <a:bodyPr wrap="square" lIns="0" tIns="0" rIns="0" bIns="0" rtlCol="0" anchor="ctr"/>
-          <a:lstStyle/>
-          <a:p>
-            <a:pPr indent="0" marL="0">
-              <a:lnSpc>
-                <a:spcPts val="1350"/>
-              </a:lnSpc>
-              <a:buNone/>
-            </a:pPr>
-            <a:r>
-              <a:rPr lang="en-US" sz="1150" b="1" dirty="0">
-                <a:solidFill>
-                  <a:srgbClr val="1B2A4A"/>
-                </a:solidFill>
-                <a:latin typeface="Cambria" pitchFamily="34" charset="0"/>
-                <a:ea typeface="Cambria" pitchFamily="34" charset="-122"/>
-                <a:cs typeface="Cambria" pitchFamily="34" charset="-120"/>
-              </a:rPr>
-              <a:t>A primeira conversa  —  </a:t>
-            </a:r>
-            <a:pPr indent="0" marL="0">
-              <a:lnSpc>
-                <a:spcPts val="1350"/>
-              </a:lnSpc>
-              <a:buNone/>
-            </a:pPr>
-            <a:r>
-              <a:rPr lang="en-US" sz="980" dirty="0">
-                <a:solidFill>
-                  <a:srgbClr val="232B3A"/>
-                </a:solidFill>
-                <a:latin typeface="Calibri" pitchFamily="34" charset="0"/>
-                <a:ea typeface="Calibri" pitchFamily="34" charset="-122"/>
-                <a:cs typeface="Calibri" pitchFamily="34" charset="-120"/>
-              </a:rPr>
-              <a:t>45 minutos — e o Mapa de Vazamento gratuito, com uma estimativa em reais do que pode estar vazando.</a:t>
+              <a:t>O mergulho profundo na sua empresa, do conselho à linha de frente. Sai um portfólio ranqueado e quantificado.</a:t>
             </a:r>
             <a:endParaRPr lang="en-US" sz="1150" dirty="0"/>
           </a:p>
@@ -1429,13 +1320,13 @@
       </p:sp>
       <p:sp>
         <p:nvSpPr>
-          <p:cNvPr id="20" name="Shape 18"/>
-          <p:cNvSpPr/>
-          <p:nvPr/>
-        </p:nvSpPr>
-        <p:spPr>
-          <a:xfrm>
-            <a:off x="1325880" y="4837176"/>
+          <p:cNvPr id="13" name="Shape 11"/>
+          <p:cNvSpPr/>
+          <p:nvPr/>
+        </p:nvSpPr>
+        <p:spPr>
+          <a:xfrm>
+            <a:off x="1325880" y="5404104"/>
             <a:ext cx="5458968" cy="0"/>
           </a:xfrm>
           <a:prstGeom prst="line">
@@ -1452,13 +1343,13 @@
       </p:sp>
       <p:sp>
         <p:nvSpPr>
-          <p:cNvPr id="21" name="Text 19"/>
-          <p:cNvSpPr/>
-          <p:nvPr/>
-        </p:nvSpPr>
-        <p:spPr>
-          <a:xfrm>
-            <a:off x="777240" y="4855464"/>
+          <p:cNvPr id="14" name="Text 12"/>
+          <p:cNvSpPr/>
+          <p:nvPr/>
+        </p:nvSpPr>
+        <p:spPr>
+          <a:xfrm>
+            <a:off x="777240" y="5422392"/>
             <a:ext cx="457200" cy="457200"/>
           </a:xfrm>
           <a:prstGeom prst="rect">
@@ -1483,7 +1374,7 @@
                 <a:ea typeface="Cambria" pitchFamily="34" charset="-122"/>
                 <a:cs typeface="Cambria" pitchFamily="34" charset="-120"/>
               </a:rPr>
-              <a:t>2</a:t>
+              <a:t>3</a:t>
             </a:r>
             <a:endParaRPr lang="en-US" sz="2100" dirty="0"/>
           </a:p>
@@ -1491,13 +1382,13 @@
       </p:sp>
       <p:sp>
         <p:nvSpPr>
-          <p:cNvPr id="22" name="Text 20"/>
-          <p:cNvSpPr/>
-          <p:nvPr/>
-        </p:nvSpPr>
-        <p:spPr>
-          <a:xfrm>
-            <a:off x="1325880" y="4910328"/>
+          <p:cNvPr id="15" name="Text 13"/>
+          <p:cNvSpPr/>
+          <p:nvPr/>
+        </p:nvSpPr>
+        <p:spPr>
+          <a:xfrm>
+            <a:off x="1325880" y="5477256"/>
             <a:ext cx="5458968" cy="475488"/>
           </a:xfrm>
           <a:prstGeom prst="rect">
@@ -1525,7 +1416,7 @@
                 <a:ea typeface="Cambria" pitchFamily="34" charset="-122"/>
                 <a:cs typeface="Cambria" pitchFamily="34" charset="-120"/>
               </a:rPr>
-              <a:t>Assessment  —  </a:t>
+              <a:t>Protótipo de caso de uso  —  </a:t>
             </a:r>
             <a:pPr indent="0" marL="0">
               <a:lnSpc>
@@ -1542,7 +1433,7 @@
                 <a:ea typeface="Calibri" pitchFamily="34" charset="-122"/>
                 <a:cs typeface="Calibri" pitchFamily="34" charset="-120"/>
               </a:rPr>
-              <a:t>O mergulho em 25 dimensões, do conselho à linha de frente. Sai um portfólio ranqueado e quantificado.</a:t>
+              <a:t>Validação com os seus dados reais. A diretoria decide GO ou NO-GO com números na mesa.</a:t>
             </a:r>
             <a:endParaRPr lang="en-US" sz="1150" dirty="0"/>
           </a:p>
@@ -1550,13 +1441,13 @@
       </p:sp>
       <p:sp>
         <p:nvSpPr>
-          <p:cNvPr id="23" name="Shape 21"/>
-          <p:cNvSpPr/>
-          <p:nvPr/>
-        </p:nvSpPr>
-        <p:spPr>
-          <a:xfrm>
-            <a:off x="1325880" y="5404104"/>
+          <p:cNvPr id="16" name="Shape 14"/>
+          <p:cNvSpPr/>
+          <p:nvPr/>
+        </p:nvSpPr>
+        <p:spPr>
+          <a:xfrm>
+            <a:off x="1325880" y="5971032"/>
             <a:ext cx="5458968" cy="0"/>
           </a:xfrm>
           <a:prstGeom prst="line">
@@ -1573,13 +1464,13 @@
       </p:sp>
       <p:sp>
         <p:nvSpPr>
-          <p:cNvPr id="24" name="Text 22"/>
-          <p:cNvSpPr/>
-          <p:nvPr/>
-        </p:nvSpPr>
-        <p:spPr>
-          <a:xfrm>
-            <a:off x="777240" y="5422392"/>
+          <p:cNvPr id="17" name="Text 15"/>
+          <p:cNvSpPr/>
+          <p:nvPr/>
+        </p:nvSpPr>
+        <p:spPr>
+          <a:xfrm>
+            <a:off x="777240" y="5989320"/>
             <a:ext cx="457200" cy="457200"/>
           </a:xfrm>
           <a:prstGeom prst="rect">
@@ -1604,7 +1495,7 @@
                 <a:ea typeface="Cambria" pitchFamily="34" charset="-122"/>
                 <a:cs typeface="Cambria" pitchFamily="34" charset="-120"/>
               </a:rPr>
-              <a:t>3</a:t>
+              <a:t>4</a:t>
             </a:r>
             <a:endParaRPr lang="en-US" sz="2100" dirty="0"/>
           </a:p>
@@ -1612,13 +1503,13 @@
       </p:sp>
       <p:sp>
         <p:nvSpPr>
-          <p:cNvPr id="25" name="Text 23"/>
-          <p:cNvSpPr/>
-          <p:nvPr/>
-        </p:nvSpPr>
-        <p:spPr>
-          <a:xfrm>
-            <a:off x="1325880" y="5477256"/>
+          <p:cNvPr id="18" name="Text 16"/>
+          <p:cNvSpPr/>
+          <p:nvPr/>
+        </p:nvSpPr>
+        <p:spPr>
+          <a:xfrm>
+            <a:off x="1325880" y="6044184"/>
             <a:ext cx="5458968" cy="475488"/>
           </a:xfrm>
           <a:prstGeom prst="rect">
@@ -1646,7 +1537,7 @@
                 <a:ea typeface="Cambria" pitchFamily="34" charset="-122"/>
                 <a:cs typeface="Cambria" pitchFamily="34" charset="-120"/>
               </a:rPr>
-              <a:t>Protótipo de caso de uso  —  </a:t>
+              <a:t>Construção e implantação  —  </a:t>
             </a:r>
             <a:pPr indent="0" marL="0">
               <a:lnSpc>
@@ -1663,7 +1554,7 @@
                 <a:ea typeface="Calibri" pitchFamily="34" charset="-122"/>
                 <a:cs typeface="Calibri" pitchFamily="34" charset="-120"/>
               </a:rPr>
-              <a:t>Validação com os seus dados reais. A diretoria decide GO ou NO-GO com números na mesa.</a:t>
+              <a:t>Agentes sob medida, em produção, com aprovação humana em tudo que é crítico.</a:t>
             </a:r>
             <a:endParaRPr lang="en-US" sz="1150" dirty="0"/>
           </a:p>
@@ -1671,13 +1562,13 @@
       </p:sp>
       <p:sp>
         <p:nvSpPr>
-          <p:cNvPr id="26" name="Shape 24"/>
-          <p:cNvSpPr/>
-          <p:nvPr/>
-        </p:nvSpPr>
-        <p:spPr>
-          <a:xfrm>
-            <a:off x="1325880" y="5971032"/>
+          <p:cNvPr id="19" name="Shape 17"/>
+          <p:cNvSpPr/>
+          <p:nvPr/>
+        </p:nvSpPr>
+        <p:spPr>
+          <a:xfrm>
+            <a:off x="1325880" y="6537960"/>
             <a:ext cx="5458968" cy="0"/>
           </a:xfrm>
           <a:prstGeom prst="line">
@@ -1694,13 +1585,13 @@
       </p:sp>
       <p:sp>
         <p:nvSpPr>
-          <p:cNvPr id="27" name="Text 25"/>
-          <p:cNvSpPr/>
-          <p:nvPr/>
-        </p:nvSpPr>
-        <p:spPr>
-          <a:xfrm>
-            <a:off x="777240" y="5989320"/>
+          <p:cNvPr id="20" name="Text 18"/>
+          <p:cNvSpPr/>
+          <p:nvPr/>
+        </p:nvSpPr>
+        <p:spPr>
+          <a:xfrm>
+            <a:off x="777240" y="6556248"/>
             <a:ext cx="457200" cy="457200"/>
           </a:xfrm>
           <a:prstGeom prst="rect">
@@ -1725,7 +1616,7 @@
                 <a:ea typeface="Cambria" pitchFamily="34" charset="-122"/>
                 <a:cs typeface="Cambria" pitchFamily="34" charset="-120"/>
               </a:rPr>
-              <a:t>4</a:t>
+              <a:t>5</a:t>
             </a:r>
             <a:endParaRPr lang="en-US" sz="2100" dirty="0"/>
           </a:p>
@@ -1733,13 +1624,13 @@
       </p:sp>
       <p:sp>
         <p:nvSpPr>
-          <p:cNvPr id="28" name="Text 26"/>
-          <p:cNvSpPr/>
-          <p:nvPr/>
-        </p:nvSpPr>
-        <p:spPr>
-          <a:xfrm>
-            <a:off x="1325880" y="6044184"/>
+          <p:cNvPr id="21" name="Text 19"/>
+          <p:cNvSpPr/>
+          <p:nvPr/>
+        </p:nvSpPr>
+        <p:spPr>
+          <a:xfrm>
+            <a:off x="1325880" y="6611112"/>
             <a:ext cx="5458968" cy="475488"/>
           </a:xfrm>
           <a:prstGeom prst="rect">
@@ -1767,7 +1658,7 @@
                 <a:ea typeface="Cambria" pitchFamily="34" charset="-122"/>
                 <a:cs typeface="Cambria" pitchFamily="34" charset="-120"/>
               </a:rPr>
-              <a:t>Construção e implantação  —  </a:t>
+              <a:t>Treinamento + ABBA Portal  —  </a:t>
             </a:r>
             <a:pPr indent="0" marL="0">
               <a:lnSpc>
@@ -1784,7 +1675,7 @@
                 <a:ea typeface="Calibri" pitchFamily="34" charset="-122"/>
                 <a:cs typeface="Calibri" pitchFamily="34" charset="-120"/>
               </a:rPr>
-              <a:t>Agentes sob medida, em produção, com aprovação humana em tudo que é crítico.</a:t>
+              <a:t>Todos os níveis: plataforma própria + presencial. Campeões internos carregam a transformação.</a:t>
             </a:r>
             <a:endParaRPr lang="en-US" sz="1150" dirty="0"/>
           </a:p>
@@ -1792,13 +1683,13 @@
       </p:sp>
       <p:sp>
         <p:nvSpPr>
-          <p:cNvPr id="29" name="Shape 27"/>
-          <p:cNvSpPr/>
-          <p:nvPr/>
-        </p:nvSpPr>
-        <p:spPr>
-          <a:xfrm>
-            <a:off x="1325880" y="6537960"/>
+          <p:cNvPr id="22" name="Shape 20"/>
+          <p:cNvSpPr/>
+          <p:nvPr/>
+        </p:nvSpPr>
+        <p:spPr>
+          <a:xfrm>
+            <a:off x="1325880" y="7104888"/>
             <a:ext cx="5458968" cy="0"/>
           </a:xfrm>
           <a:prstGeom prst="line">
@@ -1815,13 +1706,13 @@
       </p:sp>
       <p:sp>
         <p:nvSpPr>
-          <p:cNvPr id="30" name="Text 28"/>
-          <p:cNvSpPr/>
-          <p:nvPr/>
-        </p:nvSpPr>
-        <p:spPr>
-          <a:xfrm>
-            <a:off x="777240" y="6556248"/>
+          <p:cNvPr id="23" name="Text 21"/>
+          <p:cNvSpPr/>
+          <p:nvPr/>
+        </p:nvSpPr>
+        <p:spPr>
+          <a:xfrm>
+            <a:off x="777240" y="7123176"/>
             <a:ext cx="457200" cy="457200"/>
           </a:xfrm>
           <a:prstGeom prst="rect">
@@ -1846,7 +1737,7 @@
                 <a:ea typeface="Cambria" pitchFamily="34" charset="-122"/>
                 <a:cs typeface="Cambria" pitchFamily="34" charset="-120"/>
               </a:rPr>
-              <a:t>5</a:t>
+              <a:t>6</a:t>
             </a:r>
             <a:endParaRPr lang="en-US" sz="2100" dirty="0"/>
           </a:p>
@@ -1854,13 +1745,13 @@
       </p:sp>
       <p:sp>
         <p:nvSpPr>
-          <p:cNvPr id="31" name="Text 29"/>
-          <p:cNvSpPr/>
-          <p:nvPr/>
-        </p:nvSpPr>
-        <p:spPr>
-          <a:xfrm>
-            <a:off x="1325880" y="6611112"/>
+          <p:cNvPr id="24" name="Text 22"/>
+          <p:cNvSpPr/>
+          <p:nvPr/>
+        </p:nvSpPr>
+        <p:spPr>
+          <a:xfrm>
+            <a:off x="1325880" y="7178040"/>
             <a:ext cx="5458968" cy="475488"/>
           </a:xfrm>
           <a:prstGeom prst="rect">
@@ -1888,7 +1779,7 @@
                 <a:ea typeface="Cambria" pitchFamily="34" charset="-122"/>
                 <a:cs typeface="Cambria" pitchFamily="34" charset="-120"/>
               </a:rPr>
-              <a:t>Treinamento + ABBA Portal  —  </a:t>
+              <a:t>Sistemas gerenciados  —  </a:t>
             </a:r>
             <a:pPr indent="0" marL="0">
               <a:lnSpc>
@@ -1905,7 +1796,7 @@
                 <a:ea typeface="Calibri" pitchFamily="34" charset="-122"/>
                 <a:cs typeface="Calibri" pitchFamily="34" charset="-120"/>
               </a:rPr>
-              <a:t>Todos os níveis: plataforma própria + presencial. Campeões internos carregam a transformação.</a:t>
+              <a:t>Operação com presença: ritual semanal de 20 minutos e o diário decisão → resultado medido.</a:t>
             </a:r>
             <a:endParaRPr lang="en-US" sz="1150" dirty="0"/>
           </a:p>
@@ -1913,13 +1804,13 @@
       </p:sp>
       <p:sp>
         <p:nvSpPr>
-          <p:cNvPr id="32" name="Shape 30"/>
-          <p:cNvSpPr/>
-          <p:nvPr/>
-        </p:nvSpPr>
-        <p:spPr>
-          <a:xfrm>
-            <a:off x="1325880" y="7104888"/>
+          <p:cNvPr id="25" name="Shape 23"/>
+          <p:cNvSpPr/>
+          <p:nvPr/>
+        </p:nvSpPr>
+        <p:spPr>
+          <a:xfrm>
+            <a:off x="1325880" y="7671816"/>
             <a:ext cx="5458968" cy="0"/>
           </a:xfrm>
           <a:prstGeom prst="line">
@@ -1936,13 +1827,13 @@
       </p:sp>
       <p:sp>
         <p:nvSpPr>
-          <p:cNvPr id="33" name="Text 31"/>
-          <p:cNvSpPr/>
-          <p:nvPr/>
-        </p:nvSpPr>
-        <p:spPr>
-          <a:xfrm>
-            <a:off x="777240" y="7123176"/>
+          <p:cNvPr id="26" name="Text 24"/>
+          <p:cNvSpPr/>
+          <p:nvPr/>
+        </p:nvSpPr>
+        <p:spPr>
+          <a:xfrm>
+            <a:off x="777240" y="7690104"/>
             <a:ext cx="457200" cy="457200"/>
           </a:xfrm>
           <a:prstGeom prst="rect">
@@ -1967,7 +1858,7 @@
                 <a:ea typeface="Cambria" pitchFamily="34" charset="-122"/>
                 <a:cs typeface="Cambria" pitchFamily="34" charset="-120"/>
               </a:rPr>
-              <a:t>6</a:t>
+              <a:t>7</a:t>
             </a:r>
             <a:endParaRPr lang="en-US" sz="2100" dirty="0"/>
           </a:p>
@@ -1975,13 +1866,13 @@
       </p:sp>
       <p:sp>
         <p:nvSpPr>
-          <p:cNvPr id="34" name="Text 32"/>
-          <p:cNvSpPr/>
-          <p:nvPr/>
-        </p:nvSpPr>
-        <p:spPr>
-          <a:xfrm>
-            <a:off x="1325880" y="7178040"/>
+          <p:cNvPr id="27" name="Text 25"/>
+          <p:cNvSpPr/>
+          <p:nvPr/>
+        </p:nvSpPr>
+        <p:spPr>
+          <a:xfrm>
+            <a:off x="1325880" y="7744968"/>
             <a:ext cx="5458968" cy="475488"/>
           </a:xfrm>
           <a:prstGeom prst="rect">
@@ -2009,7 +1900,7 @@
                 <a:ea typeface="Cambria" pitchFamily="34" charset="-122"/>
                 <a:cs typeface="Cambria" pitchFamily="34" charset="-120"/>
               </a:rPr>
-              <a:t>Sistemas gerenciados  —  </a:t>
+              <a:t>Conselheiro de IA  —  </a:t>
             </a:r>
             <a:pPr indent="0" marL="0">
               <a:lnSpc>
@@ -2026,7 +1917,7 @@
                 <a:ea typeface="Calibri" pitchFamily="34" charset="-122"/>
                 <a:cs typeface="Calibri" pitchFamily="34" charset="-120"/>
               </a:rPr>
-              <a:t>Operação com presença: ritual semanal de 20 minutos e o diário decisão → resultado medido.</a:t>
+              <a:t>A cadeira de estrategista do seu lado da mesa — também para quem já tem IA rodando.</a:t>
             </a:r>
             <a:endParaRPr lang="en-US" sz="1150" dirty="0"/>
           </a:p>
@@ -2034,14 +1925,207 @@
       </p:sp>
       <p:sp>
         <p:nvSpPr>
-          <p:cNvPr id="35" name="Shape 33"/>
-          <p:cNvSpPr/>
-          <p:nvPr/>
-        </p:nvSpPr>
-        <p:spPr>
-          <a:xfrm>
-            <a:off x="1325880" y="7671816"/>
-            <a:ext cx="5458968" cy="0"/>
+          <p:cNvPr id="28" name="Shape 26"/>
+          <p:cNvSpPr/>
+          <p:nvPr/>
+        </p:nvSpPr>
+        <p:spPr>
+          <a:xfrm>
+            <a:off x="777240" y="8458200"/>
+            <a:ext cx="6007608" cy="914400"/>
+          </a:xfrm>
+          <a:prstGeom prst="rect">
+            <a:avLst/>
+          </a:prstGeom>
+          <a:solidFill>
+            <a:srgbClr val="F7F4EE"/>
+          </a:solidFill>
+          <a:ln/>
+        </p:spPr>
+      </p:sp>
+      <p:sp>
+        <p:nvSpPr>
+          <p:cNvPr id="29" name="Text 27"/>
+          <p:cNvSpPr/>
+          <p:nvPr/>
+        </p:nvSpPr>
+        <p:spPr>
+          <a:xfrm>
+            <a:off x="1051560" y="8577072"/>
+            <a:ext cx="5458968" cy="219456"/>
+          </a:xfrm>
+          <a:prstGeom prst="rect">
+            <a:avLst/>
+          </a:prstGeom>
+          <a:noFill/>
+          <a:ln/>
+        </p:spPr>
+        <p:txBody>
+          <a:bodyPr wrap="square" lIns="0" tIns="0" rIns="0" bIns="0" rtlCol="0" anchor="ctr"/>
+          <a:lstStyle/>
+          <a:p>
+            <a:pPr indent="0" marL="0">
+              <a:buNone/>
+            </a:pPr>
+            <a:r>
+              <a:rPr lang="en-US" sz="800" b="1" spc="200" kern="0" dirty="0">
+                <a:solidFill>
+                  <a:srgbClr val="B8985A"/>
+                </a:solidFill>
+                <a:latin typeface="Calibri" pitchFamily="34" charset="0"/>
+                <a:ea typeface="Calibri" pitchFamily="34" charset="-122"/>
+                <a:cs typeface="Calibri" pitchFamily="34" charset="-120"/>
+              </a:rPr>
+              <a:t>A mentalidade que instalamos em cada colaborador:</a:t>
+            </a:r>
+            <a:endParaRPr lang="en-US" sz="800" dirty="0"/>
+          </a:p>
+        </p:txBody>
+      </p:sp>
+      <p:sp>
+        <p:nvSpPr>
+          <p:cNvPr id="30" name="Text 28"/>
+          <p:cNvSpPr/>
+          <p:nvPr/>
+        </p:nvSpPr>
+        <p:spPr>
+          <a:xfrm>
+            <a:off x="1051560" y="8814816"/>
+            <a:ext cx="5458968" cy="475488"/>
+          </a:xfrm>
+          <a:prstGeom prst="rect">
+            <a:avLst/>
+          </a:prstGeom>
+          <a:noFill/>
+          <a:ln/>
+        </p:spPr>
+        <p:txBody>
+          <a:bodyPr wrap="square" lIns="0" tIns="0" rIns="0" bIns="0" rtlCol="0" anchor="ctr"/>
+          <a:lstStyle/>
+          <a:p>
+            <a:pPr indent="0" marL="0">
+              <a:lnSpc>
+                <a:spcPts val="1450"/>
+              </a:lnSpc>
+              <a:buNone/>
+            </a:pPr>
+            <a:r>
+              <a:rPr lang="en-US" sz="1050" i="1" dirty="0">
+                <a:solidFill>
+                  <a:srgbClr val="1B2A4A"/>
+                </a:solidFill>
+                <a:latin typeface="Cambria" pitchFamily="34" charset="0"/>
+                <a:ea typeface="Cambria" pitchFamily="34" charset="-122"/>
+                <a:cs typeface="Cambria" pitchFamily="34" charset="-120"/>
+              </a:rPr>
+              <a:t>O que eu posso parar de fazer, porque a IA agora faz? · O que posso começar a fazer, porque a IA agora permite? · O que só eu faço — e devo fazer ainda melhor?</a:t>
+            </a:r>
+            <a:endParaRPr lang="en-US" sz="1050" dirty="0"/>
+          </a:p>
+        </p:txBody>
+      </p:sp>
+      <p:sp>
+        <p:nvSpPr>
+          <p:cNvPr id="31" name="Text 29"/>
+          <p:cNvSpPr/>
+          <p:nvPr/>
+        </p:nvSpPr>
+        <p:spPr>
+          <a:xfrm>
+            <a:off x="777240" y="9509760"/>
+            <a:ext cx="6007608" cy="228600"/>
+          </a:xfrm>
+          <a:prstGeom prst="rect">
+            <a:avLst/>
+          </a:prstGeom>
+          <a:noFill/>
+          <a:ln/>
+        </p:spPr>
+        <p:txBody>
+          <a:bodyPr wrap="square" lIns="0" tIns="0" rIns="0" bIns="0" rtlCol="0" anchor="ctr"/>
+          <a:lstStyle/>
+          <a:p>
+            <a:pPr indent="0" marL="0">
+              <a:buNone/>
+            </a:pPr>
+            <a:r>
+              <a:rPr lang="en-US" sz="750" b="1" spc="200" kern="0" dirty="0">
+                <a:solidFill>
+                  <a:srgbClr val="B8985A"/>
+                </a:solidFill>
+                <a:latin typeface="Calibri" pitchFamily="34" charset="0"/>
+                <a:ea typeface="Calibri" pitchFamily="34" charset="-122"/>
+                <a:cs typeface="Calibri" pitchFamily="34" charset="-120"/>
+              </a:rPr>
+              <a:t>PARCEIROS OFICIAIS   </a:t>
+            </a:r>
+            <a:pPr indent="0" marL="0">
+              <a:buNone/>
+            </a:pPr>
+            <a:r>
+              <a:rPr lang="en-US" sz="950" dirty="0">
+                <a:solidFill>
+                  <a:srgbClr val="232B3A"/>
+                </a:solidFill>
+                <a:latin typeface="Calibri" pitchFamily="34" charset="0"/>
+                <a:ea typeface="Calibri" pitchFamily="34" charset="-122"/>
+                <a:cs typeface="Calibri" pitchFamily="34" charset="-120"/>
+              </a:rPr>
+              <a:t>Microsoft e CrewAI</a:t>
+            </a:r>
+            <a:endParaRPr lang="en-US" sz="750" dirty="0"/>
+          </a:p>
+        </p:txBody>
+      </p:sp>
+      <p:sp>
+        <p:nvSpPr>
+          <p:cNvPr id="32" name="Text 30"/>
+          <p:cNvSpPr/>
+          <p:nvPr/>
+        </p:nvSpPr>
+        <p:spPr>
+          <a:xfrm>
+            <a:off x="777240" y="9765792"/>
+            <a:ext cx="6007608" cy="274320"/>
+          </a:xfrm>
+          <a:prstGeom prst="rect">
+            <a:avLst/>
+          </a:prstGeom>
+          <a:noFill/>
+          <a:ln/>
+        </p:spPr>
+        <p:txBody>
+          <a:bodyPr wrap="square" lIns="0" tIns="0" rIns="0" bIns="0" rtlCol="0" anchor="ctr"/>
+          <a:lstStyle/>
+          <a:p>
+            <a:pPr indent="0" marL="0">
+              <a:buNone/>
+            </a:pPr>
+            <a:r>
+              <a:rPr lang="en-US" sz="950" dirty="0">
+                <a:solidFill>
+                  <a:srgbClr val="232B3A"/>
+                </a:solidFill>
+                <a:latin typeface="Calibri" pitchFamily="34" charset="0"/>
+                <a:ea typeface="Calibri" pitchFamily="34" charset="-122"/>
+                <a:cs typeface="Calibri" pitchFamily="34" charset="-120"/>
+              </a:rPr>
+              <a:t>O primeiro passo não custa nada: o seu Mapa de Vazamento, em 48 horas.  ·  contato@abbaservices.com.br</a:t>
+            </a:r>
+            <a:endParaRPr lang="en-US" sz="950" dirty="0"/>
+          </a:p>
+        </p:txBody>
+      </p:sp>
+      <p:sp>
+        <p:nvSpPr>
+          <p:cNvPr id="33" name="Shape 31"/>
+          <p:cNvSpPr/>
+          <p:nvPr/>
+        </p:nvSpPr>
+        <p:spPr>
+          <a:xfrm>
+            <a:off x="777240" y="10195560"/>
+            <a:ext cx="6007608" cy="0"/>
           </a:xfrm>
           <a:prstGeom prst="line">
             <a:avLst/>
@@ -2057,14 +2141,14 @@
       </p:sp>
       <p:sp>
         <p:nvSpPr>
-          <p:cNvPr id="36" name="Text 34"/>
-          <p:cNvSpPr/>
-          <p:nvPr/>
-        </p:nvSpPr>
-        <p:spPr>
-          <a:xfrm>
-            <a:off x="777240" y="7690104"/>
-            <a:ext cx="457200" cy="457200"/>
+          <p:cNvPr id="34" name="Text 32"/>
+          <p:cNvSpPr/>
+          <p:nvPr/>
+        </p:nvSpPr>
+        <p:spPr>
+          <a:xfrm>
+            <a:off x="777240" y="10277856"/>
+            <a:ext cx="4389120" cy="201168"/>
           </a:xfrm>
           <a:prstGeom prst="rect">
             <a:avLst/>
@@ -2080,228 +2164,15 @@
               <a:buNone/>
             </a:pPr>
             <a:r>
-              <a:rPr lang="en-US" sz="2100" b="1" dirty="0">
-                <a:solidFill>
-                  <a:srgbClr val="B8985A"/>
-                </a:solidFill>
-                <a:latin typeface="Cambria" pitchFamily="34" charset="0"/>
-                <a:ea typeface="Cambria" pitchFamily="34" charset="-122"/>
-                <a:cs typeface="Cambria" pitchFamily="34" charset="-120"/>
-              </a:rPr>
-              <a:t>7</a:t>
-            </a:r>
-            <a:endParaRPr lang="en-US" sz="2100" dirty="0"/>
-          </a:p>
-        </p:txBody>
-      </p:sp>
-      <p:sp>
-        <p:nvSpPr>
-          <p:cNvPr id="37" name="Text 35"/>
-          <p:cNvSpPr/>
-          <p:nvPr/>
-        </p:nvSpPr>
-        <p:spPr>
-          <a:xfrm>
-            <a:off x="1325880" y="7744968"/>
-            <a:ext cx="5458968" cy="475488"/>
-          </a:xfrm>
-          <a:prstGeom prst="rect">
-            <a:avLst/>
-          </a:prstGeom>
-          <a:noFill/>
-          <a:ln/>
-        </p:spPr>
-        <p:txBody>
-          <a:bodyPr wrap="square" lIns="0" tIns="0" rIns="0" bIns="0" rtlCol="0" anchor="ctr"/>
-          <a:lstStyle/>
-          <a:p>
-            <a:pPr indent="0" marL="0">
-              <a:lnSpc>
-                <a:spcPts val="1350"/>
-              </a:lnSpc>
-              <a:buNone/>
-            </a:pPr>
-            <a:r>
-              <a:rPr lang="en-US" sz="1150" b="1" dirty="0">
-                <a:solidFill>
-                  <a:srgbClr val="1B2A4A"/>
-                </a:solidFill>
-                <a:latin typeface="Cambria" pitchFamily="34" charset="0"/>
-                <a:ea typeface="Cambria" pitchFamily="34" charset="-122"/>
-                <a:cs typeface="Cambria" pitchFamily="34" charset="-120"/>
-              </a:rPr>
-              <a:t>Conselheiro de IA  —  </a:t>
-            </a:r>
-            <a:pPr indent="0" marL="0">
-              <a:lnSpc>
-                <a:spcPts val="1350"/>
-              </a:lnSpc>
-              <a:buNone/>
-            </a:pPr>
-            <a:r>
-              <a:rPr lang="en-US" sz="980" dirty="0">
-                <a:solidFill>
-                  <a:srgbClr val="232B3A"/>
+              <a:rPr lang="en-US" sz="750" spc="220" kern="0" dirty="0">
+                <a:solidFill>
+                  <a:srgbClr val="5A6472"/>
                 </a:solidFill>
                 <a:latin typeface="Calibri" pitchFamily="34" charset="0"/>
                 <a:ea typeface="Calibri" pitchFamily="34" charset="-122"/>
                 <a:cs typeface="Calibri" pitchFamily="34" charset="-120"/>
               </a:rPr>
-              <a:t>A cadeira de estrategista do seu lado da mesa — também para quem já tem IA rodando.</a:t>
-            </a:r>
-            <a:endParaRPr lang="en-US" sz="1150" dirty="0"/>
-          </a:p>
-        </p:txBody>
-      </p:sp>
-      <p:sp>
-        <p:nvSpPr>
-          <p:cNvPr id="38" name="Shape 36"/>
-          <p:cNvSpPr/>
-          <p:nvPr/>
-        </p:nvSpPr>
-        <p:spPr>
-          <a:xfrm>
-            <a:off x="777240" y="8458200"/>
-            <a:ext cx="6007608" cy="914400"/>
-          </a:xfrm>
-          <a:prstGeom prst="rect">
-            <a:avLst/>
-          </a:prstGeom>
-          <a:solidFill>
-            <a:srgbClr val="F7F4EE"/>
-          </a:solidFill>
-          <a:ln/>
-        </p:spPr>
-      </p:sp>
-      <p:sp>
-        <p:nvSpPr>
-          <p:cNvPr id="39" name="Text 37"/>
-          <p:cNvSpPr/>
-          <p:nvPr/>
-        </p:nvSpPr>
-        <p:spPr>
-          <a:xfrm>
-            <a:off x="1051560" y="8577072"/>
-            <a:ext cx="5458968" cy="219456"/>
-          </a:xfrm>
-          <a:prstGeom prst="rect">
-            <a:avLst/>
-          </a:prstGeom>
-          <a:noFill/>
-          <a:ln/>
-        </p:spPr>
-        <p:txBody>
-          <a:bodyPr wrap="square" lIns="0" tIns="0" rIns="0" bIns="0" rtlCol="0" anchor="ctr"/>
-          <a:lstStyle/>
-          <a:p>
-            <a:pPr indent="0" marL="0">
-              <a:buNone/>
-            </a:pPr>
-            <a:r>
-              <a:rPr lang="en-US" sz="800" b="1" spc="200" kern="0" dirty="0">
-                <a:solidFill>
-                  <a:srgbClr val="B8985A"/>
-                </a:solidFill>
-                <a:latin typeface="Calibri" pitchFamily="34" charset="0"/>
-                <a:ea typeface="Calibri" pitchFamily="34" charset="-122"/>
-                <a:cs typeface="Calibri" pitchFamily="34" charset="-120"/>
-              </a:rPr>
-              <a:t>A mentalidade que instalamos em cada colaborador:</a:t>
-            </a:r>
-            <a:endParaRPr lang="en-US" sz="800" dirty="0"/>
-          </a:p>
-        </p:txBody>
-      </p:sp>
-      <p:sp>
-        <p:nvSpPr>
-          <p:cNvPr id="40" name="Text 38"/>
-          <p:cNvSpPr/>
-          <p:nvPr/>
-        </p:nvSpPr>
-        <p:spPr>
-          <a:xfrm>
-            <a:off x="1051560" y="8814816"/>
-            <a:ext cx="5458968" cy="475488"/>
-          </a:xfrm>
-          <a:prstGeom prst="rect">
-            <a:avLst/>
-          </a:prstGeom>
-          <a:noFill/>
-          <a:ln/>
-        </p:spPr>
-        <p:txBody>
-          <a:bodyPr wrap="square" lIns="0" tIns="0" rIns="0" bIns="0" rtlCol="0" anchor="ctr"/>
-          <a:lstStyle/>
-          <a:p>
-            <a:pPr indent="0" marL="0">
-              <a:lnSpc>
-                <a:spcPts val="1450"/>
-              </a:lnSpc>
-              <a:buNone/>
-            </a:pPr>
-            <a:r>
-              <a:rPr lang="en-US" sz="1050" i="1" dirty="0">
-                <a:solidFill>
-                  <a:srgbClr val="1B2A4A"/>
-                </a:solidFill>
-                <a:latin typeface="Cambria" pitchFamily="34" charset="0"/>
-                <a:ea typeface="Cambria" pitchFamily="34" charset="-122"/>
-                <a:cs typeface="Cambria" pitchFamily="34" charset="-120"/>
-              </a:rPr>
-              <a:t>O que eu posso parar de fazer, porque a IA agora faz? · O que posso começar a fazer, porque a IA agora permite? · O que só eu faço — e devo fazer ainda melhor?</a:t>
-            </a:r>
-            <a:endParaRPr lang="en-US" sz="1050" dirty="0"/>
-          </a:p>
-        </p:txBody>
-      </p:sp>
-      <p:sp>
-        <p:nvSpPr>
-          <p:cNvPr id="41" name="Text 39"/>
-          <p:cNvSpPr/>
-          <p:nvPr/>
-        </p:nvSpPr>
-        <p:spPr>
-          <a:xfrm>
-            <a:off x="777240" y="9509760"/>
-            <a:ext cx="6007608" cy="228600"/>
-          </a:xfrm>
-          <a:prstGeom prst="rect">
-            <a:avLst/>
-          </a:prstGeom>
-          <a:noFill/>
-          <a:ln/>
-        </p:spPr>
-        <p:txBody>
-          <a:bodyPr wrap="square" lIns="0" tIns="0" rIns="0" bIns="0" rtlCol="0" anchor="ctr"/>
-          <a:lstStyle/>
-          <a:p>
-            <a:pPr indent="0" marL="0">
-              <a:buNone/>
-            </a:pPr>
-            <a:r>
-              <a:rPr lang="en-US" sz="750" b="1" spc="200" kern="0" dirty="0">
-                <a:solidFill>
-                  <a:srgbClr val="B8985A"/>
-                </a:solidFill>
-                <a:latin typeface="Calibri" pitchFamily="34" charset="0"/>
-                <a:ea typeface="Calibri" pitchFamily="34" charset="-122"/>
-                <a:cs typeface="Calibri" pitchFamily="34" charset="-120"/>
-              </a:rPr>
-              <a:t>PARCEIROS OFICIAIS   </a:t>
-            </a:r>
-            <a:pPr indent="0" marL="0">
-              <a:buNone/>
-            </a:pPr>
-            <a:r>
-              <a:rPr lang="en-US" sz="950" dirty="0">
-                <a:solidFill>
-                  <a:srgbClr val="232B3A"/>
-                </a:solidFill>
-                <a:latin typeface="Calibri" pitchFamily="34" charset="0"/>
-                <a:ea typeface="Calibri" pitchFamily="34" charset="-122"/>
-                <a:cs typeface="Calibri" pitchFamily="34" charset="-120"/>
-              </a:rPr>
-              <a:t>Microsoft e CrewAI</a:t>
+              <a:t>ABBA — CONSULTORIA DE INTELIGÊNCIA ARTIFICIAL</a:t>
             </a:r>
             <a:endParaRPr lang="en-US" sz="750" dirty="0"/>
           </a:p>
@@ -2309,108 +2180,7 @@
       </p:sp>
       <p:sp>
         <p:nvSpPr>
-          <p:cNvPr id="42" name="Text 40"/>
-          <p:cNvSpPr/>
-          <p:nvPr/>
-        </p:nvSpPr>
-        <p:spPr>
-          <a:xfrm>
-            <a:off x="777240" y="9765792"/>
-            <a:ext cx="6007608" cy="274320"/>
-          </a:xfrm>
-          <a:prstGeom prst="rect">
-            <a:avLst/>
-          </a:prstGeom>
-          <a:noFill/>
-          <a:ln/>
-        </p:spPr>
-        <p:txBody>
-          <a:bodyPr wrap="square" lIns="0" tIns="0" rIns="0" bIns="0" rtlCol="0" anchor="ctr"/>
-          <a:lstStyle/>
-          <a:p>
-            <a:pPr indent="0" marL="0">
-              <a:buNone/>
-            </a:pPr>
-            <a:r>
-              <a:rPr lang="en-US" sz="950" dirty="0">
-                <a:solidFill>
-                  <a:srgbClr val="232B3A"/>
-                </a:solidFill>
-                <a:latin typeface="Calibri" pitchFamily="34" charset="0"/>
-                <a:ea typeface="Calibri" pitchFamily="34" charset="-122"/>
-                <a:cs typeface="Calibri" pitchFamily="34" charset="-120"/>
-              </a:rPr>
-              <a:t>O primeiro passo não custa nada: o seu Mapa de Vazamento, em 48 horas.  ·  comercial@abbaservices.com.br</a:t>
-            </a:r>
-            <a:endParaRPr lang="en-US" sz="950" dirty="0"/>
-          </a:p>
-        </p:txBody>
-      </p:sp>
-      <p:sp>
-        <p:nvSpPr>
-          <p:cNvPr id="43" name="Shape 41"/>
-          <p:cNvSpPr/>
-          <p:nvPr/>
-        </p:nvSpPr>
-        <p:spPr>
-          <a:xfrm>
-            <a:off x="777240" y="10195560"/>
-            <a:ext cx="6007608" cy="0"/>
-          </a:xfrm>
-          <a:prstGeom prst="line">
-            <a:avLst/>
-          </a:prstGeom>
-          <a:noFill/>
-          <a:ln w="9525">
-            <a:solidFill>
-              <a:srgbClr val="D9D2C4"/>
-            </a:solidFill>
-            <a:prstDash val="solid"/>
-          </a:ln>
-        </p:spPr>
-      </p:sp>
-      <p:sp>
-        <p:nvSpPr>
-          <p:cNvPr id="44" name="Text 42"/>
-          <p:cNvSpPr/>
-          <p:nvPr/>
-        </p:nvSpPr>
-        <p:spPr>
-          <a:xfrm>
-            <a:off x="777240" y="10277856"/>
-            <a:ext cx="4389120" cy="201168"/>
-          </a:xfrm>
-          <a:prstGeom prst="rect">
-            <a:avLst/>
-          </a:prstGeom>
-          <a:noFill/>
-          <a:ln/>
-        </p:spPr>
-        <p:txBody>
-          <a:bodyPr wrap="square" lIns="0" tIns="0" rIns="0" bIns="0" rtlCol="0" anchor="ctr"/>
-          <a:lstStyle/>
-          <a:p>
-            <a:pPr indent="0" marL="0">
-              <a:buNone/>
-            </a:pPr>
-            <a:r>
-              <a:rPr lang="en-US" sz="750" spc="220" kern="0" dirty="0">
-                <a:solidFill>
-                  <a:srgbClr val="5A6472"/>
-                </a:solidFill>
-                <a:latin typeface="Calibri" pitchFamily="34" charset="0"/>
-                <a:ea typeface="Calibri" pitchFamily="34" charset="-122"/>
-                <a:cs typeface="Calibri" pitchFamily="34" charset="-120"/>
-              </a:rPr>
-              <a:t>ABBA — CONSULTORIA DE INTELIGÊNCIA ARTIFICIAL</a:t>
-            </a:r>
-            <a:endParaRPr lang="en-US" sz="750" dirty="0"/>
-          </a:p>
-        </p:txBody>
-      </p:sp>
-      <p:sp>
-        <p:nvSpPr>
-          <p:cNvPr id="45" name="Text 43"/>
+          <p:cNvPr id="35" name="Text 33"/>
           <p:cNvSpPr/>
           <p:nvPr/>
         </p:nvSpPr>

--- a/08-materiais/modelos/abba-um-minuto.pptx
+++ b/08-materiais/modelos/abba-um-minuto.pptx
@@ -1554,7 +1554,7 @@
                 <a:ea typeface="Calibri" pitchFamily="34" charset="-122"/>
                 <a:cs typeface="Calibri" pitchFamily="34" charset="-120"/>
               </a:rPr>
-              <a:t>Agentes sob medida, em produção, com aprovação humana em tudo que é crítico.</a:t>
+              <a:t>Engenharia sob medida: arquitetura, integrações e agentes de IA em produção, com aprovação humana no que é crítico.</a:t>
             </a:r>
             <a:endParaRPr lang="en-US" sz="1150" dirty="0"/>
           </a:p>

--- a/08-materiais/modelos/abba-um-minuto.pptx
+++ b/08-materiais/modelos/abba-um-minuto.pptx
@@ -2032,8 +2032,8 @@
         </p:nvSpPr>
         <p:spPr>
           <a:xfrm>
-            <a:off x="777240" y="9509760"/>
-            <a:ext cx="6007608" cy="228600"/>
+            <a:off x="777240" y="9528048"/>
+            <a:ext cx="1554480" cy="201168"/>
           </a:xfrm>
           <a:prstGeom prst="rect">
             <a:avLst/>
@@ -2057,8 +2057,81 @@
                 <a:ea typeface="Calibri" pitchFamily="34" charset="-122"/>
                 <a:cs typeface="Calibri" pitchFamily="34" charset="-120"/>
               </a:rPr>
-              <a:t>PARCEIROS OFICIAIS   </a:t>
-            </a:r>
+              <a:t>PARCEIROS OFICIAIS</a:t>
+            </a:r>
+            <a:endParaRPr lang="en-US" sz="750" dirty="0"/>
+          </a:p>
+        </p:txBody>
+      </p:sp>
+      <p:pic>
+        <p:nvPicPr>
+          <p:cNvPr id="32" name="Image 0" descr="/tmp/claude-0/-home-user/3b340934-06d1-5f26-b467-4c811e620256/scratchpad/onepager/ms.png">    </p:cNvPr>
+          <p:cNvPicPr>
+            <a:picLocks noChangeAspect="1"/>
+          </p:cNvPicPr>
+          <p:nvPr/>
+        </p:nvPicPr>
+        <p:blipFill>
+          <a:blip r:embed="rId1"/>
+          <a:stretch>
+            <a:fillRect/>
+          </a:stretch>
+        </p:blipFill>
+        <p:spPr>
+          <a:xfrm>
+            <a:off x="2423160" y="9482328"/>
+            <a:ext cx="932688" cy="201168"/>
+          </a:xfrm>
+          <a:prstGeom prst="rect">
+            <a:avLst/>
+          </a:prstGeom>
+        </p:spPr>
+      </p:pic>
+      <p:pic>
+        <p:nvPicPr>
+          <p:cNvPr id="33" name="Image 1" descr="/tmp/claude-0/-home-user/3b340934-06d1-5f26-b467-4c811e620256/scratchpad/onepager/crewai-logo.png">    </p:cNvPr>
+          <p:cNvPicPr>
+            <a:picLocks noChangeAspect="1"/>
+          </p:cNvPicPr>
+          <p:nvPr/>
+        </p:nvPicPr>
+        <p:blipFill>
+          <a:blip r:embed="rId2"/>
+          <a:stretch>
+            <a:fillRect/>
+          </a:stretch>
+        </p:blipFill>
+        <p:spPr>
+          <a:xfrm>
+            <a:off x="3630168" y="9482328"/>
+            <a:ext cx="667512" cy="201168"/>
+          </a:xfrm>
+          <a:prstGeom prst="rect">
+            <a:avLst/>
+          </a:prstGeom>
+        </p:spPr>
+      </p:pic>
+      <p:sp>
+        <p:nvSpPr>
+          <p:cNvPr id="34" name="Text 30"/>
+          <p:cNvSpPr/>
+          <p:nvPr/>
+        </p:nvSpPr>
+        <p:spPr>
+          <a:xfrm>
+            <a:off x="777240" y="9765792"/>
+            <a:ext cx="6007608" cy="274320"/>
+          </a:xfrm>
+          <a:prstGeom prst="rect">
+            <a:avLst/>
+          </a:prstGeom>
+          <a:noFill/>
+          <a:ln/>
+        </p:spPr>
+        <p:txBody>
+          <a:bodyPr wrap="square" lIns="0" tIns="0" rIns="0" bIns="0" rtlCol="0" anchor="ctr"/>
+          <a:lstStyle/>
+          <a:p>
             <a:pPr indent="0" marL="0">
               <a:buNone/>
             </a:pPr>
@@ -2071,45 +2144,6 @@
                 <a:ea typeface="Calibri" pitchFamily="34" charset="-122"/>
                 <a:cs typeface="Calibri" pitchFamily="34" charset="-120"/>
               </a:rPr>
-              <a:t>Microsoft e CrewAI</a:t>
-            </a:r>
-            <a:endParaRPr lang="en-US" sz="750" dirty="0"/>
-          </a:p>
-        </p:txBody>
-      </p:sp>
-      <p:sp>
-        <p:nvSpPr>
-          <p:cNvPr id="32" name="Text 30"/>
-          <p:cNvSpPr/>
-          <p:nvPr/>
-        </p:nvSpPr>
-        <p:spPr>
-          <a:xfrm>
-            <a:off x="777240" y="9765792"/>
-            <a:ext cx="6007608" cy="274320"/>
-          </a:xfrm>
-          <a:prstGeom prst="rect">
-            <a:avLst/>
-          </a:prstGeom>
-          <a:noFill/>
-          <a:ln/>
-        </p:spPr>
-        <p:txBody>
-          <a:bodyPr wrap="square" lIns="0" tIns="0" rIns="0" bIns="0" rtlCol="0" anchor="ctr"/>
-          <a:lstStyle/>
-          <a:p>
-            <a:pPr indent="0" marL="0">
-              <a:buNone/>
-            </a:pPr>
-            <a:r>
-              <a:rPr lang="en-US" sz="950" dirty="0">
-                <a:solidFill>
-                  <a:srgbClr val="232B3A"/>
-                </a:solidFill>
-                <a:latin typeface="Calibri" pitchFamily="34" charset="0"/>
-                <a:ea typeface="Calibri" pitchFamily="34" charset="-122"/>
-                <a:cs typeface="Calibri" pitchFamily="34" charset="-120"/>
-              </a:rPr>
               <a:t>O primeiro passo não custa nada: o seu Mapa de Vazamento, em 48 horas.  ·  contato@abbaservices.com.br</a:t>
             </a:r>
             <a:endParaRPr lang="en-US" sz="950" dirty="0"/>
@@ -2118,7 +2152,7 @@
       </p:sp>
       <p:sp>
         <p:nvSpPr>
-          <p:cNvPr id="33" name="Shape 31"/>
+          <p:cNvPr id="35" name="Shape 31"/>
           <p:cNvSpPr/>
           <p:nvPr/>
         </p:nvSpPr>
@@ -2141,7 +2175,7 @@
       </p:sp>
       <p:sp>
         <p:nvSpPr>
-          <p:cNvPr id="34" name="Text 32"/>
+          <p:cNvPr id="36" name="Text 32"/>
           <p:cNvSpPr/>
           <p:nvPr/>
         </p:nvSpPr>
@@ -2180,7 +2214,7 @@
       </p:sp>
       <p:sp>
         <p:nvSpPr>
-          <p:cNvPr id="35" name="Text 33"/>
+          <p:cNvPr id="37" name="Text 33"/>
           <p:cNvSpPr/>
           <p:nvPr/>
         </p:nvSpPr>

--- a/08-materiais/modelos/abba-um-minuto.pptx
+++ b/08-materiais/modelos/abba-um-minuto.pptx
@@ -1031,7 +1031,7 @@
                 <a:ea typeface="Calibri" pitchFamily="34" charset="-122"/>
                 <a:cs typeface="Calibri" pitchFamily="34" charset="-120"/>
               </a:rPr>
-              <a:t>Construímos as soluções que melhoram o dia a dia da operação, formamos as pessoas para trabalhar com IA — e ficamos ao seu lado acompanhando, mês a mês, os resultados de cada solução.</a:t>
+              <a:t>Construímos as soluções que melhoram o dia a dia da operação, formamos as pessoas para trabalhar com IA e ficamos ao seu lado acompanhando, mês a mês, os resultados de cada solução.</a:t>
             </a:r>
             <a:endParaRPr lang="en-US" sz="1100" dirty="0"/>
           </a:p>
@@ -1174,7 +1174,7 @@
                 <a:ea typeface="Cambria" pitchFamily="34" charset="-122"/>
                 <a:cs typeface="Cambria" pitchFamily="34" charset="-120"/>
               </a:rPr>
-              <a:t>A primeira conversa  —  </a:t>
+              <a:t>A primeira conversa.   </a:t>
             </a:r>
             <a:pPr indent="0" marL="0">
               <a:lnSpc>
@@ -1191,7 +1191,7 @@
                 <a:ea typeface="Calibri" pitchFamily="34" charset="-122"/>
                 <a:cs typeface="Calibri" pitchFamily="34" charset="-120"/>
               </a:rPr>
-              <a:t>45 minutos — e o Mapa de Vazamento gratuito, com uma estimativa em reais do que pode estar vazando.</a:t>
+              <a:t>45 minutos e uma análise gratuita da sua empresa, feita na hora, com uma estimativa em reais do que pode estar vazando.</a:t>
             </a:r>
             <a:endParaRPr lang="en-US" sz="1150" dirty="0"/>
           </a:p>
@@ -1295,7 +1295,7 @@
                 <a:ea typeface="Cambria" pitchFamily="34" charset="-122"/>
                 <a:cs typeface="Cambria" pitchFamily="34" charset="-120"/>
               </a:rPr>
-              <a:t>Assessment  —  </a:t>
+              <a:t>Assessment.   </a:t>
             </a:r>
             <a:pPr indent="0" marL="0">
               <a:lnSpc>
@@ -1416,7 +1416,7 @@
                 <a:ea typeface="Cambria" pitchFamily="34" charset="-122"/>
                 <a:cs typeface="Cambria" pitchFamily="34" charset="-120"/>
               </a:rPr>
-              <a:t>Protótipo de caso de uso  —  </a:t>
+              <a:t>Protótipo de caso de uso.   </a:t>
             </a:r>
             <a:pPr indent="0" marL="0">
               <a:lnSpc>
@@ -1537,7 +1537,7 @@
                 <a:ea typeface="Cambria" pitchFamily="34" charset="-122"/>
                 <a:cs typeface="Cambria" pitchFamily="34" charset="-120"/>
               </a:rPr>
-              <a:t>Construção e implantação  —  </a:t>
+              <a:t>Construção e implantação.   </a:t>
             </a:r>
             <a:pPr indent="0" marL="0">
               <a:lnSpc>
@@ -1658,7 +1658,7 @@
                 <a:ea typeface="Cambria" pitchFamily="34" charset="-122"/>
                 <a:cs typeface="Cambria" pitchFamily="34" charset="-120"/>
               </a:rPr>
-              <a:t>Treinamento + ABBA Portal  —  </a:t>
+              <a:t>Treinamento + ABBA Portal.   </a:t>
             </a:r>
             <a:pPr indent="0" marL="0">
               <a:lnSpc>
@@ -1779,7 +1779,7 @@
                 <a:ea typeface="Cambria" pitchFamily="34" charset="-122"/>
                 <a:cs typeface="Cambria" pitchFamily="34" charset="-120"/>
               </a:rPr>
-              <a:t>Sistemas gerenciados  —  </a:t>
+              <a:t>Sistemas gerenciados.   </a:t>
             </a:r>
             <a:pPr indent="0" marL="0">
               <a:lnSpc>
@@ -1900,7 +1900,7 @@
                 <a:ea typeface="Cambria" pitchFamily="34" charset="-122"/>
                 <a:cs typeface="Cambria" pitchFamily="34" charset="-120"/>
               </a:rPr>
-              <a:t>Conselheiro de IA  —  </a:t>
+              <a:t>Conselheiro de IA.   </a:t>
             </a:r>
             <a:pPr indent="0" marL="0">
               <a:lnSpc>
@@ -1917,7 +1917,7 @@
                 <a:ea typeface="Calibri" pitchFamily="34" charset="-122"/>
                 <a:cs typeface="Calibri" pitchFamily="34" charset="-120"/>
               </a:rPr>
-              <a:t>A cadeira de estrategista do seu lado da mesa — também para quem já tem IA rodando.</a:t>
+              <a:t>A cadeira de estrategista do seu lado da mesa, também para quem já tem IA rodando.</a:t>
             </a:r>
             <a:endParaRPr lang="en-US" sz="1150" dirty="0"/>
           </a:p>
@@ -2018,7 +2018,7 @@
                 <a:ea typeface="Cambria" pitchFamily="34" charset="-122"/>
                 <a:cs typeface="Cambria" pitchFamily="34" charset="-120"/>
               </a:rPr>
-              <a:t>O que eu posso parar de fazer, porque a IA agora faz? · O que posso começar a fazer, porque a IA agora permite? · O que só eu faço — e devo fazer ainda melhor?</a:t>
+              <a:t>O que eu posso parar de fazer, porque a IA agora faz? · O que posso começar a fazer, porque a IA agora permite? · O que só eu faço, e devo fazer ainda melhor?</a:t>
             </a:r>
             <a:endParaRPr lang="en-US" sz="1050" dirty="0"/>
           </a:p>
@@ -2144,7 +2144,7 @@
                 <a:ea typeface="Calibri" pitchFamily="34" charset="-122"/>
                 <a:cs typeface="Calibri" pitchFamily="34" charset="-120"/>
               </a:rPr>
-              <a:t>O primeiro passo não custa nada: o seu Mapa de Vazamento, em 48 horas.  ·  contato@abbaservices.com.br</a:t>
+              <a:t>O primeiro passo não custa nada: a sua análise gratuita, feita em cinco minutos.  ·  contato@abbaservices.com.br</a:t>
             </a:r>
             <a:endParaRPr lang="en-US" sz="950" dirty="0"/>
           </a:p>
@@ -2206,7 +2206,7 @@
                 <a:ea typeface="Calibri" pitchFamily="34" charset="-122"/>
                 <a:cs typeface="Calibri" pitchFamily="34" charset="-120"/>
               </a:rPr>
-              <a:t>ABBA — CONSULTORIA DE INTELIGÊNCIA ARTIFICIAL</a:t>
+              <a:t>ABBA · CONSULTORIA DE INTELIGÊNCIA ARTIFICIAL</a:t>
             </a:r>
             <a:endParaRPr lang="en-US" sz="750" dirty="0"/>
           </a:p>

--- a/08-materiais/modelos/abba-um-minuto.pptx
+++ b/08-materiais/modelos/abba-um-minuto.pptx
@@ -10,8 +10,8 @@
   <p:notesMasterIdLst>
     <p:notesMasterId r:id="rId3"/>
   </p:notesMasterIdLst>
-  <p:sldSz cx="7562088" cy="10689336"/>
-  <p:notesSz cx="10689336" cy="7562088"/>
+  <p:sldSz cx="12188952" cy="6858000"/>
+  <p:notesSz cx="6858000" cy="12188952"/>
   <p:defaultTextStyle>
     <a:lvl1pPr marL="0" algn="l" defTabSz="914400" rtl="0" eaLnBrk="1" latinLnBrk="0" hangingPunct="1">
       <a:defRPr sz="1800" kern="1200">
@@ -883,8 +883,8 @@
         </p:nvSpPr>
         <p:spPr>
           <a:xfrm>
-            <a:off x="777240" y="685800"/>
-            <a:ext cx="1828800" cy="292608"/>
+            <a:off x="822960" y="548640"/>
+            <a:ext cx="5486400" cy="292608"/>
           </a:xfrm>
           <a:prstGeom prst="rect">
             <a:avLst/>
@@ -893,24 +893,24 @@
           <a:ln/>
         </p:spPr>
         <p:txBody>
-          <a:bodyPr wrap="square" lIns="0" tIns="0" rIns="0" bIns="0" rtlCol="0" anchor="ctr"/>
+          <a:bodyPr wrap="square" rtlCol="0" anchor="ctr"/>
           <a:lstStyle/>
           <a:p>
-            <a:pPr indent="0" marL="0">
+            <a:pPr algn="l" indent="0" marL="0">
               <a:buNone/>
             </a:pPr>
             <a:r>
-              <a:rPr lang="en-US" sz="1300" b="1" spc="500" kern="0" dirty="0">
+              <a:rPr lang="en-US" sz="1100" b="1" spc="300" kern="0" dirty="0">
                 <a:solidFill>
-                  <a:srgbClr val="1B2A4A"/>
+                  <a:srgbClr val="C2A35B"/>
                 </a:solidFill>
                 <a:latin typeface="Calibri" pitchFamily="34" charset="0"/>
                 <a:ea typeface="Calibri" pitchFamily="34" charset="-122"/>
                 <a:cs typeface="Calibri" pitchFamily="34" charset="-120"/>
               </a:rPr>
-              <a:t>ABBA</a:t>
+              <a:t>ABBA · CONSULTORIA DE IA · NUM MINUTO</a:t>
             </a:r>
-            <a:endParaRPr lang="en-US" sz="1300" dirty="0"/>
+            <a:endParaRPr lang="en-US" sz="1100" dirty="0"/>
           </a:p>
         </p:txBody>
       </p:sp>
@@ -922,8 +922,8 @@
         </p:nvSpPr>
         <p:spPr>
           <a:xfrm>
-            <a:off x="777240" y="969264"/>
-            <a:ext cx="4114800" cy="201168"/>
+            <a:off x="822960" y="914400"/>
+            <a:ext cx="10543032" cy="914400"/>
           </a:xfrm>
           <a:prstGeom prst="rect">
             <a:avLst/>
@@ -932,46 +932,7 @@
           <a:ln/>
         </p:spPr>
         <p:txBody>
-          <a:bodyPr wrap="square" lIns="0" tIns="0" rIns="0" bIns="0" rtlCol="0" anchor="ctr"/>
-          <a:lstStyle/>
-          <a:p>
-            <a:pPr indent="0" marL="0">
-              <a:buNone/>
-            </a:pPr>
-            <a:r>
-              <a:rPr lang="en-US" sz="800" spc="260" kern="0" dirty="0">
-                <a:solidFill>
-                  <a:srgbClr val="5A6472"/>
-                </a:solidFill>
-                <a:latin typeface="Calibri" pitchFamily="34" charset="0"/>
-                <a:ea typeface="Calibri" pitchFamily="34" charset="-122"/>
-                <a:cs typeface="Calibri" pitchFamily="34" charset="-120"/>
-              </a:rPr>
-              <a:t>CONSULTORIA DE INTELIGÊNCIA ARTIFICIAL</a:t>
-            </a:r>
-            <a:endParaRPr lang="en-US" sz="800" dirty="0"/>
-          </a:p>
-        </p:txBody>
-      </p:sp>
-      <p:sp>
-        <p:nvSpPr>
-          <p:cNvPr id="4" name="Text 2"/>
-          <p:cNvSpPr/>
-          <p:nvPr/>
-        </p:nvSpPr>
-        <p:spPr>
-          <a:xfrm>
-            <a:off x="777240" y="1600200"/>
-            <a:ext cx="5212080" cy="1280160"/>
-          </a:xfrm>
-          <a:prstGeom prst="rect">
-            <a:avLst/>
-          </a:prstGeom>
-          <a:noFill/>
-          <a:ln/>
-        </p:spPr>
-        <p:txBody>
-          <a:bodyPr wrap="square" lIns="0" tIns="0" rIns="0" bIns="0" rtlCol="0" anchor="ctr"/>
+          <a:bodyPr wrap="square" rtlCol="0" anchor="ctr"/>
           <a:lstStyle/>
           <a:p>
             <a:pPr indent="0" marL="0">
@@ -989,11 +950,34 @@
                 <a:ea typeface="Cambria" pitchFamily="34" charset="-122"/>
                 <a:cs typeface="Cambria" pitchFamily="34" charset="-120"/>
               </a:rPr>
-              <a:t>Tornamos a sua empresa AI native.</a:t>
+              <a:t>Tornamos a sua empresa AI native — e provamos, com número.</a:t>
             </a:r>
             <a:endParaRPr lang="en-US" sz="3000" dirty="0"/>
           </a:p>
         </p:txBody>
+      </p:sp>
+      <p:sp>
+        <p:nvSpPr>
+          <p:cNvPr id="4" name="Shape 2"/>
+          <p:cNvSpPr/>
+          <p:nvPr/>
+        </p:nvSpPr>
+        <p:spPr>
+          <a:xfrm>
+            <a:off x="822960" y="1920240"/>
+            <a:ext cx="2011680" cy="0"/>
+          </a:xfrm>
+          <a:prstGeom prst="line">
+            <a:avLst/>
+          </a:prstGeom>
+          <a:noFill/>
+          <a:ln w="19050">
+            <a:solidFill>
+              <a:srgbClr val="C2A35B"/>
+            </a:solidFill>
+            <a:prstDash val="solid"/>
+          </a:ln>
+        </p:spPr>
       </p:sp>
       <p:sp>
         <p:nvSpPr>
@@ -1003,8 +987,8 @@
         </p:nvSpPr>
         <p:spPr>
           <a:xfrm>
-            <a:off x="777240" y="2971800"/>
-            <a:ext cx="6007608" cy="640080"/>
+            <a:off x="822960" y="2148840"/>
+            <a:ext cx="10543032" cy="960120"/>
           </a:xfrm>
           <a:prstGeom prst="rect">
             <a:avLst/>
@@ -1013,27 +997,27 @@
           <a:ln/>
         </p:spPr>
         <p:txBody>
-          <a:bodyPr wrap="square" lIns="0" tIns="0" rIns="0" bIns="0" rtlCol="0" anchor="ctr"/>
+          <a:bodyPr wrap="square" rtlCol="0" anchor="ctr"/>
           <a:lstStyle/>
           <a:p>
-            <a:pPr indent="0" marL="0">
+            <a:pPr algn="l" indent="0" marL="0">
               <a:lnSpc>
-                <a:spcPts val="1550"/>
+                <a:spcPts val="2000"/>
               </a:lnSpc>
               <a:buNone/>
             </a:pPr>
             <a:r>
-              <a:rPr lang="en-US" sz="1100" dirty="0">
+              <a:rPr lang="en-US" sz="1350" dirty="0">
                 <a:solidFill>
-                  <a:srgbClr val="232B3A"/>
+                  <a:srgbClr val="33394A"/>
                 </a:solidFill>
                 <a:latin typeface="Calibri" pitchFamily="34" charset="0"/>
                 <a:ea typeface="Calibri" pitchFamily="34" charset="-122"/>
                 <a:cs typeface="Calibri" pitchFamily="34" charset="-120"/>
               </a:rPr>
-              <a:t>Construímos as soluções que melhoram o dia a dia da operação, formamos as pessoas para trabalhar com IA e ficamos ao seu lado acompanhando, mês a mês, os resultados de cada solução.</a:t>
+              <a:t>Mais de 80% dos projetos de IA falham — o dobro dos projetos comuns de tecnologia — e a causa número um é começar sem combinar o que seria dar certo (RAND). Nós trabalhamos exatamente aí: cada caso nasce com a métrica combinada por escrito, é medido por terceiro e assinado por gente da sua empresa.</a:t>
             </a:r>
-            <a:endParaRPr lang="en-US" sz="1100" dirty="0"/>
+            <a:endParaRPr lang="en-US" sz="1350" dirty="0"/>
           </a:p>
         </p:txBody>
       </p:sp>
@@ -1045,16 +1029,16 @@
         </p:nvSpPr>
         <p:spPr>
           <a:xfrm>
-            <a:off x="777240" y="3840480"/>
-            <a:ext cx="6007608" cy="0"/>
+            <a:off x="822960" y="3291840"/>
+            <a:ext cx="3270504" cy="0"/>
           </a:xfrm>
           <a:prstGeom prst="line">
             <a:avLst/>
           </a:prstGeom>
           <a:noFill/>
-          <a:ln w="9525">
+          <a:ln w="15240">
             <a:solidFill>
-              <a:srgbClr val="D9D2C4"/>
+              <a:srgbClr val="C2A35B"/>
             </a:solidFill>
             <a:prstDash val="solid"/>
           </a:ln>
@@ -1068,8 +1052,8 @@
         </p:nvSpPr>
         <p:spPr>
           <a:xfrm>
-            <a:off x="777240" y="4005072"/>
-            <a:ext cx="6007608" cy="219456"/>
+            <a:off x="822960" y="3429000"/>
+            <a:ext cx="3270504" cy="292608"/>
           </a:xfrm>
           <a:prstGeom prst="rect">
             <a:avLst/>
@@ -1078,24 +1062,24 @@
           <a:ln/>
         </p:spPr>
         <p:txBody>
-          <a:bodyPr wrap="square" lIns="0" tIns="0" rIns="0" bIns="0" rtlCol="0" anchor="ctr"/>
+          <a:bodyPr wrap="square" rtlCol="0" anchor="ctr"/>
           <a:lstStyle/>
           <a:p>
-            <a:pPr indent="0" marL="0">
+            <a:pPr algn="l" indent="0" marL="0">
               <a:buNone/>
             </a:pPr>
             <a:r>
-              <a:rPr lang="en-US" sz="900" b="1" spc="320" kern="0" dirty="0">
+              <a:rPr lang="en-US" sz="1050" b="1" spc="300" kern="0" dirty="0">
                 <a:solidFill>
-                  <a:srgbClr val="B8985A"/>
+                  <a:srgbClr val="C2A35B"/>
                 </a:solidFill>
                 <a:latin typeface="Calibri" pitchFamily="34" charset="0"/>
                 <a:ea typeface="Calibri" pitchFamily="34" charset="-122"/>
                 <a:cs typeface="Calibri" pitchFamily="34" charset="-120"/>
               </a:rPr>
-              <a:t>A JORNADA, EM SETE PASSOS</a:t>
+              <a:t>1 · O MAPA DE VAZAMENTO</a:t>
             </a:r>
-            <a:endParaRPr lang="en-US" sz="900" dirty="0"/>
+            <a:endParaRPr lang="en-US" sz="1050" dirty="0"/>
           </a:p>
         </p:txBody>
       </p:sp>
@@ -1107,8 +1091,8 @@
         </p:nvSpPr>
         <p:spPr>
           <a:xfrm>
-            <a:off x="777240" y="4288536"/>
-            <a:ext cx="457200" cy="457200"/>
+            <a:off x="822960" y="3767328"/>
+            <a:ext cx="3270504" cy="1737360"/>
           </a:xfrm>
           <a:prstGeom prst="rect">
             <a:avLst/>
@@ -1117,56 +1101,287 @@
           <a:ln/>
         </p:spPr>
         <p:txBody>
-          <a:bodyPr wrap="square" lIns="0" tIns="0" rIns="0" bIns="0" rtlCol="0" anchor="ctr"/>
+          <a:bodyPr wrap="square" rtlCol="0" anchor="ctr"/>
           <a:lstStyle/>
           <a:p>
-            <a:pPr indent="0" marL="0">
-              <a:buNone/>
-            </a:pPr>
-            <a:r>
-              <a:rPr lang="en-US" sz="2100" b="1" dirty="0">
-                <a:solidFill>
-                  <a:srgbClr val="B8985A"/>
-                </a:solidFill>
-                <a:latin typeface="Cambria" pitchFamily="34" charset="0"/>
-                <a:ea typeface="Cambria" pitchFamily="34" charset="-122"/>
-                <a:cs typeface="Cambria" pitchFamily="34" charset="-120"/>
-              </a:rPr>
-              <a:t>1</a:t>
-            </a:r>
-            <a:endParaRPr lang="en-US" sz="2100" dirty="0"/>
-          </a:p>
-        </p:txBody>
-      </p:sp>
-      <p:sp>
-        <p:nvSpPr>
-          <p:cNvPr id="9" name="Text 7"/>
-          <p:cNvSpPr/>
-          <p:nvPr/>
-        </p:nvSpPr>
-        <p:spPr>
-          <a:xfrm>
-            <a:off x="1325880" y="4343400"/>
-            <a:ext cx="5458968" cy="475488"/>
-          </a:xfrm>
-          <a:prstGeom prst="rect">
-            <a:avLst/>
-          </a:prstGeom>
-          <a:noFill/>
-          <a:ln/>
-        </p:spPr>
-        <p:txBody>
-          <a:bodyPr wrap="square" lIns="0" tIns="0" rIns="0" bIns="0" rtlCol="0" anchor="ctr"/>
-          <a:lstStyle/>
-          <a:p>
-            <a:pPr indent="0" marL="0">
+            <a:pPr algn="l" indent="0" marL="0">
               <a:lnSpc>
-                <a:spcPts val="1350"/>
+                <a:spcPts val="1650"/>
               </a:lnSpc>
               <a:buNone/>
             </a:pPr>
             <a:r>
-              <a:rPr lang="en-US" sz="1150" b="1" dirty="0">
+              <a:rPr lang="en-US" sz="1150" dirty="0">
+                <a:solidFill>
+                  <a:srgbClr val="33394A"/>
+                </a:solidFill>
+                <a:latin typeface="Calibri" pitchFamily="34" charset="0"/>
+                <a:ea typeface="Calibri" pitchFamily="34" charset="-122"/>
+                <a:cs typeface="Calibri" pitchFamily="34" charset="-120"/>
+              </a:rPr>
+              <a:t>Grátis, feito de fora, com um número em reais dentro: onde estimamos que a sua operação está vazando dinheiro. É por aqui que toda conversa começa.</a:t>
+            </a:r>
+            <a:endParaRPr lang="en-US" sz="1150" dirty="0"/>
+          </a:p>
+        </p:txBody>
+      </p:sp>
+      <p:sp>
+        <p:nvSpPr>
+          <p:cNvPr id="9" name="Shape 7"/>
+          <p:cNvSpPr/>
+          <p:nvPr/>
+        </p:nvSpPr>
+        <p:spPr>
+          <a:xfrm>
+            <a:off x="4459224" y="3291840"/>
+            <a:ext cx="3270504" cy="0"/>
+          </a:xfrm>
+          <a:prstGeom prst="line">
+            <a:avLst/>
+          </a:prstGeom>
+          <a:noFill/>
+          <a:ln w="15240">
+            <a:solidFill>
+              <a:srgbClr val="C2A35B"/>
+            </a:solidFill>
+            <a:prstDash val="solid"/>
+          </a:ln>
+        </p:spPr>
+      </p:sp>
+      <p:sp>
+        <p:nvSpPr>
+          <p:cNvPr id="10" name="Text 8"/>
+          <p:cNvSpPr/>
+          <p:nvPr/>
+        </p:nvSpPr>
+        <p:spPr>
+          <a:xfrm>
+            <a:off x="4459224" y="3429000"/>
+            <a:ext cx="3270504" cy="292608"/>
+          </a:xfrm>
+          <a:prstGeom prst="rect">
+            <a:avLst/>
+          </a:prstGeom>
+          <a:noFill/>
+          <a:ln/>
+        </p:spPr>
+        <p:txBody>
+          <a:bodyPr wrap="square" rtlCol="0" anchor="ctr"/>
+          <a:lstStyle/>
+          <a:p>
+            <a:pPr algn="l" indent="0" marL="0">
+              <a:buNone/>
+            </a:pPr>
+            <a:r>
+              <a:rPr lang="en-US" sz="1050" b="1" spc="300" kern="0" dirty="0">
+                <a:solidFill>
+                  <a:srgbClr val="C2A35B"/>
+                </a:solidFill>
+                <a:latin typeface="Calibri" pitchFamily="34" charset="0"/>
+                <a:ea typeface="Calibri" pitchFamily="34" charset="-122"/>
+                <a:cs typeface="Calibri" pitchFamily="34" charset="-120"/>
+              </a:rPr>
+              <a:t>2 · O PROGRAMA — UM ANO</a:t>
+            </a:r>
+            <a:endParaRPr lang="en-US" sz="1050" dirty="0"/>
+          </a:p>
+        </p:txBody>
+      </p:sp>
+      <p:sp>
+        <p:nvSpPr>
+          <p:cNvPr id="11" name="Text 9"/>
+          <p:cNvSpPr/>
+          <p:nvPr/>
+        </p:nvSpPr>
+        <p:spPr>
+          <a:xfrm>
+            <a:off x="4459224" y="3767328"/>
+            <a:ext cx="3270504" cy="1737360"/>
+          </a:xfrm>
+          <a:prstGeom prst="rect">
+            <a:avLst/>
+          </a:prstGeom>
+          <a:noFill/>
+          <a:ln/>
+        </p:spPr>
+        <p:txBody>
+          <a:bodyPr wrap="square" rtlCol="0" anchor="ctr"/>
+          <a:lstStyle/>
+          <a:p>
+            <a:pPr algn="l" indent="0" marL="0">
+              <a:lnSpc>
+                <a:spcPts val="1650"/>
+              </a:lnSpc>
+              <a:buNone/>
+            </a:pPr>
+            <a:r>
+              <a:rPr lang="en-US" sz="1150" dirty="0">
+                <a:solidFill>
+                  <a:srgbClr val="33394A"/>
+                </a:solidFill>
+                <a:latin typeface="Calibri" pitchFamily="34" charset="0"/>
+                <a:ea typeface="Calibri" pitchFamily="34" charset="-122"/>
+                <a:cs typeface="Calibri" pitchFamily="34" charset="-120"/>
+              </a:rPr>
+              <a:t>Três fases: a Prova (um caso construído e medido em seis semanas), a Construção (sistemas em produção + a sua equipe formada) e a Durabilidade (a capacidade rodando sem consultor no meio). Porta de saída limpa em cada fase.</a:t>
+            </a:r>
+            <a:endParaRPr lang="en-US" sz="1150" dirty="0"/>
+          </a:p>
+        </p:txBody>
+      </p:sp>
+      <p:sp>
+        <p:nvSpPr>
+          <p:cNvPr id="12" name="Shape 10"/>
+          <p:cNvSpPr/>
+          <p:nvPr/>
+        </p:nvSpPr>
+        <p:spPr>
+          <a:xfrm>
+            <a:off x="8095488" y="3291840"/>
+            <a:ext cx="3270504" cy="0"/>
+          </a:xfrm>
+          <a:prstGeom prst="line">
+            <a:avLst/>
+          </a:prstGeom>
+          <a:noFill/>
+          <a:ln w="15240">
+            <a:solidFill>
+              <a:srgbClr val="C2A35B"/>
+            </a:solidFill>
+            <a:prstDash val="solid"/>
+          </a:ln>
+        </p:spPr>
+      </p:sp>
+      <p:sp>
+        <p:nvSpPr>
+          <p:cNvPr id="13" name="Text 11"/>
+          <p:cNvSpPr/>
+          <p:nvPr/>
+        </p:nvSpPr>
+        <p:spPr>
+          <a:xfrm>
+            <a:off x="8095488" y="3429000"/>
+            <a:ext cx="3270504" cy="292608"/>
+          </a:xfrm>
+          <a:prstGeom prst="rect">
+            <a:avLst/>
+          </a:prstGeom>
+          <a:noFill/>
+          <a:ln/>
+        </p:spPr>
+        <p:txBody>
+          <a:bodyPr wrap="square" rtlCol="0" anchor="ctr"/>
+          <a:lstStyle/>
+          <a:p>
+            <a:pPr algn="l" indent="0" marL="0">
+              <a:buNone/>
+            </a:pPr>
+            <a:r>
+              <a:rPr lang="en-US" sz="1050" b="1" spc="300" kern="0" dirty="0">
+                <a:solidFill>
+                  <a:srgbClr val="C2A35B"/>
+                </a:solidFill>
+                <a:latin typeface="Calibri" pitchFamily="34" charset="0"/>
+                <a:ea typeface="Calibri" pitchFamily="34" charset="-122"/>
+                <a:cs typeface="Calibri" pitchFamily="34" charset="-120"/>
+              </a:rPr>
+              <a:t>3 · DEPOIS DO PRIMEIRO ANO</a:t>
+            </a:r>
+            <a:endParaRPr lang="en-US" sz="1050" dirty="0"/>
+          </a:p>
+        </p:txBody>
+      </p:sp>
+      <p:sp>
+        <p:nvSpPr>
+          <p:cNvPr id="14" name="Text 12"/>
+          <p:cNvSpPr/>
+          <p:nvPr/>
+        </p:nvSpPr>
+        <p:spPr>
+          <a:xfrm>
+            <a:off x="8095488" y="3767328"/>
+            <a:ext cx="3270504" cy="1737360"/>
+          </a:xfrm>
+          <a:prstGeom prst="rect">
+            <a:avLst/>
+          </a:prstGeom>
+          <a:noFill/>
+          <a:ln/>
+        </p:spPr>
+        <p:txBody>
+          <a:bodyPr wrap="square" rtlCol="0" anchor="ctr"/>
+          <a:lstStyle/>
+          <a:p>
+            <a:pPr algn="l" indent="0" marL="0">
+              <a:lnSpc>
+                <a:spcPts val="1650"/>
+              </a:lnSpc>
+              <a:buNone/>
+            </a:pPr>
+            <a:r>
+              <a:rPr lang="en-US" sz="1150" dirty="0">
+                <a:solidFill>
+                  <a:srgbClr val="33394A"/>
+                </a:solidFill>
+                <a:latin typeface="Calibri" pitchFamily="34" charset="0"/>
+                <a:ea typeface="Calibri" pitchFamily="34" charset="-122"/>
+                <a:cs typeface="Calibri" pitchFamily="34" charset="-120"/>
+              </a:rPr>
+              <a:t>A relação vira medição anual: operação acompanhada, conselho trimestral e o Exame Anual de IA — a maturidade re-medida e comparada ano contra ano. Quem já tem IA rodando entra pelo Conselheiro de IA.</a:t>
+            </a:r>
+            <a:endParaRPr lang="en-US" sz="1150" dirty="0"/>
+          </a:p>
+        </p:txBody>
+      </p:sp>
+      <p:sp>
+        <p:nvSpPr>
+          <p:cNvPr id="15" name="Shape 13"/>
+          <p:cNvSpPr/>
+          <p:nvPr/>
+        </p:nvSpPr>
+        <p:spPr>
+          <a:xfrm>
+            <a:off x="822960" y="5623560"/>
+            <a:ext cx="10543032" cy="0"/>
+          </a:xfrm>
+          <a:prstGeom prst="line">
+            <a:avLst/>
+          </a:prstGeom>
+          <a:noFill/>
+          <a:ln w="9525">
+            <a:solidFill>
+              <a:srgbClr val="E5E0D4"/>
+            </a:solidFill>
+            <a:prstDash val="solid"/>
+          </a:ln>
+        </p:spPr>
+      </p:sp>
+      <p:sp>
+        <p:nvSpPr>
+          <p:cNvPr id="16" name="Text 14"/>
+          <p:cNvSpPr/>
+          <p:nvPr/>
+        </p:nvSpPr>
+        <p:spPr>
+          <a:xfrm>
+            <a:off x="822960" y="5779008"/>
+            <a:ext cx="10543032" cy="457200"/>
+          </a:xfrm>
+          <a:prstGeom prst="rect">
+            <a:avLst/>
+          </a:prstGeom>
+          <a:noFill/>
+          <a:ln/>
+        </p:spPr>
+        <p:txBody>
+          <a:bodyPr wrap="square" rtlCol="0" anchor="ctr"/>
+          <a:lstStyle/>
+          <a:p>
+            <a:pPr algn="ctr" indent="0" marL="0">
+              <a:buNone/>
+            </a:pPr>
+            <a:r>
+              <a:rPr lang="en-US" sz="1350" i="1" dirty="0">
                 <a:solidFill>
                   <a:srgbClr val="1B2A4A"/>
                 </a:solidFill>
@@ -1174,1080 +1389,48 @@
                 <a:ea typeface="Cambria" pitchFamily="34" charset="-122"/>
                 <a:cs typeface="Cambria" pitchFamily="34" charset="-120"/>
               </a:rPr>
-              <a:t>A primeira conversa.   </a:t>
+              <a:t>O que instalamos fica com você: os sistemas, as pessoas formadas e o registro do que foi decidido e medido.</a:t>
             </a:r>
-            <a:pPr indent="0" marL="0">
-              <a:lnSpc>
-                <a:spcPts val="1350"/>
-              </a:lnSpc>
+            <a:endParaRPr lang="en-US" sz="1350" dirty="0"/>
+          </a:p>
+        </p:txBody>
+      </p:sp>
+      <p:sp>
+        <p:nvSpPr>
+          <p:cNvPr id="17" name="Text 15"/>
+          <p:cNvSpPr/>
+          <p:nvPr/>
+        </p:nvSpPr>
+        <p:spPr>
+          <a:xfrm>
+            <a:off x="822960" y="6400800"/>
+            <a:ext cx="10543032" cy="274320"/>
+          </a:xfrm>
+          <a:prstGeom prst="rect">
+            <a:avLst/>
+          </a:prstGeom>
+          <a:noFill/>
+          <a:ln/>
+        </p:spPr>
+        <p:txBody>
+          <a:bodyPr wrap="square" rtlCol="0" anchor="ctr"/>
+          <a:lstStyle/>
+          <a:p>
+            <a:pPr algn="ctr" indent="0" marL="0">
               <a:buNone/>
             </a:pPr>
             <a:r>
-              <a:rPr lang="en-US" sz="980" dirty="0">
+              <a:rPr lang="en-US" sz="900" spc="100" kern="0" dirty="0">
                 <a:solidFill>
-                  <a:srgbClr val="232B3A"/>
+                  <a:srgbClr val="6E6858"/>
                 </a:solidFill>
                 <a:latin typeface="Calibri" pitchFamily="34" charset="0"/>
                 <a:ea typeface="Calibri" pitchFamily="34" charset="-122"/>
                 <a:cs typeface="Calibri" pitchFamily="34" charset="-120"/>
               </a:rPr>
-              <a:t>45 minutos e uma análise gratuita da sua empresa, feita na hora, com uma estimativa em reais do que pode estar vazando.</a:t>
+              <a:t>ABBA Consultoria de IA · contato@abbaservices.com.br</a:t>
             </a:r>
-            <a:endParaRPr lang="en-US" sz="1150" dirty="0"/>
-          </a:p>
-        </p:txBody>
-      </p:sp>
-      <p:sp>
-        <p:nvSpPr>
-          <p:cNvPr id="10" name="Shape 8"/>
-          <p:cNvSpPr/>
-          <p:nvPr/>
-        </p:nvSpPr>
-        <p:spPr>
-          <a:xfrm>
-            <a:off x="1325880" y="4837176"/>
-            <a:ext cx="5458968" cy="0"/>
-          </a:xfrm>
-          <a:prstGeom prst="line">
-            <a:avLst/>
-          </a:prstGeom>
-          <a:noFill/>
-          <a:ln w="9525">
-            <a:solidFill>
-              <a:srgbClr val="D9D2C4"/>
-            </a:solidFill>
-            <a:prstDash val="solid"/>
-          </a:ln>
-        </p:spPr>
-      </p:sp>
-      <p:sp>
-        <p:nvSpPr>
-          <p:cNvPr id="11" name="Text 9"/>
-          <p:cNvSpPr/>
-          <p:nvPr/>
-        </p:nvSpPr>
-        <p:spPr>
-          <a:xfrm>
-            <a:off x="777240" y="4855464"/>
-            <a:ext cx="457200" cy="457200"/>
-          </a:xfrm>
-          <a:prstGeom prst="rect">
-            <a:avLst/>
-          </a:prstGeom>
-          <a:noFill/>
-          <a:ln/>
-        </p:spPr>
-        <p:txBody>
-          <a:bodyPr wrap="square" lIns="0" tIns="0" rIns="0" bIns="0" rtlCol="0" anchor="ctr"/>
-          <a:lstStyle/>
-          <a:p>
-            <a:pPr indent="0" marL="0">
-              <a:buNone/>
-            </a:pPr>
-            <a:r>
-              <a:rPr lang="en-US" sz="2100" b="1" dirty="0">
-                <a:solidFill>
-                  <a:srgbClr val="B8985A"/>
-                </a:solidFill>
-                <a:latin typeface="Cambria" pitchFamily="34" charset="0"/>
-                <a:ea typeface="Cambria" pitchFamily="34" charset="-122"/>
-                <a:cs typeface="Cambria" pitchFamily="34" charset="-120"/>
-              </a:rPr>
-              <a:t>2</a:t>
-            </a:r>
-            <a:endParaRPr lang="en-US" sz="2100" dirty="0"/>
-          </a:p>
-        </p:txBody>
-      </p:sp>
-      <p:sp>
-        <p:nvSpPr>
-          <p:cNvPr id="12" name="Text 10"/>
-          <p:cNvSpPr/>
-          <p:nvPr/>
-        </p:nvSpPr>
-        <p:spPr>
-          <a:xfrm>
-            <a:off x="1325880" y="4910328"/>
-            <a:ext cx="5458968" cy="475488"/>
-          </a:xfrm>
-          <a:prstGeom prst="rect">
-            <a:avLst/>
-          </a:prstGeom>
-          <a:noFill/>
-          <a:ln/>
-        </p:spPr>
-        <p:txBody>
-          <a:bodyPr wrap="square" lIns="0" tIns="0" rIns="0" bIns="0" rtlCol="0" anchor="ctr"/>
-          <a:lstStyle/>
-          <a:p>
-            <a:pPr indent="0" marL="0">
-              <a:lnSpc>
-                <a:spcPts val="1350"/>
-              </a:lnSpc>
-              <a:buNone/>
-            </a:pPr>
-            <a:r>
-              <a:rPr lang="en-US" sz="1150" b="1" dirty="0">
-                <a:solidFill>
-                  <a:srgbClr val="1B2A4A"/>
-                </a:solidFill>
-                <a:latin typeface="Cambria" pitchFamily="34" charset="0"/>
-                <a:ea typeface="Cambria" pitchFamily="34" charset="-122"/>
-                <a:cs typeface="Cambria" pitchFamily="34" charset="-120"/>
-              </a:rPr>
-              <a:t>Assessment.   </a:t>
-            </a:r>
-            <a:pPr indent="0" marL="0">
-              <a:lnSpc>
-                <a:spcPts val="1350"/>
-              </a:lnSpc>
-              <a:buNone/>
-            </a:pPr>
-            <a:r>
-              <a:rPr lang="en-US" sz="980" dirty="0">
-                <a:solidFill>
-                  <a:srgbClr val="232B3A"/>
-                </a:solidFill>
-                <a:latin typeface="Calibri" pitchFamily="34" charset="0"/>
-                <a:ea typeface="Calibri" pitchFamily="34" charset="-122"/>
-                <a:cs typeface="Calibri" pitchFamily="34" charset="-120"/>
-              </a:rPr>
-              <a:t>O mergulho profundo na sua empresa, do conselho à linha de frente. Sai um portfólio ranqueado e quantificado.</a:t>
-            </a:r>
-            <a:endParaRPr lang="en-US" sz="1150" dirty="0"/>
-          </a:p>
-        </p:txBody>
-      </p:sp>
-      <p:sp>
-        <p:nvSpPr>
-          <p:cNvPr id="13" name="Shape 11"/>
-          <p:cNvSpPr/>
-          <p:nvPr/>
-        </p:nvSpPr>
-        <p:spPr>
-          <a:xfrm>
-            <a:off x="1325880" y="5404104"/>
-            <a:ext cx="5458968" cy="0"/>
-          </a:xfrm>
-          <a:prstGeom prst="line">
-            <a:avLst/>
-          </a:prstGeom>
-          <a:noFill/>
-          <a:ln w="9525">
-            <a:solidFill>
-              <a:srgbClr val="D9D2C4"/>
-            </a:solidFill>
-            <a:prstDash val="solid"/>
-          </a:ln>
-        </p:spPr>
-      </p:sp>
-      <p:sp>
-        <p:nvSpPr>
-          <p:cNvPr id="14" name="Text 12"/>
-          <p:cNvSpPr/>
-          <p:nvPr/>
-        </p:nvSpPr>
-        <p:spPr>
-          <a:xfrm>
-            <a:off x="777240" y="5422392"/>
-            <a:ext cx="457200" cy="457200"/>
-          </a:xfrm>
-          <a:prstGeom prst="rect">
-            <a:avLst/>
-          </a:prstGeom>
-          <a:noFill/>
-          <a:ln/>
-        </p:spPr>
-        <p:txBody>
-          <a:bodyPr wrap="square" lIns="0" tIns="0" rIns="0" bIns="0" rtlCol="0" anchor="ctr"/>
-          <a:lstStyle/>
-          <a:p>
-            <a:pPr indent="0" marL="0">
-              <a:buNone/>
-            </a:pPr>
-            <a:r>
-              <a:rPr lang="en-US" sz="2100" b="1" dirty="0">
-                <a:solidFill>
-                  <a:srgbClr val="B8985A"/>
-                </a:solidFill>
-                <a:latin typeface="Cambria" pitchFamily="34" charset="0"/>
-                <a:ea typeface="Cambria" pitchFamily="34" charset="-122"/>
-                <a:cs typeface="Cambria" pitchFamily="34" charset="-120"/>
-              </a:rPr>
-              <a:t>3</a:t>
-            </a:r>
-            <a:endParaRPr lang="en-US" sz="2100" dirty="0"/>
-          </a:p>
-        </p:txBody>
-      </p:sp>
-      <p:sp>
-        <p:nvSpPr>
-          <p:cNvPr id="15" name="Text 13"/>
-          <p:cNvSpPr/>
-          <p:nvPr/>
-        </p:nvSpPr>
-        <p:spPr>
-          <a:xfrm>
-            <a:off x="1325880" y="5477256"/>
-            <a:ext cx="5458968" cy="475488"/>
-          </a:xfrm>
-          <a:prstGeom prst="rect">
-            <a:avLst/>
-          </a:prstGeom>
-          <a:noFill/>
-          <a:ln/>
-        </p:spPr>
-        <p:txBody>
-          <a:bodyPr wrap="square" lIns="0" tIns="0" rIns="0" bIns="0" rtlCol="0" anchor="ctr"/>
-          <a:lstStyle/>
-          <a:p>
-            <a:pPr indent="0" marL="0">
-              <a:lnSpc>
-                <a:spcPts val="1350"/>
-              </a:lnSpc>
-              <a:buNone/>
-            </a:pPr>
-            <a:r>
-              <a:rPr lang="en-US" sz="1150" b="1" dirty="0">
-                <a:solidFill>
-                  <a:srgbClr val="1B2A4A"/>
-                </a:solidFill>
-                <a:latin typeface="Cambria" pitchFamily="34" charset="0"/>
-                <a:ea typeface="Cambria" pitchFamily="34" charset="-122"/>
-                <a:cs typeface="Cambria" pitchFamily="34" charset="-120"/>
-              </a:rPr>
-              <a:t>Protótipo de caso de uso.   </a:t>
-            </a:r>
-            <a:pPr indent="0" marL="0">
-              <a:lnSpc>
-                <a:spcPts val="1350"/>
-              </a:lnSpc>
-              <a:buNone/>
-            </a:pPr>
-            <a:r>
-              <a:rPr lang="en-US" sz="980" dirty="0">
-                <a:solidFill>
-                  <a:srgbClr val="232B3A"/>
-                </a:solidFill>
-                <a:latin typeface="Calibri" pitchFamily="34" charset="0"/>
-                <a:ea typeface="Calibri" pitchFamily="34" charset="-122"/>
-                <a:cs typeface="Calibri" pitchFamily="34" charset="-120"/>
-              </a:rPr>
-              <a:t>Validação com os seus dados reais. A diretoria decide GO ou NO-GO com números na mesa.</a:t>
-            </a:r>
-            <a:endParaRPr lang="en-US" sz="1150" dirty="0"/>
-          </a:p>
-        </p:txBody>
-      </p:sp>
-      <p:sp>
-        <p:nvSpPr>
-          <p:cNvPr id="16" name="Shape 14"/>
-          <p:cNvSpPr/>
-          <p:nvPr/>
-        </p:nvSpPr>
-        <p:spPr>
-          <a:xfrm>
-            <a:off x="1325880" y="5971032"/>
-            <a:ext cx="5458968" cy="0"/>
-          </a:xfrm>
-          <a:prstGeom prst="line">
-            <a:avLst/>
-          </a:prstGeom>
-          <a:noFill/>
-          <a:ln w="9525">
-            <a:solidFill>
-              <a:srgbClr val="D9D2C4"/>
-            </a:solidFill>
-            <a:prstDash val="solid"/>
-          </a:ln>
-        </p:spPr>
-      </p:sp>
-      <p:sp>
-        <p:nvSpPr>
-          <p:cNvPr id="17" name="Text 15"/>
-          <p:cNvSpPr/>
-          <p:nvPr/>
-        </p:nvSpPr>
-        <p:spPr>
-          <a:xfrm>
-            <a:off x="777240" y="5989320"/>
-            <a:ext cx="457200" cy="457200"/>
-          </a:xfrm>
-          <a:prstGeom prst="rect">
-            <a:avLst/>
-          </a:prstGeom>
-          <a:noFill/>
-          <a:ln/>
-        </p:spPr>
-        <p:txBody>
-          <a:bodyPr wrap="square" lIns="0" tIns="0" rIns="0" bIns="0" rtlCol="0" anchor="ctr"/>
-          <a:lstStyle/>
-          <a:p>
-            <a:pPr indent="0" marL="0">
-              <a:buNone/>
-            </a:pPr>
-            <a:r>
-              <a:rPr lang="en-US" sz="2100" b="1" dirty="0">
-                <a:solidFill>
-                  <a:srgbClr val="B8985A"/>
-                </a:solidFill>
-                <a:latin typeface="Cambria" pitchFamily="34" charset="0"/>
-                <a:ea typeface="Cambria" pitchFamily="34" charset="-122"/>
-                <a:cs typeface="Cambria" pitchFamily="34" charset="-120"/>
-              </a:rPr>
-              <a:t>4</a:t>
-            </a:r>
-            <a:endParaRPr lang="en-US" sz="2100" dirty="0"/>
-          </a:p>
-        </p:txBody>
-      </p:sp>
-      <p:sp>
-        <p:nvSpPr>
-          <p:cNvPr id="18" name="Text 16"/>
-          <p:cNvSpPr/>
-          <p:nvPr/>
-        </p:nvSpPr>
-        <p:spPr>
-          <a:xfrm>
-            <a:off x="1325880" y="6044184"/>
-            <a:ext cx="5458968" cy="475488"/>
-          </a:xfrm>
-          <a:prstGeom prst="rect">
-            <a:avLst/>
-          </a:prstGeom>
-          <a:noFill/>
-          <a:ln/>
-        </p:spPr>
-        <p:txBody>
-          <a:bodyPr wrap="square" lIns="0" tIns="0" rIns="0" bIns="0" rtlCol="0" anchor="ctr"/>
-          <a:lstStyle/>
-          <a:p>
-            <a:pPr indent="0" marL="0">
-              <a:lnSpc>
-                <a:spcPts val="1350"/>
-              </a:lnSpc>
-              <a:buNone/>
-            </a:pPr>
-            <a:r>
-              <a:rPr lang="en-US" sz="1150" b="1" dirty="0">
-                <a:solidFill>
-                  <a:srgbClr val="1B2A4A"/>
-                </a:solidFill>
-                <a:latin typeface="Cambria" pitchFamily="34" charset="0"/>
-                <a:ea typeface="Cambria" pitchFamily="34" charset="-122"/>
-                <a:cs typeface="Cambria" pitchFamily="34" charset="-120"/>
-              </a:rPr>
-              <a:t>Construção e implantação.   </a:t>
-            </a:r>
-            <a:pPr indent="0" marL="0">
-              <a:lnSpc>
-                <a:spcPts val="1350"/>
-              </a:lnSpc>
-              <a:buNone/>
-            </a:pPr>
-            <a:r>
-              <a:rPr lang="en-US" sz="980" dirty="0">
-                <a:solidFill>
-                  <a:srgbClr val="232B3A"/>
-                </a:solidFill>
-                <a:latin typeface="Calibri" pitchFamily="34" charset="0"/>
-                <a:ea typeface="Calibri" pitchFamily="34" charset="-122"/>
-                <a:cs typeface="Calibri" pitchFamily="34" charset="-120"/>
-              </a:rPr>
-              <a:t>Engenharia sob medida: arquitetura, integrações e agentes de IA em produção, com aprovação humana no que é crítico.</a:t>
-            </a:r>
-            <a:endParaRPr lang="en-US" sz="1150" dirty="0"/>
-          </a:p>
-        </p:txBody>
-      </p:sp>
-      <p:sp>
-        <p:nvSpPr>
-          <p:cNvPr id="19" name="Shape 17"/>
-          <p:cNvSpPr/>
-          <p:nvPr/>
-        </p:nvSpPr>
-        <p:spPr>
-          <a:xfrm>
-            <a:off x="1325880" y="6537960"/>
-            <a:ext cx="5458968" cy="0"/>
-          </a:xfrm>
-          <a:prstGeom prst="line">
-            <a:avLst/>
-          </a:prstGeom>
-          <a:noFill/>
-          <a:ln w="9525">
-            <a:solidFill>
-              <a:srgbClr val="D9D2C4"/>
-            </a:solidFill>
-            <a:prstDash val="solid"/>
-          </a:ln>
-        </p:spPr>
-      </p:sp>
-      <p:sp>
-        <p:nvSpPr>
-          <p:cNvPr id="20" name="Text 18"/>
-          <p:cNvSpPr/>
-          <p:nvPr/>
-        </p:nvSpPr>
-        <p:spPr>
-          <a:xfrm>
-            <a:off x="777240" y="6556248"/>
-            <a:ext cx="457200" cy="457200"/>
-          </a:xfrm>
-          <a:prstGeom prst="rect">
-            <a:avLst/>
-          </a:prstGeom>
-          <a:noFill/>
-          <a:ln/>
-        </p:spPr>
-        <p:txBody>
-          <a:bodyPr wrap="square" lIns="0" tIns="0" rIns="0" bIns="0" rtlCol="0" anchor="ctr"/>
-          <a:lstStyle/>
-          <a:p>
-            <a:pPr indent="0" marL="0">
-              <a:buNone/>
-            </a:pPr>
-            <a:r>
-              <a:rPr lang="en-US" sz="2100" b="1" dirty="0">
-                <a:solidFill>
-                  <a:srgbClr val="B8985A"/>
-                </a:solidFill>
-                <a:latin typeface="Cambria" pitchFamily="34" charset="0"/>
-                <a:ea typeface="Cambria" pitchFamily="34" charset="-122"/>
-                <a:cs typeface="Cambria" pitchFamily="34" charset="-120"/>
-              </a:rPr>
-              <a:t>5</a:t>
-            </a:r>
-            <a:endParaRPr lang="en-US" sz="2100" dirty="0"/>
-          </a:p>
-        </p:txBody>
-      </p:sp>
-      <p:sp>
-        <p:nvSpPr>
-          <p:cNvPr id="21" name="Text 19"/>
-          <p:cNvSpPr/>
-          <p:nvPr/>
-        </p:nvSpPr>
-        <p:spPr>
-          <a:xfrm>
-            <a:off x="1325880" y="6611112"/>
-            <a:ext cx="5458968" cy="475488"/>
-          </a:xfrm>
-          <a:prstGeom prst="rect">
-            <a:avLst/>
-          </a:prstGeom>
-          <a:noFill/>
-          <a:ln/>
-        </p:spPr>
-        <p:txBody>
-          <a:bodyPr wrap="square" lIns="0" tIns="0" rIns="0" bIns="0" rtlCol="0" anchor="ctr"/>
-          <a:lstStyle/>
-          <a:p>
-            <a:pPr indent="0" marL="0">
-              <a:lnSpc>
-                <a:spcPts val="1350"/>
-              </a:lnSpc>
-              <a:buNone/>
-            </a:pPr>
-            <a:r>
-              <a:rPr lang="en-US" sz="1150" b="1" dirty="0">
-                <a:solidFill>
-                  <a:srgbClr val="1B2A4A"/>
-                </a:solidFill>
-                <a:latin typeface="Cambria" pitchFamily="34" charset="0"/>
-                <a:ea typeface="Cambria" pitchFamily="34" charset="-122"/>
-                <a:cs typeface="Cambria" pitchFamily="34" charset="-120"/>
-              </a:rPr>
-              <a:t>Treinamento + ABBA Portal.   </a:t>
-            </a:r>
-            <a:pPr indent="0" marL="0">
-              <a:lnSpc>
-                <a:spcPts val="1350"/>
-              </a:lnSpc>
-              <a:buNone/>
-            </a:pPr>
-            <a:r>
-              <a:rPr lang="en-US" sz="980" dirty="0">
-                <a:solidFill>
-                  <a:srgbClr val="232B3A"/>
-                </a:solidFill>
-                <a:latin typeface="Calibri" pitchFamily="34" charset="0"/>
-                <a:ea typeface="Calibri" pitchFamily="34" charset="-122"/>
-                <a:cs typeface="Calibri" pitchFamily="34" charset="-120"/>
-              </a:rPr>
-              <a:t>Todos os níveis: plataforma própria + presencial. Campeões internos carregam a transformação.</a:t>
-            </a:r>
-            <a:endParaRPr lang="en-US" sz="1150" dirty="0"/>
-          </a:p>
-        </p:txBody>
-      </p:sp>
-      <p:sp>
-        <p:nvSpPr>
-          <p:cNvPr id="22" name="Shape 20"/>
-          <p:cNvSpPr/>
-          <p:nvPr/>
-        </p:nvSpPr>
-        <p:spPr>
-          <a:xfrm>
-            <a:off x="1325880" y="7104888"/>
-            <a:ext cx="5458968" cy="0"/>
-          </a:xfrm>
-          <a:prstGeom prst="line">
-            <a:avLst/>
-          </a:prstGeom>
-          <a:noFill/>
-          <a:ln w="9525">
-            <a:solidFill>
-              <a:srgbClr val="D9D2C4"/>
-            </a:solidFill>
-            <a:prstDash val="solid"/>
-          </a:ln>
-        </p:spPr>
-      </p:sp>
-      <p:sp>
-        <p:nvSpPr>
-          <p:cNvPr id="23" name="Text 21"/>
-          <p:cNvSpPr/>
-          <p:nvPr/>
-        </p:nvSpPr>
-        <p:spPr>
-          <a:xfrm>
-            <a:off x="777240" y="7123176"/>
-            <a:ext cx="457200" cy="457200"/>
-          </a:xfrm>
-          <a:prstGeom prst="rect">
-            <a:avLst/>
-          </a:prstGeom>
-          <a:noFill/>
-          <a:ln/>
-        </p:spPr>
-        <p:txBody>
-          <a:bodyPr wrap="square" lIns="0" tIns="0" rIns="0" bIns="0" rtlCol="0" anchor="ctr"/>
-          <a:lstStyle/>
-          <a:p>
-            <a:pPr indent="0" marL="0">
-              <a:buNone/>
-            </a:pPr>
-            <a:r>
-              <a:rPr lang="en-US" sz="2100" b="1" dirty="0">
-                <a:solidFill>
-                  <a:srgbClr val="B8985A"/>
-                </a:solidFill>
-                <a:latin typeface="Cambria" pitchFamily="34" charset="0"/>
-                <a:ea typeface="Cambria" pitchFamily="34" charset="-122"/>
-                <a:cs typeface="Cambria" pitchFamily="34" charset="-120"/>
-              </a:rPr>
-              <a:t>6</a:t>
-            </a:r>
-            <a:endParaRPr lang="en-US" sz="2100" dirty="0"/>
-          </a:p>
-        </p:txBody>
-      </p:sp>
-      <p:sp>
-        <p:nvSpPr>
-          <p:cNvPr id="24" name="Text 22"/>
-          <p:cNvSpPr/>
-          <p:nvPr/>
-        </p:nvSpPr>
-        <p:spPr>
-          <a:xfrm>
-            <a:off x="1325880" y="7178040"/>
-            <a:ext cx="5458968" cy="475488"/>
-          </a:xfrm>
-          <a:prstGeom prst="rect">
-            <a:avLst/>
-          </a:prstGeom>
-          <a:noFill/>
-          <a:ln/>
-        </p:spPr>
-        <p:txBody>
-          <a:bodyPr wrap="square" lIns="0" tIns="0" rIns="0" bIns="0" rtlCol="0" anchor="ctr"/>
-          <a:lstStyle/>
-          <a:p>
-            <a:pPr indent="0" marL="0">
-              <a:lnSpc>
-                <a:spcPts val="1350"/>
-              </a:lnSpc>
-              <a:buNone/>
-            </a:pPr>
-            <a:r>
-              <a:rPr lang="en-US" sz="1150" b="1" dirty="0">
-                <a:solidFill>
-                  <a:srgbClr val="1B2A4A"/>
-                </a:solidFill>
-                <a:latin typeface="Cambria" pitchFamily="34" charset="0"/>
-                <a:ea typeface="Cambria" pitchFamily="34" charset="-122"/>
-                <a:cs typeface="Cambria" pitchFamily="34" charset="-120"/>
-              </a:rPr>
-              <a:t>Sistemas gerenciados.   </a:t>
-            </a:r>
-            <a:pPr indent="0" marL="0">
-              <a:lnSpc>
-                <a:spcPts val="1350"/>
-              </a:lnSpc>
-              <a:buNone/>
-            </a:pPr>
-            <a:r>
-              <a:rPr lang="en-US" sz="980" dirty="0">
-                <a:solidFill>
-                  <a:srgbClr val="232B3A"/>
-                </a:solidFill>
-                <a:latin typeface="Calibri" pitchFamily="34" charset="0"/>
-                <a:ea typeface="Calibri" pitchFamily="34" charset="-122"/>
-                <a:cs typeface="Calibri" pitchFamily="34" charset="-120"/>
-              </a:rPr>
-              <a:t>Operação com presença: ritual semanal de 20 minutos e o diário decisão → resultado medido.</a:t>
-            </a:r>
-            <a:endParaRPr lang="en-US" sz="1150" dirty="0"/>
-          </a:p>
-        </p:txBody>
-      </p:sp>
-      <p:sp>
-        <p:nvSpPr>
-          <p:cNvPr id="25" name="Shape 23"/>
-          <p:cNvSpPr/>
-          <p:nvPr/>
-        </p:nvSpPr>
-        <p:spPr>
-          <a:xfrm>
-            <a:off x="1325880" y="7671816"/>
-            <a:ext cx="5458968" cy="0"/>
-          </a:xfrm>
-          <a:prstGeom prst="line">
-            <a:avLst/>
-          </a:prstGeom>
-          <a:noFill/>
-          <a:ln w="9525">
-            <a:solidFill>
-              <a:srgbClr val="D9D2C4"/>
-            </a:solidFill>
-            <a:prstDash val="solid"/>
-          </a:ln>
-        </p:spPr>
-      </p:sp>
-      <p:sp>
-        <p:nvSpPr>
-          <p:cNvPr id="26" name="Text 24"/>
-          <p:cNvSpPr/>
-          <p:nvPr/>
-        </p:nvSpPr>
-        <p:spPr>
-          <a:xfrm>
-            <a:off x="777240" y="7690104"/>
-            <a:ext cx="457200" cy="457200"/>
-          </a:xfrm>
-          <a:prstGeom prst="rect">
-            <a:avLst/>
-          </a:prstGeom>
-          <a:noFill/>
-          <a:ln/>
-        </p:spPr>
-        <p:txBody>
-          <a:bodyPr wrap="square" lIns="0" tIns="0" rIns="0" bIns="0" rtlCol="0" anchor="ctr"/>
-          <a:lstStyle/>
-          <a:p>
-            <a:pPr indent="0" marL="0">
-              <a:buNone/>
-            </a:pPr>
-            <a:r>
-              <a:rPr lang="en-US" sz="2100" b="1" dirty="0">
-                <a:solidFill>
-                  <a:srgbClr val="B8985A"/>
-                </a:solidFill>
-                <a:latin typeface="Cambria" pitchFamily="34" charset="0"/>
-                <a:ea typeface="Cambria" pitchFamily="34" charset="-122"/>
-                <a:cs typeface="Cambria" pitchFamily="34" charset="-120"/>
-              </a:rPr>
-              <a:t>7</a:t>
-            </a:r>
-            <a:endParaRPr lang="en-US" sz="2100" dirty="0"/>
-          </a:p>
-        </p:txBody>
-      </p:sp>
-      <p:sp>
-        <p:nvSpPr>
-          <p:cNvPr id="27" name="Text 25"/>
-          <p:cNvSpPr/>
-          <p:nvPr/>
-        </p:nvSpPr>
-        <p:spPr>
-          <a:xfrm>
-            <a:off x="1325880" y="7744968"/>
-            <a:ext cx="5458968" cy="475488"/>
-          </a:xfrm>
-          <a:prstGeom prst="rect">
-            <a:avLst/>
-          </a:prstGeom>
-          <a:noFill/>
-          <a:ln/>
-        </p:spPr>
-        <p:txBody>
-          <a:bodyPr wrap="square" lIns="0" tIns="0" rIns="0" bIns="0" rtlCol="0" anchor="ctr"/>
-          <a:lstStyle/>
-          <a:p>
-            <a:pPr indent="0" marL="0">
-              <a:lnSpc>
-                <a:spcPts val="1350"/>
-              </a:lnSpc>
-              <a:buNone/>
-            </a:pPr>
-            <a:r>
-              <a:rPr lang="en-US" sz="1150" b="1" dirty="0">
-                <a:solidFill>
-                  <a:srgbClr val="1B2A4A"/>
-                </a:solidFill>
-                <a:latin typeface="Cambria" pitchFamily="34" charset="0"/>
-                <a:ea typeface="Cambria" pitchFamily="34" charset="-122"/>
-                <a:cs typeface="Cambria" pitchFamily="34" charset="-120"/>
-              </a:rPr>
-              <a:t>Conselheiro de IA.   </a:t>
-            </a:r>
-            <a:pPr indent="0" marL="0">
-              <a:lnSpc>
-                <a:spcPts val="1350"/>
-              </a:lnSpc>
-              <a:buNone/>
-            </a:pPr>
-            <a:r>
-              <a:rPr lang="en-US" sz="980" dirty="0">
-                <a:solidFill>
-                  <a:srgbClr val="232B3A"/>
-                </a:solidFill>
-                <a:latin typeface="Calibri" pitchFamily="34" charset="0"/>
-                <a:ea typeface="Calibri" pitchFamily="34" charset="-122"/>
-                <a:cs typeface="Calibri" pitchFamily="34" charset="-120"/>
-              </a:rPr>
-              <a:t>A cadeira de estrategista do seu lado da mesa, também para quem já tem IA rodando.</a:t>
-            </a:r>
-            <a:endParaRPr lang="en-US" sz="1150" dirty="0"/>
-          </a:p>
-        </p:txBody>
-      </p:sp>
-      <p:sp>
-        <p:nvSpPr>
-          <p:cNvPr id="28" name="Shape 26"/>
-          <p:cNvSpPr/>
-          <p:nvPr/>
-        </p:nvSpPr>
-        <p:spPr>
-          <a:xfrm>
-            <a:off x="777240" y="8458200"/>
-            <a:ext cx="6007608" cy="914400"/>
-          </a:xfrm>
-          <a:prstGeom prst="rect">
-            <a:avLst/>
-          </a:prstGeom>
-          <a:solidFill>
-            <a:srgbClr val="F7F4EE"/>
-          </a:solidFill>
-          <a:ln/>
-        </p:spPr>
-      </p:sp>
-      <p:sp>
-        <p:nvSpPr>
-          <p:cNvPr id="29" name="Text 27"/>
-          <p:cNvSpPr/>
-          <p:nvPr/>
-        </p:nvSpPr>
-        <p:spPr>
-          <a:xfrm>
-            <a:off x="1051560" y="8577072"/>
-            <a:ext cx="5458968" cy="219456"/>
-          </a:xfrm>
-          <a:prstGeom prst="rect">
-            <a:avLst/>
-          </a:prstGeom>
-          <a:noFill/>
-          <a:ln/>
-        </p:spPr>
-        <p:txBody>
-          <a:bodyPr wrap="square" lIns="0" tIns="0" rIns="0" bIns="0" rtlCol="0" anchor="ctr"/>
-          <a:lstStyle/>
-          <a:p>
-            <a:pPr indent="0" marL="0">
-              <a:buNone/>
-            </a:pPr>
-            <a:r>
-              <a:rPr lang="en-US" sz="800" b="1" spc="200" kern="0" dirty="0">
-                <a:solidFill>
-                  <a:srgbClr val="B8985A"/>
-                </a:solidFill>
-                <a:latin typeface="Calibri" pitchFamily="34" charset="0"/>
-                <a:ea typeface="Calibri" pitchFamily="34" charset="-122"/>
-                <a:cs typeface="Calibri" pitchFamily="34" charset="-120"/>
-              </a:rPr>
-              <a:t>A mentalidade que instalamos em cada colaborador:</a:t>
-            </a:r>
-            <a:endParaRPr lang="en-US" sz="800" dirty="0"/>
-          </a:p>
-        </p:txBody>
-      </p:sp>
-      <p:sp>
-        <p:nvSpPr>
-          <p:cNvPr id="30" name="Text 28"/>
-          <p:cNvSpPr/>
-          <p:nvPr/>
-        </p:nvSpPr>
-        <p:spPr>
-          <a:xfrm>
-            <a:off x="1051560" y="8814816"/>
-            <a:ext cx="5458968" cy="475488"/>
-          </a:xfrm>
-          <a:prstGeom prst="rect">
-            <a:avLst/>
-          </a:prstGeom>
-          <a:noFill/>
-          <a:ln/>
-        </p:spPr>
-        <p:txBody>
-          <a:bodyPr wrap="square" lIns="0" tIns="0" rIns="0" bIns="0" rtlCol="0" anchor="ctr"/>
-          <a:lstStyle/>
-          <a:p>
-            <a:pPr indent="0" marL="0">
-              <a:lnSpc>
-                <a:spcPts val="1450"/>
-              </a:lnSpc>
-              <a:buNone/>
-            </a:pPr>
-            <a:r>
-              <a:rPr lang="en-US" sz="1050" i="1" dirty="0">
-                <a:solidFill>
-                  <a:srgbClr val="1B2A4A"/>
-                </a:solidFill>
-                <a:latin typeface="Cambria" pitchFamily="34" charset="0"/>
-                <a:ea typeface="Cambria" pitchFamily="34" charset="-122"/>
-                <a:cs typeface="Cambria" pitchFamily="34" charset="-120"/>
-              </a:rPr>
-              <a:t>O que eu posso parar de fazer, porque a IA agora faz? · O que posso começar a fazer, porque a IA agora permite? · O que só eu faço, e devo fazer ainda melhor?</a:t>
-            </a:r>
-            <a:endParaRPr lang="en-US" sz="1050" dirty="0"/>
-          </a:p>
-        </p:txBody>
-      </p:sp>
-      <p:sp>
-        <p:nvSpPr>
-          <p:cNvPr id="31" name="Text 29"/>
-          <p:cNvSpPr/>
-          <p:nvPr/>
-        </p:nvSpPr>
-        <p:spPr>
-          <a:xfrm>
-            <a:off x="777240" y="9528048"/>
-            <a:ext cx="1554480" cy="201168"/>
-          </a:xfrm>
-          <a:prstGeom prst="rect">
-            <a:avLst/>
-          </a:prstGeom>
-          <a:noFill/>
-          <a:ln/>
-        </p:spPr>
-        <p:txBody>
-          <a:bodyPr wrap="square" lIns="0" tIns="0" rIns="0" bIns="0" rtlCol="0" anchor="ctr"/>
-          <a:lstStyle/>
-          <a:p>
-            <a:pPr indent="0" marL="0">
-              <a:buNone/>
-            </a:pPr>
-            <a:r>
-              <a:rPr lang="en-US" sz="750" b="1" spc="200" kern="0" dirty="0">
-                <a:solidFill>
-                  <a:srgbClr val="B8985A"/>
-                </a:solidFill>
-                <a:latin typeface="Calibri" pitchFamily="34" charset="0"/>
-                <a:ea typeface="Calibri" pitchFamily="34" charset="-122"/>
-                <a:cs typeface="Calibri" pitchFamily="34" charset="-120"/>
-              </a:rPr>
-              <a:t>PARCEIROS OFICIAIS</a:t>
-            </a:r>
-            <a:endParaRPr lang="en-US" sz="750" dirty="0"/>
-          </a:p>
-        </p:txBody>
-      </p:sp>
-      <p:pic>
-        <p:nvPicPr>
-          <p:cNvPr id="32" name="Image 0" descr="/tmp/claude-0/-home-user/3b340934-06d1-5f26-b467-4c811e620256/scratchpad/onepager/ms.png">    </p:cNvPr>
-          <p:cNvPicPr>
-            <a:picLocks noChangeAspect="1"/>
-          </p:cNvPicPr>
-          <p:nvPr/>
-        </p:nvPicPr>
-        <p:blipFill>
-          <a:blip r:embed="rId1"/>
-          <a:stretch>
-            <a:fillRect/>
-          </a:stretch>
-        </p:blipFill>
-        <p:spPr>
-          <a:xfrm>
-            <a:off x="2423160" y="9482328"/>
-            <a:ext cx="932688" cy="201168"/>
-          </a:xfrm>
-          <a:prstGeom prst="rect">
-            <a:avLst/>
-          </a:prstGeom>
-        </p:spPr>
-      </p:pic>
-      <p:pic>
-        <p:nvPicPr>
-          <p:cNvPr id="33" name="Image 1" descr="/tmp/claude-0/-home-user/3b340934-06d1-5f26-b467-4c811e620256/scratchpad/onepager/crewai-logo.png">    </p:cNvPr>
-          <p:cNvPicPr>
-            <a:picLocks noChangeAspect="1"/>
-          </p:cNvPicPr>
-          <p:nvPr/>
-        </p:nvPicPr>
-        <p:blipFill>
-          <a:blip r:embed="rId2"/>
-          <a:stretch>
-            <a:fillRect/>
-          </a:stretch>
-        </p:blipFill>
-        <p:spPr>
-          <a:xfrm>
-            <a:off x="3630168" y="9482328"/>
-            <a:ext cx="667512" cy="201168"/>
-          </a:xfrm>
-          <a:prstGeom prst="rect">
-            <a:avLst/>
-          </a:prstGeom>
-        </p:spPr>
-      </p:pic>
-      <p:sp>
-        <p:nvSpPr>
-          <p:cNvPr id="34" name="Text 30"/>
-          <p:cNvSpPr/>
-          <p:nvPr/>
-        </p:nvSpPr>
-        <p:spPr>
-          <a:xfrm>
-            <a:off x="777240" y="9765792"/>
-            <a:ext cx="6007608" cy="274320"/>
-          </a:xfrm>
-          <a:prstGeom prst="rect">
-            <a:avLst/>
-          </a:prstGeom>
-          <a:noFill/>
-          <a:ln/>
-        </p:spPr>
-        <p:txBody>
-          <a:bodyPr wrap="square" lIns="0" tIns="0" rIns="0" bIns="0" rtlCol="0" anchor="ctr"/>
-          <a:lstStyle/>
-          <a:p>
-            <a:pPr indent="0" marL="0">
-              <a:buNone/>
-            </a:pPr>
-            <a:r>
-              <a:rPr lang="en-US" sz="950" dirty="0">
-                <a:solidFill>
-                  <a:srgbClr val="232B3A"/>
-                </a:solidFill>
-                <a:latin typeface="Calibri" pitchFamily="34" charset="0"/>
-                <a:ea typeface="Calibri" pitchFamily="34" charset="-122"/>
-                <a:cs typeface="Calibri" pitchFamily="34" charset="-120"/>
-              </a:rPr>
-              <a:t>O primeiro passo não custa nada: a sua análise gratuita, feita em cinco minutos.  ·  contato@abbaservices.com.br</a:t>
-            </a:r>
-            <a:endParaRPr lang="en-US" sz="950" dirty="0"/>
-          </a:p>
-        </p:txBody>
-      </p:sp>
-      <p:sp>
-        <p:nvSpPr>
-          <p:cNvPr id="35" name="Shape 31"/>
-          <p:cNvSpPr/>
-          <p:nvPr/>
-        </p:nvSpPr>
-        <p:spPr>
-          <a:xfrm>
-            <a:off x="777240" y="10195560"/>
-            <a:ext cx="6007608" cy="0"/>
-          </a:xfrm>
-          <a:prstGeom prst="line">
-            <a:avLst/>
-          </a:prstGeom>
-          <a:noFill/>
-          <a:ln w="9525">
-            <a:solidFill>
-              <a:srgbClr val="D9D2C4"/>
-            </a:solidFill>
-            <a:prstDash val="solid"/>
-          </a:ln>
-        </p:spPr>
-      </p:sp>
-      <p:sp>
-        <p:nvSpPr>
-          <p:cNvPr id="36" name="Text 32"/>
-          <p:cNvSpPr/>
-          <p:nvPr/>
-        </p:nvSpPr>
-        <p:spPr>
-          <a:xfrm>
-            <a:off x="777240" y="10277856"/>
-            <a:ext cx="4389120" cy="201168"/>
-          </a:xfrm>
-          <a:prstGeom prst="rect">
-            <a:avLst/>
-          </a:prstGeom>
-          <a:noFill/>
-          <a:ln/>
-        </p:spPr>
-        <p:txBody>
-          <a:bodyPr wrap="square" lIns="0" tIns="0" rIns="0" bIns="0" rtlCol="0" anchor="ctr"/>
-          <a:lstStyle/>
-          <a:p>
-            <a:pPr indent="0" marL="0">
-              <a:buNone/>
-            </a:pPr>
-            <a:r>
-              <a:rPr lang="en-US" sz="750" spc="220" kern="0" dirty="0">
-                <a:solidFill>
-                  <a:srgbClr val="5A6472"/>
-                </a:solidFill>
-                <a:latin typeface="Calibri" pitchFamily="34" charset="0"/>
-                <a:ea typeface="Calibri" pitchFamily="34" charset="-122"/>
-                <a:cs typeface="Calibri" pitchFamily="34" charset="-120"/>
-              </a:rPr>
-              <a:t>ABBA · CONSULTORIA DE INTELIGÊNCIA ARTIFICIAL</a:t>
-            </a:r>
-            <a:endParaRPr lang="en-US" sz="750" dirty="0"/>
-          </a:p>
-        </p:txBody>
-      </p:sp>
-      <p:sp>
-        <p:nvSpPr>
-          <p:cNvPr id="37" name="Text 33"/>
-          <p:cNvSpPr/>
-          <p:nvPr/>
-        </p:nvSpPr>
-        <p:spPr>
-          <a:xfrm>
-            <a:off x="4773168" y="10277856"/>
-            <a:ext cx="2011680" cy="201168"/>
-          </a:xfrm>
-          <a:prstGeom prst="rect">
-            <a:avLst/>
-          </a:prstGeom>
-          <a:noFill/>
-          <a:ln/>
-        </p:spPr>
-        <p:txBody>
-          <a:bodyPr wrap="square" lIns="0" tIns="0" rIns="0" bIns="0" rtlCol="0" anchor="ctr"/>
-          <a:lstStyle/>
-          <a:p>
-            <a:pPr algn="r" indent="0" marL="0">
-              <a:buNone/>
-            </a:pPr>
-            <a:r>
-              <a:rPr lang="en-US" sz="750" spc="220" kern="0" dirty="0">
-                <a:solidFill>
-                  <a:srgbClr val="5A6472"/>
-                </a:solidFill>
-                <a:latin typeface="Calibri" pitchFamily="34" charset="0"/>
-                <a:ea typeface="Calibri" pitchFamily="34" charset="-122"/>
-                <a:cs typeface="Calibri" pitchFamily="34" charset="-120"/>
-              </a:rPr>
-              <a:t>ABBASERVICES.COM.BR</a:t>
-            </a:r>
-            <a:endParaRPr lang="en-US" sz="750" dirty="0"/>
+            <a:endParaRPr lang="en-US" sz="900" dirty="0"/>
           </a:p>
         </p:txBody>
       </p:sp>

--- a/08-materiais/modelos/abba-um-minuto.pptx
+++ b/08-materiais/modelos/abba-um-minuto.pptx
@@ -950,7 +950,7 @@
                 <a:ea typeface="Cambria" pitchFamily="34" charset="-122"/>
                 <a:cs typeface="Cambria" pitchFamily="34" charset="-120"/>
               </a:rPr>
-              <a:t>Tornamos a sua empresa AI native — e provamos, com número.</a:t>
+              <a:t>Tornamos a sua empresa AI native. E provamos, com número.</a:t>
             </a:r>
             <a:endParaRPr lang="en-US" sz="3000" dirty="0"/>
           </a:p>
@@ -988,7 +988,7 @@
         <p:spPr>
           <a:xfrm>
             <a:off x="822960" y="2148840"/>
-            <a:ext cx="10543032" cy="960120"/>
+            <a:ext cx="10543032" cy="1051560"/>
           </a:xfrm>
           <a:prstGeom prst="rect">
             <a:avLst/>
@@ -1015,7 +1015,7 @@
                 <a:ea typeface="Calibri" pitchFamily="34" charset="-122"/>
                 <a:cs typeface="Calibri" pitchFamily="34" charset="-120"/>
               </a:rPr>
-              <a:t>Mais de 80% dos projetos de IA falham — o dobro dos projetos comuns de tecnologia — e a causa número um é começar sem combinar o que seria dar certo (RAND). Nós trabalhamos exatamente aí: cada caso nasce com a métrica combinada por escrito, é medido por terceiro e assinado por gente da sua empresa.</a:t>
+              <a:t>De cada dez empresas que decidiram usar IA este ano, mais de oito não vão conseguir mostrar um número no fim (RAND: mais de 80% falham, o dobro dos projetos comuns de tecnologia). Não é falta de tecnologia: é a IA entrando pela ponta, na mão de uma pessoa, em vez de entrar pela veia, dentro do processo. Nós fazemos a IA rodar dentro do processo que dói, com o número que define sucesso combinado por escrito antes, medido de fora depois.</a:t>
             </a:r>
             <a:endParaRPr lang="en-US" sz="1350" dirty="0"/>
           </a:p>
@@ -1029,7 +1029,7 @@
         </p:nvSpPr>
         <p:spPr>
           <a:xfrm>
-            <a:off x="822960" y="3291840"/>
+            <a:off x="822960" y="3337560"/>
             <a:ext cx="3270504" cy="0"/>
           </a:xfrm>
           <a:prstGeom prst="line">
@@ -1052,7 +1052,7 @@
         </p:nvSpPr>
         <p:spPr>
           <a:xfrm>
-            <a:off x="822960" y="3429000"/>
+            <a:off x="822960" y="3474720"/>
             <a:ext cx="3270504" cy="292608"/>
           </a:xfrm>
           <a:prstGeom prst="rect">
@@ -1091,7 +1091,7 @@
         </p:nvSpPr>
         <p:spPr>
           <a:xfrm>
-            <a:off x="822960" y="3767328"/>
+            <a:off x="822960" y="3813048"/>
             <a:ext cx="3270504" cy="1737360"/>
           </a:xfrm>
           <a:prstGeom prst="rect">
@@ -1133,7 +1133,7 @@
         </p:nvSpPr>
         <p:spPr>
           <a:xfrm>
-            <a:off x="4459224" y="3291840"/>
+            <a:off x="4459224" y="3337560"/>
             <a:ext cx="3270504" cy="0"/>
           </a:xfrm>
           <a:prstGeom prst="line">
@@ -1156,7 +1156,7 @@
         </p:nvSpPr>
         <p:spPr>
           <a:xfrm>
-            <a:off x="4459224" y="3429000"/>
+            <a:off x="4459224" y="3474720"/>
             <a:ext cx="3270504" cy="292608"/>
           </a:xfrm>
           <a:prstGeom prst="rect">
@@ -1181,7 +1181,7 @@
                 <a:ea typeface="Calibri" pitchFamily="34" charset="-122"/>
                 <a:cs typeface="Calibri" pitchFamily="34" charset="-120"/>
               </a:rPr>
-              <a:t>2 · O PROGRAMA — UM ANO</a:t>
+              <a:t>2 · O PROGRAMA · UM ANO</a:t>
             </a:r>
             <a:endParaRPr lang="en-US" sz="1050" dirty="0"/>
           </a:p>
@@ -1195,7 +1195,7 @@
         </p:nvSpPr>
         <p:spPr>
           <a:xfrm>
-            <a:off x="4459224" y="3767328"/>
+            <a:off x="4459224" y="3813048"/>
             <a:ext cx="3270504" cy="1737360"/>
           </a:xfrm>
           <a:prstGeom prst="rect">
@@ -1223,7 +1223,7 @@
                 <a:ea typeface="Calibri" pitchFamily="34" charset="-122"/>
                 <a:cs typeface="Calibri" pitchFamily="34" charset="-120"/>
               </a:rPr>
-              <a:t>Três fases: a Prova (um caso construído e medido em seis semanas), a Construção (sistemas em produção + a sua equipe formada) e a Durabilidade (a capacidade rodando sem consultor no meio). Porta de saída limpa em cada fase.</a:t>
+              <a:t>Três fases: a Prova (um caso construído e medido em seis semanas), a Construção (sistemas em produção e a sua equipe formada) e a Durabilidade (a capacidade rodando sem consultor no meio). Porta de saída limpa em cada fase.</a:t>
             </a:r>
             <a:endParaRPr lang="en-US" sz="1150" dirty="0"/>
           </a:p>
@@ -1237,7 +1237,7 @@
         </p:nvSpPr>
         <p:spPr>
           <a:xfrm>
-            <a:off x="8095488" y="3291840"/>
+            <a:off x="8095488" y="3337560"/>
             <a:ext cx="3270504" cy="0"/>
           </a:xfrm>
           <a:prstGeom prst="line">
@@ -1260,7 +1260,7 @@
         </p:nvSpPr>
         <p:spPr>
           <a:xfrm>
-            <a:off x="8095488" y="3429000"/>
+            <a:off x="8095488" y="3474720"/>
             <a:ext cx="3270504" cy="292608"/>
           </a:xfrm>
           <a:prstGeom prst="rect">
@@ -1299,7 +1299,7 @@
         </p:nvSpPr>
         <p:spPr>
           <a:xfrm>
-            <a:off x="8095488" y="3767328"/>
+            <a:off x="8095488" y="3813048"/>
             <a:ext cx="3270504" cy="1737360"/>
           </a:xfrm>
           <a:prstGeom prst="rect">
@@ -1327,7 +1327,7 @@
                 <a:ea typeface="Calibri" pitchFamily="34" charset="-122"/>
                 <a:cs typeface="Calibri" pitchFamily="34" charset="-120"/>
               </a:rPr>
-              <a:t>A relação vira medição anual: operação acompanhada, conselho trimestral e o Exame Anual de IA — a maturidade re-medida e comparada ano contra ano. Quem já tem IA rodando entra pelo Conselheiro de IA.</a:t>
+              <a:t>A relação vira medição anual: operação acompanhada, conselho trimestral e o Exame Anual de IA, a maturidade re-medida e comparada ano contra ano. Quem já tem IA rodando entra pelo Conselheiro de IA.</a:t>
             </a:r>
             <a:endParaRPr lang="en-US" sz="1150" dirty="0"/>
           </a:p>
